--- a/SplunkEvaluationPresentation.pptx
+++ b/SplunkEvaluationPresentation.pptx
@@ -5,7 +5,7 @@
     <p:sldMasterId id="2147483648" r:id="rId1"/>
   </p:sldMasterIdLst>
   <p:notesMasterIdLst>
-    <p:notesMasterId r:id="rId31"/>
+    <p:notesMasterId r:id="rId26"/>
   </p:notesMasterIdLst>
   <p:sldIdLst>
     <p:sldId id="256" r:id="rId2"/>
@@ -15,43 +15,38 @@
     <p:sldId id="260" r:id="rId6"/>
     <p:sldId id="261" r:id="rId7"/>
     <p:sldId id="262" r:id="rId8"/>
-    <p:sldId id="263" r:id="rId9"/>
-    <p:sldId id="264" r:id="rId10"/>
-    <p:sldId id="265" r:id="rId11"/>
-    <p:sldId id="266" r:id="rId12"/>
-    <p:sldId id="267" r:id="rId13"/>
-    <p:sldId id="268" r:id="rId14"/>
-    <p:sldId id="269" r:id="rId15"/>
-    <p:sldId id="270" r:id="rId16"/>
-    <p:sldId id="271" r:id="rId17"/>
-    <p:sldId id="272" r:id="rId18"/>
-    <p:sldId id="273" r:id="rId19"/>
-    <p:sldId id="274" r:id="rId20"/>
-    <p:sldId id="275" r:id="rId21"/>
-    <p:sldId id="276" r:id="rId22"/>
-    <p:sldId id="277" r:id="rId23"/>
-    <p:sldId id="278" r:id="rId24"/>
-    <p:sldId id="279" r:id="rId25"/>
-    <p:sldId id="280" r:id="rId26"/>
-    <p:sldId id="281" r:id="rId27"/>
-    <p:sldId id="282" r:id="rId28"/>
-    <p:sldId id="283" r:id="rId29"/>
-    <p:sldId id="284" r:id="rId30"/>
+    <p:sldId id="266" r:id="rId9"/>
+    <p:sldId id="268" r:id="rId10"/>
+    <p:sldId id="269" r:id="rId11"/>
+    <p:sldId id="270" r:id="rId12"/>
+    <p:sldId id="271" r:id="rId13"/>
+    <p:sldId id="273" r:id="rId14"/>
+    <p:sldId id="274" r:id="rId15"/>
+    <p:sldId id="275" r:id="rId16"/>
+    <p:sldId id="276" r:id="rId17"/>
+    <p:sldId id="277" r:id="rId18"/>
+    <p:sldId id="278" r:id="rId19"/>
+    <p:sldId id="279" r:id="rId20"/>
+    <p:sldId id="280" r:id="rId21"/>
+    <p:sldId id="281" r:id="rId22"/>
+    <p:sldId id="282" r:id="rId23"/>
+    <p:sldId id="283" r:id="rId24"/>
+    <p:sldId id="284" r:id="rId25"/>
   </p:sldIdLst>
   <p:sldSz cx="18288000" cy="10287000"/>
   <p:notesSz cx="18288000" cy="10287000"/>
   <p:embeddedFontLst>
     <p:embeddedFont>
       <p:font typeface="Tahoma" panose="020B0604030504040204" pitchFamily="34" charset="0"/>
-      <p:regular r:id="rId32"/>
-      <p:bold r:id="rId33"/>
+      <p:regular r:id="rId27"/>
+      <p:bold r:id="rId28"/>
     </p:embeddedFont>
     <p:embeddedFont>
       <p:font typeface="Verdana" panose="020B0604030504040204" pitchFamily="34" charset="0"/>
-      <p:regular r:id="rId34"/>
-      <p:bold r:id="rId35"/>
-      <p:italic r:id="rId36"/>
-      <p:boldItalic r:id="rId37"/>
+      <p:regular r:id="rId29"/>
+      <p:bold r:id="rId30"/>
+      <p:italic r:id="rId31"/>
+      <p:boldItalic r:id="rId32"/>
     </p:embeddedFont>
   </p:embeddedFontLst>
   <p:defaultTextStyle>
@@ -299,7 +294,7 @@
       </p15:sldGuideLst>
     </p:ext>
     <p:ext uri="GoogleSlidesCustomDataVersion2">
-      <go:slidesCustomData xmlns:go="http://customooxmlschemas.google.com/" xmlns:ahyp="http://schemas.microsoft.com/office/drawing/2018/hyperlinkcolor" xmlns:p15="http://schemas.microsoft.com/office/powerpoint/2012/main" xmlns:p14="http://schemas.microsoft.com/office/powerpoint/2010/main" xmlns:com="http://schemas.openxmlformats.org/drawingml/2006/compatibility" xmlns:pvml="urn:schemas-microsoft-com:office:powerpoint" xmlns:v="urn:schemas-microsoft-com:vml" xmlns:o="urn:schemas-microsoft-com:office:office" xmlns:dgm="http://schemas.openxmlformats.org/drawingml/2006/diagram" xmlns:c="http://schemas.openxmlformats.org/drawingml/2006/chart" xmlns:mv="urn:schemas-microsoft-com:mac:vml" xmlns:mc="http://schemas.openxmlformats.org/markup-compatibility/2006" xmlns="" r:id="rId38" roundtripDataSignature="AMtx7mh47rL1fQnCbjzl/x4iq8XIAmQU+w=="/>
+      <go:slidesCustomData xmlns="" xmlns:mc="http://schemas.openxmlformats.org/markup-compatibility/2006" xmlns:mv="urn:schemas-microsoft-com:mac:vml" xmlns:c="http://schemas.openxmlformats.org/drawingml/2006/chart" xmlns:dgm="http://schemas.openxmlformats.org/drawingml/2006/diagram" xmlns:o="urn:schemas-microsoft-com:office:office" xmlns:v="urn:schemas-microsoft-com:vml" xmlns:pvml="urn:schemas-microsoft-com:office:powerpoint" xmlns:com="http://schemas.openxmlformats.org/drawingml/2006/compatibility" xmlns:p14="http://schemas.microsoft.com/office/powerpoint/2010/main" xmlns:p15="http://schemas.microsoft.com/office/powerpoint/2012/main" xmlns:ahyp="http://schemas.microsoft.com/office/drawing/2018/hyperlinkcolor" xmlns:go="http://customooxmlschemas.google.com/" r:id="rId38" roundtripDataSignature="AMtx7mh47rL1fQnCbjzl/x4iq8XIAmQU+w=="/>
     </p:ext>
   </p:extLst>
 </p:presentation>
@@ -1375,7 +1370,7 @@
   <p:cSld>
     <p:spTree>
       <p:nvGrpSpPr>
-        <p:cNvPr id="1" name="Shape 120"/>
+        <p:cNvPr id="1" name="Shape 166"/>
         <p:cNvGrpSpPr/>
         <p:nvPr/>
       </p:nvGrpSpPr>
@@ -1389,7 +1384,7 @@
       </p:grpSpPr>
       <p:sp>
         <p:nvSpPr>
-          <p:cNvPr id="121" name="Google Shape;121;p10:notes"/>
+          <p:cNvPr id="167" name="Google Shape;167;p13:notes"/>
           <p:cNvSpPr txBox="1">
             <a:spLocks noGrp="1"/>
           </p:cNvSpPr>
@@ -1427,7 +1422,7 @@
       </p:sp>
       <p:sp>
         <p:nvSpPr>
-          <p:cNvPr id="122" name="Google Shape;122;p10:notes"/>
+          <p:cNvPr id="168" name="Google Shape;168;p13:notes"/>
           <p:cNvSpPr>
             <a:spLocks noGrp="1" noRot="1" noChangeAspect="1"/>
           </p:cNvSpPr>
@@ -1479,7 +1474,7 @@
   <p:cSld>
     <p:spTree>
       <p:nvGrpSpPr>
-        <p:cNvPr id="1" name="Shape 133"/>
+        <p:cNvPr id="1" name="Shape 179"/>
         <p:cNvGrpSpPr/>
         <p:nvPr/>
       </p:nvGrpSpPr>
@@ -1493,7 +1488,7 @@
       </p:grpSpPr>
       <p:sp>
         <p:nvSpPr>
-          <p:cNvPr id="134" name="Google Shape;134;p11:notes"/>
+          <p:cNvPr id="180" name="Google Shape;180;p14:notes"/>
           <p:cNvSpPr txBox="1">
             <a:spLocks noGrp="1"/>
           </p:cNvSpPr>
@@ -1531,7 +1526,7 @@
       </p:sp>
       <p:sp>
         <p:nvSpPr>
-          <p:cNvPr id="135" name="Google Shape;135;p11:notes"/>
+          <p:cNvPr id="181" name="Google Shape;181;p14:notes"/>
           <p:cNvSpPr>
             <a:spLocks noGrp="1" noRot="1" noChangeAspect="1"/>
           </p:cNvSpPr>
@@ -1583,7 +1578,7 @@
   <p:cSld>
     <p:spTree>
       <p:nvGrpSpPr>
-        <p:cNvPr id="1" name="Shape 143"/>
+        <p:cNvPr id="1" name="Shape 192"/>
         <p:cNvGrpSpPr/>
         <p:nvPr/>
       </p:nvGrpSpPr>
@@ -1597,7 +1592,7 @@
       </p:grpSpPr>
       <p:sp>
         <p:nvSpPr>
-          <p:cNvPr id="144" name="Google Shape;144;p12:notes"/>
+          <p:cNvPr id="193" name="Google Shape;193;p15:notes"/>
           <p:cNvSpPr txBox="1">
             <a:spLocks noGrp="1"/>
           </p:cNvSpPr>
@@ -1635,7 +1630,7 @@
       </p:sp>
       <p:sp>
         <p:nvSpPr>
-          <p:cNvPr id="145" name="Google Shape;145;p12:notes"/>
+          <p:cNvPr id="194" name="Google Shape;194;p15:notes"/>
           <p:cNvSpPr>
             <a:spLocks noGrp="1" noRot="1" noChangeAspect="1"/>
           </p:cNvSpPr>
@@ -1687,7 +1682,7 @@
   <p:cSld>
     <p:spTree>
       <p:nvGrpSpPr>
-        <p:cNvPr id="1" name="Shape 156"/>
+        <p:cNvPr id="1" name="Shape 214"/>
         <p:cNvGrpSpPr/>
         <p:nvPr/>
       </p:nvGrpSpPr>
@@ -1701,7 +1696,7 @@
       </p:grpSpPr>
       <p:sp>
         <p:nvSpPr>
-          <p:cNvPr id="157" name="Google Shape;157;p16:notes"/>
+          <p:cNvPr id="215" name="Google Shape;215;p18:notes"/>
           <p:cNvSpPr txBox="1">
             <a:spLocks noGrp="1"/>
           </p:cNvSpPr>
@@ -1739,7 +1734,7 @@
       </p:sp>
       <p:sp>
         <p:nvSpPr>
-          <p:cNvPr id="158" name="Google Shape;158;p16:notes"/>
+          <p:cNvPr id="216" name="Google Shape;216;p18:notes"/>
           <p:cNvSpPr>
             <a:spLocks noGrp="1" noRot="1" noChangeAspect="1"/>
           </p:cNvSpPr>
@@ -1791,7 +1786,7 @@
   <p:cSld>
     <p:spTree>
       <p:nvGrpSpPr>
-        <p:cNvPr id="1" name="Shape 166"/>
+        <p:cNvPr id="1" name="Shape 220"/>
         <p:cNvGrpSpPr/>
         <p:nvPr/>
       </p:nvGrpSpPr>
@@ -1805,7 +1800,7 @@
       </p:grpSpPr>
       <p:sp>
         <p:nvSpPr>
-          <p:cNvPr id="167" name="Google Shape;167;p13:notes"/>
+          <p:cNvPr id="221" name="Google Shape;221;p19:notes"/>
           <p:cNvSpPr txBox="1">
             <a:spLocks noGrp="1"/>
           </p:cNvSpPr>
@@ -1843,7 +1838,7 @@
       </p:sp>
       <p:sp>
         <p:nvSpPr>
-          <p:cNvPr id="168" name="Google Shape;168;p13:notes"/>
+          <p:cNvPr id="222" name="Google Shape;222;p19:notes"/>
           <p:cNvSpPr>
             <a:spLocks noGrp="1" noRot="1" noChangeAspect="1"/>
           </p:cNvSpPr>
@@ -1895,7 +1890,7 @@
   <p:cSld>
     <p:spTree>
       <p:nvGrpSpPr>
-        <p:cNvPr id="1" name="Shape 179"/>
+        <p:cNvPr id="1" name="Shape 234"/>
         <p:cNvGrpSpPr/>
         <p:nvPr/>
       </p:nvGrpSpPr>
@@ -1909,7 +1904,7 @@
       </p:grpSpPr>
       <p:sp>
         <p:nvSpPr>
-          <p:cNvPr id="180" name="Google Shape;180;p14:notes"/>
+          <p:cNvPr id="235" name="Google Shape;235;p20:notes"/>
           <p:cNvSpPr txBox="1">
             <a:spLocks noGrp="1"/>
           </p:cNvSpPr>
@@ -1947,7 +1942,7 @@
       </p:sp>
       <p:sp>
         <p:nvSpPr>
-          <p:cNvPr id="181" name="Google Shape;181;p14:notes"/>
+          <p:cNvPr id="236" name="Google Shape;236;p20:notes"/>
           <p:cNvSpPr>
             <a:spLocks noGrp="1" noRot="1" noChangeAspect="1"/>
           </p:cNvSpPr>
@@ -1999,7 +1994,7 @@
   <p:cSld>
     <p:spTree>
       <p:nvGrpSpPr>
-        <p:cNvPr id="1" name="Shape 192"/>
+        <p:cNvPr id="1" name="Shape 248"/>
         <p:cNvGrpSpPr/>
         <p:nvPr/>
       </p:nvGrpSpPr>
@@ -2013,7 +2008,7 @@
       </p:grpSpPr>
       <p:sp>
         <p:nvSpPr>
-          <p:cNvPr id="193" name="Google Shape;193;p15:notes"/>
+          <p:cNvPr id="249" name="Google Shape;249;p21:notes"/>
           <p:cNvSpPr txBox="1">
             <a:spLocks noGrp="1"/>
           </p:cNvSpPr>
@@ -2051,7 +2046,7 @@
       </p:sp>
       <p:sp>
         <p:nvSpPr>
-          <p:cNvPr id="194" name="Google Shape;194;p15:notes"/>
+          <p:cNvPr id="250" name="Google Shape;250;p21:notes"/>
           <p:cNvSpPr>
             <a:spLocks noGrp="1" noRot="1" noChangeAspect="1"/>
           </p:cNvSpPr>
@@ -2103,7 +2098,7 @@
   <p:cSld>
     <p:spTree>
       <p:nvGrpSpPr>
-        <p:cNvPr id="1" name="Shape 201"/>
+        <p:cNvPr id="1" name="Shape 256"/>
         <p:cNvGrpSpPr/>
         <p:nvPr/>
       </p:nvGrpSpPr>
@@ -2117,7 +2112,7 @@
       </p:grpSpPr>
       <p:sp>
         <p:nvSpPr>
-          <p:cNvPr id="202" name="Google Shape;202;p17:notes"/>
+          <p:cNvPr id="257" name="Google Shape;257;p22:notes"/>
           <p:cNvSpPr txBox="1">
             <a:spLocks noGrp="1"/>
           </p:cNvSpPr>
@@ -2155,7 +2150,7 @@
       </p:sp>
       <p:sp>
         <p:nvSpPr>
-          <p:cNvPr id="203" name="Google Shape;203;p17:notes"/>
+          <p:cNvPr id="258" name="Google Shape;258;p22:notes"/>
           <p:cNvSpPr>
             <a:spLocks noGrp="1" noRot="1" noChangeAspect="1"/>
           </p:cNvSpPr>
@@ -2207,7 +2202,7 @@
   <p:cSld>
     <p:spTree>
       <p:nvGrpSpPr>
-        <p:cNvPr id="1" name="Shape 214"/>
+        <p:cNvPr id="1" name="Shape 263"/>
         <p:cNvGrpSpPr/>
         <p:nvPr/>
       </p:nvGrpSpPr>
@@ -2221,7 +2216,7 @@
       </p:grpSpPr>
       <p:sp>
         <p:nvSpPr>
-          <p:cNvPr id="215" name="Google Shape;215;p18:notes"/>
+          <p:cNvPr id="264" name="Google Shape;264;p23:notes"/>
           <p:cNvSpPr txBox="1">
             <a:spLocks noGrp="1"/>
           </p:cNvSpPr>
@@ -2259,7 +2254,7 @@
       </p:sp>
       <p:sp>
         <p:nvSpPr>
-          <p:cNvPr id="216" name="Google Shape;216;p18:notes"/>
+          <p:cNvPr id="265" name="Google Shape;265;p23:notes"/>
           <p:cNvSpPr>
             <a:spLocks noGrp="1" noRot="1" noChangeAspect="1"/>
           </p:cNvSpPr>
@@ -2311,7 +2306,7 @@
   <p:cSld>
     <p:spTree>
       <p:nvGrpSpPr>
-        <p:cNvPr id="1" name="Shape 220"/>
+        <p:cNvPr id="1" name="Shape 269"/>
         <p:cNvGrpSpPr/>
         <p:nvPr/>
       </p:nvGrpSpPr>
@@ -2325,7 +2320,7 @@
       </p:grpSpPr>
       <p:sp>
         <p:nvSpPr>
-          <p:cNvPr id="221" name="Google Shape;221;p19:notes"/>
+          <p:cNvPr id="270" name="Google Shape;270;p24:notes"/>
           <p:cNvSpPr txBox="1">
             <a:spLocks noGrp="1"/>
           </p:cNvSpPr>
@@ -2363,7 +2358,7 @@
       </p:sp>
       <p:sp>
         <p:nvSpPr>
-          <p:cNvPr id="222" name="Google Shape;222;p19:notes"/>
+          <p:cNvPr id="271" name="Google Shape;271;p24:notes"/>
           <p:cNvSpPr>
             <a:spLocks noGrp="1" noRot="1" noChangeAspect="1"/>
           </p:cNvSpPr>
@@ -2519,526 +2514,6 @@
   <p:cSld>
     <p:spTree>
       <p:nvGrpSpPr>
-        <p:cNvPr id="1" name="Shape 234"/>
-        <p:cNvGrpSpPr/>
-        <p:nvPr/>
-      </p:nvGrpSpPr>
-      <p:grpSpPr>
-        <a:xfrm>
-          <a:off x="0" y="0"/>
-          <a:ext cx="0" cy="0"/>
-          <a:chOff x="0" y="0"/>
-          <a:chExt cx="0" cy="0"/>
-        </a:xfrm>
-      </p:grpSpPr>
-      <p:sp>
-        <p:nvSpPr>
-          <p:cNvPr id="235" name="Google Shape;235;p20:notes"/>
-          <p:cNvSpPr txBox="1">
-            <a:spLocks noGrp="1"/>
-          </p:cNvSpPr>
-          <p:nvPr>
-            <p:ph type="body" idx="1"/>
-          </p:nvPr>
-        </p:nvSpPr>
-        <p:spPr>
-          <a:xfrm>
-            <a:off x="1828800" y="4951413"/>
-            <a:ext cx="14630400" cy="4049712"/>
-          </a:xfrm>
-          <a:prstGeom prst="rect">
-            <a:avLst/>
-          </a:prstGeom>
-        </p:spPr>
-        <p:txBody>
-          <a:bodyPr spcFirstLastPara="1" wrap="square" lIns="91425" tIns="45700" rIns="91425" bIns="45700" anchor="t" anchorCtr="0">
-            <a:noAutofit/>
-          </a:bodyPr>
-          <a:lstStyle/>
-          <a:p>
-            <a:pPr marL="0" lvl="0" indent="0" algn="l" rtl="0">
-              <a:spcBef>
-                <a:spcPts val="0"/>
-              </a:spcBef>
-              <a:spcAft>
-                <a:spcPts val="0"/>
-              </a:spcAft>
-              <a:buNone/>
-            </a:pPr>
-            <a:endParaRPr/>
-          </a:p>
-        </p:txBody>
-      </p:sp>
-      <p:sp>
-        <p:nvSpPr>
-          <p:cNvPr id="236" name="Google Shape;236;p20:notes"/>
-          <p:cNvSpPr>
-            <a:spLocks noGrp="1" noRot="1" noChangeAspect="1"/>
-          </p:cNvSpPr>
-          <p:nvPr>
-            <p:ph type="sldImg" idx="2"/>
-          </p:nvPr>
-        </p:nvSpPr>
-        <p:spPr>
-          <a:xfrm>
-            <a:off x="6057900" y="1285875"/>
-            <a:ext cx="6172200" cy="3471863"/>
-          </a:xfrm>
-          <a:custGeom>
-            <a:avLst/>
-            <a:gdLst/>
-            <a:ahLst/>
-            <a:cxnLst/>
-            <a:rect l="l" t="t" r="r" b="b"/>
-            <a:pathLst>
-              <a:path w="120000" h="120000" extrusionOk="0">
-                <a:moveTo>
-                  <a:pt x="0" y="0"/>
-                </a:moveTo>
-                <a:lnTo>
-                  <a:pt x="120000" y="0"/>
-                </a:lnTo>
-                <a:lnTo>
-                  <a:pt x="120000" y="120000"/>
-                </a:lnTo>
-                <a:lnTo>
-                  <a:pt x="0" y="120000"/>
-                </a:lnTo>
-                <a:close/>
-              </a:path>
-            </a:pathLst>
-          </a:custGeom>
-        </p:spPr>
-      </p:sp>
-    </p:spTree>
-  </p:cSld>
-  <p:clrMapOvr>
-    <a:masterClrMapping/>
-  </p:clrMapOvr>
-</p:notes>
-</file>
-
-<file path=ppt/notesSlides/notesSlide21.xml><?xml version="1.0" encoding="utf-8"?>
-<p:notes xmlns:a="http://schemas.openxmlformats.org/drawingml/2006/main" xmlns:r="http://schemas.openxmlformats.org/officeDocument/2006/relationships" xmlns:p="http://schemas.openxmlformats.org/presentationml/2006/main" showMasterSp="0" showMasterPhAnim="0">
-  <p:cSld>
-    <p:spTree>
-      <p:nvGrpSpPr>
-        <p:cNvPr id="1" name="Shape 248"/>
-        <p:cNvGrpSpPr/>
-        <p:nvPr/>
-      </p:nvGrpSpPr>
-      <p:grpSpPr>
-        <a:xfrm>
-          <a:off x="0" y="0"/>
-          <a:ext cx="0" cy="0"/>
-          <a:chOff x="0" y="0"/>
-          <a:chExt cx="0" cy="0"/>
-        </a:xfrm>
-      </p:grpSpPr>
-      <p:sp>
-        <p:nvSpPr>
-          <p:cNvPr id="249" name="Google Shape;249;p21:notes"/>
-          <p:cNvSpPr txBox="1">
-            <a:spLocks noGrp="1"/>
-          </p:cNvSpPr>
-          <p:nvPr>
-            <p:ph type="body" idx="1"/>
-          </p:nvPr>
-        </p:nvSpPr>
-        <p:spPr>
-          <a:xfrm>
-            <a:off x="1828800" y="4951413"/>
-            <a:ext cx="14630400" cy="4049712"/>
-          </a:xfrm>
-          <a:prstGeom prst="rect">
-            <a:avLst/>
-          </a:prstGeom>
-        </p:spPr>
-        <p:txBody>
-          <a:bodyPr spcFirstLastPara="1" wrap="square" lIns="91425" tIns="45700" rIns="91425" bIns="45700" anchor="t" anchorCtr="0">
-            <a:noAutofit/>
-          </a:bodyPr>
-          <a:lstStyle/>
-          <a:p>
-            <a:pPr marL="0" lvl="0" indent="0" algn="l" rtl="0">
-              <a:spcBef>
-                <a:spcPts val="0"/>
-              </a:spcBef>
-              <a:spcAft>
-                <a:spcPts val="0"/>
-              </a:spcAft>
-              <a:buNone/>
-            </a:pPr>
-            <a:endParaRPr/>
-          </a:p>
-        </p:txBody>
-      </p:sp>
-      <p:sp>
-        <p:nvSpPr>
-          <p:cNvPr id="250" name="Google Shape;250;p21:notes"/>
-          <p:cNvSpPr>
-            <a:spLocks noGrp="1" noRot="1" noChangeAspect="1"/>
-          </p:cNvSpPr>
-          <p:nvPr>
-            <p:ph type="sldImg" idx="2"/>
-          </p:nvPr>
-        </p:nvSpPr>
-        <p:spPr>
-          <a:xfrm>
-            <a:off x="6057900" y="1285875"/>
-            <a:ext cx="6172200" cy="3471863"/>
-          </a:xfrm>
-          <a:custGeom>
-            <a:avLst/>
-            <a:gdLst/>
-            <a:ahLst/>
-            <a:cxnLst/>
-            <a:rect l="l" t="t" r="r" b="b"/>
-            <a:pathLst>
-              <a:path w="120000" h="120000" extrusionOk="0">
-                <a:moveTo>
-                  <a:pt x="0" y="0"/>
-                </a:moveTo>
-                <a:lnTo>
-                  <a:pt x="120000" y="0"/>
-                </a:lnTo>
-                <a:lnTo>
-                  <a:pt x="120000" y="120000"/>
-                </a:lnTo>
-                <a:lnTo>
-                  <a:pt x="0" y="120000"/>
-                </a:lnTo>
-                <a:close/>
-              </a:path>
-            </a:pathLst>
-          </a:custGeom>
-        </p:spPr>
-      </p:sp>
-    </p:spTree>
-  </p:cSld>
-  <p:clrMapOvr>
-    <a:masterClrMapping/>
-  </p:clrMapOvr>
-</p:notes>
-</file>
-
-<file path=ppt/notesSlides/notesSlide22.xml><?xml version="1.0" encoding="utf-8"?>
-<p:notes xmlns:a="http://schemas.openxmlformats.org/drawingml/2006/main" xmlns:r="http://schemas.openxmlformats.org/officeDocument/2006/relationships" xmlns:p="http://schemas.openxmlformats.org/presentationml/2006/main" showMasterSp="0" showMasterPhAnim="0">
-  <p:cSld>
-    <p:spTree>
-      <p:nvGrpSpPr>
-        <p:cNvPr id="1" name="Shape 256"/>
-        <p:cNvGrpSpPr/>
-        <p:nvPr/>
-      </p:nvGrpSpPr>
-      <p:grpSpPr>
-        <a:xfrm>
-          <a:off x="0" y="0"/>
-          <a:ext cx="0" cy="0"/>
-          <a:chOff x="0" y="0"/>
-          <a:chExt cx="0" cy="0"/>
-        </a:xfrm>
-      </p:grpSpPr>
-      <p:sp>
-        <p:nvSpPr>
-          <p:cNvPr id="257" name="Google Shape;257;p22:notes"/>
-          <p:cNvSpPr txBox="1">
-            <a:spLocks noGrp="1"/>
-          </p:cNvSpPr>
-          <p:nvPr>
-            <p:ph type="body" idx="1"/>
-          </p:nvPr>
-        </p:nvSpPr>
-        <p:spPr>
-          <a:xfrm>
-            <a:off x="1828800" y="4951413"/>
-            <a:ext cx="14630400" cy="4049712"/>
-          </a:xfrm>
-          <a:prstGeom prst="rect">
-            <a:avLst/>
-          </a:prstGeom>
-        </p:spPr>
-        <p:txBody>
-          <a:bodyPr spcFirstLastPara="1" wrap="square" lIns="91425" tIns="45700" rIns="91425" bIns="45700" anchor="t" anchorCtr="0">
-            <a:noAutofit/>
-          </a:bodyPr>
-          <a:lstStyle/>
-          <a:p>
-            <a:pPr marL="0" lvl="0" indent="0" algn="l" rtl="0">
-              <a:spcBef>
-                <a:spcPts val="0"/>
-              </a:spcBef>
-              <a:spcAft>
-                <a:spcPts val="0"/>
-              </a:spcAft>
-              <a:buNone/>
-            </a:pPr>
-            <a:endParaRPr/>
-          </a:p>
-        </p:txBody>
-      </p:sp>
-      <p:sp>
-        <p:nvSpPr>
-          <p:cNvPr id="258" name="Google Shape;258;p22:notes"/>
-          <p:cNvSpPr>
-            <a:spLocks noGrp="1" noRot="1" noChangeAspect="1"/>
-          </p:cNvSpPr>
-          <p:nvPr>
-            <p:ph type="sldImg" idx="2"/>
-          </p:nvPr>
-        </p:nvSpPr>
-        <p:spPr>
-          <a:xfrm>
-            <a:off x="6057900" y="1285875"/>
-            <a:ext cx="6172200" cy="3471863"/>
-          </a:xfrm>
-          <a:custGeom>
-            <a:avLst/>
-            <a:gdLst/>
-            <a:ahLst/>
-            <a:cxnLst/>
-            <a:rect l="l" t="t" r="r" b="b"/>
-            <a:pathLst>
-              <a:path w="120000" h="120000" extrusionOk="0">
-                <a:moveTo>
-                  <a:pt x="0" y="0"/>
-                </a:moveTo>
-                <a:lnTo>
-                  <a:pt x="120000" y="0"/>
-                </a:lnTo>
-                <a:lnTo>
-                  <a:pt x="120000" y="120000"/>
-                </a:lnTo>
-                <a:lnTo>
-                  <a:pt x="0" y="120000"/>
-                </a:lnTo>
-                <a:close/>
-              </a:path>
-            </a:pathLst>
-          </a:custGeom>
-        </p:spPr>
-      </p:sp>
-    </p:spTree>
-  </p:cSld>
-  <p:clrMapOvr>
-    <a:masterClrMapping/>
-  </p:clrMapOvr>
-</p:notes>
-</file>
-
-<file path=ppt/notesSlides/notesSlide23.xml><?xml version="1.0" encoding="utf-8"?>
-<p:notes xmlns:a="http://schemas.openxmlformats.org/drawingml/2006/main" xmlns:r="http://schemas.openxmlformats.org/officeDocument/2006/relationships" xmlns:p="http://schemas.openxmlformats.org/presentationml/2006/main" showMasterSp="0" showMasterPhAnim="0">
-  <p:cSld>
-    <p:spTree>
-      <p:nvGrpSpPr>
-        <p:cNvPr id="1" name="Shape 263"/>
-        <p:cNvGrpSpPr/>
-        <p:nvPr/>
-      </p:nvGrpSpPr>
-      <p:grpSpPr>
-        <a:xfrm>
-          <a:off x="0" y="0"/>
-          <a:ext cx="0" cy="0"/>
-          <a:chOff x="0" y="0"/>
-          <a:chExt cx="0" cy="0"/>
-        </a:xfrm>
-      </p:grpSpPr>
-      <p:sp>
-        <p:nvSpPr>
-          <p:cNvPr id="264" name="Google Shape;264;p23:notes"/>
-          <p:cNvSpPr txBox="1">
-            <a:spLocks noGrp="1"/>
-          </p:cNvSpPr>
-          <p:nvPr>
-            <p:ph type="body" idx="1"/>
-          </p:nvPr>
-        </p:nvSpPr>
-        <p:spPr>
-          <a:xfrm>
-            <a:off x="1828800" y="4951413"/>
-            <a:ext cx="14630400" cy="4049712"/>
-          </a:xfrm>
-          <a:prstGeom prst="rect">
-            <a:avLst/>
-          </a:prstGeom>
-        </p:spPr>
-        <p:txBody>
-          <a:bodyPr spcFirstLastPara="1" wrap="square" lIns="91425" tIns="45700" rIns="91425" bIns="45700" anchor="t" anchorCtr="0">
-            <a:noAutofit/>
-          </a:bodyPr>
-          <a:lstStyle/>
-          <a:p>
-            <a:pPr marL="0" lvl="0" indent="0" algn="l" rtl="0">
-              <a:spcBef>
-                <a:spcPts val="0"/>
-              </a:spcBef>
-              <a:spcAft>
-                <a:spcPts val="0"/>
-              </a:spcAft>
-              <a:buNone/>
-            </a:pPr>
-            <a:endParaRPr/>
-          </a:p>
-        </p:txBody>
-      </p:sp>
-      <p:sp>
-        <p:nvSpPr>
-          <p:cNvPr id="265" name="Google Shape;265;p23:notes"/>
-          <p:cNvSpPr>
-            <a:spLocks noGrp="1" noRot="1" noChangeAspect="1"/>
-          </p:cNvSpPr>
-          <p:nvPr>
-            <p:ph type="sldImg" idx="2"/>
-          </p:nvPr>
-        </p:nvSpPr>
-        <p:spPr>
-          <a:xfrm>
-            <a:off x="6057900" y="1285875"/>
-            <a:ext cx="6172200" cy="3471863"/>
-          </a:xfrm>
-          <a:custGeom>
-            <a:avLst/>
-            <a:gdLst/>
-            <a:ahLst/>
-            <a:cxnLst/>
-            <a:rect l="l" t="t" r="r" b="b"/>
-            <a:pathLst>
-              <a:path w="120000" h="120000" extrusionOk="0">
-                <a:moveTo>
-                  <a:pt x="0" y="0"/>
-                </a:moveTo>
-                <a:lnTo>
-                  <a:pt x="120000" y="0"/>
-                </a:lnTo>
-                <a:lnTo>
-                  <a:pt x="120000" y="120000"/>
-                </a:lnTo>
-                <a:lnTo>
-                  <a:pt x="0" y="120000"/>
-                </a:lnTo>
-                <a:close/>
-              </a:path>
-            </a:pathLst>
-          </a:custGeom>
-        </p:spPr>
-      </p:sp>
-    </p:spTree>
-  </p:cSld>
-  <p:clrMapOvr>
-    <a:masterClrMapping/>
-  </p:clrMapOvr>
-</p:notes>
-</file>
-
-<file path=ppt/notesSlides/notesSlide24.xml><?xml version="1.0" encoding="utf-8"?>
-<p:notes xmlns:a="http://schemas.openxmlformats.org/drawingml/2006/main" xmlns:r="http://schemas.openxmlformats.org/officeDocument/2006/relationships" xmlns:p="http://schemas.openxmlformats.org/presentationml/2006/main" showMasterSp="0" showMasterPhAnim="0">
-  <p:cSld>
-    <p:spTree>
-      <p:nvGrpSpPr>
-        <p:cNvPr id="1" name="Shape 269"/>
-        <p:cNvGrpSpPr/>
-        <p:nvPr/>
-      </p:nvGrpSpPr>
-      <p:grpSpPr>
-        <a:xfrm>
-          <a:off x="0" y="0"/>
-          <a:ext cx="0" cy="0"/>
-          <a:chOff x="0" y="0"/>
-          <a:chExt cx="0" cy="0"/>
-        </a:xfrm>
-      </p:grpSpPr>
-      <p:sp>
-        <p:nvSpPr>
-          <p:cNvPr id="270" name="Google Shape;270;p24:notes"/>
-          <p:cNvSpPr txBox="1">
-            <a:spLocks noGrp="1"/>
-          </p:cNvSpPr>
-          <p:nvPr>
-            <p:ph type="body" idx="1"/>
-          </p:nvPr>
-        </p:nvSpPr>
-        <p:spPr>
-          <a:xfrm>
-            <a:off x="1828800" y="4951413"/>
-            <a:ext cx="14630400" cy="4049712"/>
-          </a:xfrm>
-          <a:prstGeom prst="rect">
-            <a:avLst/>
-          </a:prstGeom>
-        </p:spPr>
-        <p:txBody>
-          <a:bodyPr spcFirstLastPara="1" wrap="square" lIns="91425" tIns="45700" rIns="91425" bIns="45700" anchor="t" anchorCtr="0">
-            <a:noAutofit/>
-          </a:bodyPr>
-          <a:lstStyle/>
-          <a:p>
-            <a:pPr marL="0" lvl="0" indent="0" algn="l" rtl="0">
-              <a:spcBef>
-                <a:spcPts val="0"/>
-              </a:spcBef>
-              <a:spcAft>
-                <a:spcPts val="0"/>
-              </a:spcAft>
-              <a:buNone/>
-            </a:pPr>
-            <a:endParaRPr/>
-          </a:p>
-        </p:txBody>
-      </p:sp>
-      <p:sp>
-        <p:nvSpPr>
-          <p:cNvPr id="271" name="Google Shape;271;p24:notes"/>
-          <p:cNvSpPr>
-            <a:spLocks noGrp="1" noRot="1" noChangeAspect="1"/>
-          </p:cNvSpPr>
-          <p:nvPr>
-            <p:ph type="sldImg" idx="2"/>
-          </p:nvPr>
-        </p:nvSpPr>
-        <p:spPr>
-          <a:xfrm>
-            <a:off x="6057900" y="1285875"/>
-            <a:ext cx="6172200" cy="3471863"/>
-          </a:xfrm>
-          <a:custGeom>
-            <a:avLst/>
-            <a:gdLst/>
-            <a:ahLst/>
-            <a:cxnLst/>
-            <a:rect l="l" t="t" r="r" b="b"/>
-            <a:pathLst>
-              <a:path w="120000" h="120000" extrusionOk="0">
-                <a:moveTo>
-                  <a:pt x="0" y="0"/>
-                </a:moveTo>
-                <a:lnTo>
-                  <a:pt x="120000" y="0"/>
-                </a:lnTo>
-                <a:lnTo>
-                  <a:pt x="120000" y="120000"/>
-                </a:lnTo>
-                <a:lnTo>
-                  <a:pt x="0" y="120000"/>
-                </a:lnTo>
-                <a:close/>
-              </a:path>
-            </a:pathLst>
-          </a:custGeom>
-        </p:spPr>
-      </p:sp>
-    </p:spTree>
-  </p:cSld>
-  <p:clrMapOvr>
-    <a:masterClrMapping/>
-  </p:clrMapOvr>
-</p:notes>
-</file>
-
-<file path=ppt/notesSlides/notesSlide25.xml><?xml version="1.0" encoding="utf-8"?>
-<p:notes xmlns:a="http://schemas.openxmlformats.org/drawingml/2006/main" xmlns:r="http://schemas.openxmlformats.org/officeDocument/2006/relationships" xmlns:p="http://schemas.openxmlformats.org/presentationml/2006/main" showMasterSp="0" showMasterPhAnim="0">
-  <p:cSld>
-    <p:spTree>
-      <p:nvGrpSpPr>
         <p:cNvPr id="1" name="Shape 280"/>
         <p:cNvGrpSpPr/>
         <p:nvPr/>
@@ -3138,7 +2613,7 @@
 </p:notes>
 </file>
 
-<file path=ppt/notesSlides/notesSlide26.xml><?xml version="1.0" encoding="utf-8"?>
+<file path=ppt/notesSlides/notesSlide21.xml><?xml version="1.0" encoding="utf-8"?>
 <p:notes xmlns:a="http://schemas.openxmlformats.org/drawingml/2006/main" xmlns:r="http://schemas.openxmlformats.org/officeDocument/2006/relationships" xmlns:p="http://schemas.openxmlformats.org/presentationml/2006/main" showMasterSp="0" showMasterPhAnim="0">
   <p:cSld>
     <p:spTree>
@@ -3288,7 +2763,7 @@
             </a:pPr>
             <a:fld id="{00000000-1234-1234-1234-123412341234}" type="slidenum">
               <a:rPr lang="fr-FR"/>
-              <a:t>26</a:t>
+              <a:t>21</a:t>
             </a:fld>
             <a:endParaRPr/>
           </a:p>
@@ -3302,7 +2777,7 @@
 </p:notes>
 </file>
 
-<file path=ppt/notesSlides/notesSlide27.xml><?xml version="1.0" encoding="utf-8"?>
+<file path=ppt/notesSlides/notesSlide22.xml><?xml version="1.0" encoding="utf-8"?>
 <p:notes xmlns:a="http://schemas.openxmlformats.org/drawingml/2006/main" xmlns:r="http://schemas.openxmlformats.org/officeDocument/2006/relationships" xmlns:p="http://schemas.openxmlformats.org/presentationml/2006/main" showMasterSp="0" showMasterPhAnim="0">
   <p:cSld>
     <p:spTree>
@@ -3406,7 +2881,7 @@
 </p:notes>
 </file>
 
-<file path=ppt/notesSlides/notesSlide28.xml><?xml version="1.0" encoding="utf-8"?>
+<file path=ppt/notesSlides/notesSlide23.xml><?xml version="1.0" encoding="utf-8"?>
 <p:notes xmlns:a="http://schemas.openxmlformats.org/drawingml/2006/main" xmlns:r="http://schemas.openxmlformats.org/officeDocument/2006/relationships" xmlns:p="http://schemas.openxmlformats.org/presentationml/2006/main" showMasterSp="0" showMasterPhAnim="0">
   <p:cSld>
     <p:spTree>
@@ -3510,7 +2985,7 @@
 </p:notes>
 </file>
 
-<file path=ppt/notesSlides/notesSlide29.xml><?xml version="1.0" encoding="utf-8"?>
+<file path=ppt/notesSlides/notesSlide24.xml><?xml version="1.0" encoding="utf-8"?>
 <p:notes xmlns:a="http://schemas.openxmlformats.org/drawingml/2006/main" xmlns:r="http://schemas.openxmlformats.org/officeDocument/2006/relationships" xmlns:p="http://schemas.openxmlformats.org/presentationml/2006/main" showMasterSp="0" showMasterPhAnim="0">
   <p:cSld>
     <p:spTree>
@@ -4139,7 +3614,7 @@
   <p:cSld>
     <p:spTree>
       <p:nvGrpSpPr>
-        <p:cNvPr id="1" name="Shape 105"/>
+        <p:cNvPr id="1" name="Shape 133"/>
         <p:cNvGrpSpPr/>
         <p:nvPr/>
       </p:nvGrpSpPr>
@@ -4153,7 +3628,7 @@
       </p:grpSpPr>
       <p:sp>
         <p:nvSpPr>
-          <p:cNvPr id="106" name="Google Shape;106;p8:notes"/>
+          <p:cNvPr id="134" name="Google Shape;134;p11:notes"/>
           <p:cNvSpPr txBox="1">
             <a:spLocks noGrp="1"/>
           </p:cNvSpPr>
@@ -4191,7 +3666,7 @@
       </p:sp>
       <p:sp>
         <p:nvSpPr>
-          <p:cNvPr id="107" name="Google Shape;107;p8:notes"/>
+          <p:cNvPr id="135" name="Google Shape;135;p11:notes"/>
           <p:cNvSpPr>
             <a:spLocks noGrp="1" noRot="1" noChangeAspect="1"/>
           </p:cNvSpPr>
@@ -4243,7 +3718,7 @@
   <p:cSld>
     <p:spTree>
       <p:nvGrpSpPr>
-        <p:cNvPr id="1" name="Shape 112"/>
+        <p:cNvPr id="1" name="Shape 156"/>
         <p:cNvGrpSpPr/>
         <p:nvPr/>
       </p:nvGrpSpPr>
@@ -4257,7 +3732,7 @@
       </p:grpSpPr>
       <p:sp>
         <p:nvSpPr>
-          <p:cNvPr id="113" name="Google Shape;113;p9:notes"/>
+          <p:cNvPr id="157" name="Google Shape;157;p16:notes"/>
           <p:cNvSpPr txBox="1">
             <a:spLocks noGrp="1"/>
           </p:cNvSpPr>
@@ -4295,7 +3770,7 @@
       </p:sp>
       <p:sp>
         <p:nvSpPr>
-          <p:cNvPr id="114" name="Google Shape;114;p9:notes"/>
+          <p:cNvPr id="158" name="Google Shape;158;p16:notes"/>
           <p:cNvSpPr>
             <a:spLocks noGrp="1" noRot="1" noChangeAspect="1"/>
           </p:cNvSpPr>
@@ -9375,7 +8850,7 @@
         <p:spPr>
           <a:xfrm>
             <a:off x="4490357" y="8970071"/>
-            <a:ext cx="9307284" cy="923330"/>
+            <a:ext cx="9307284" cy="923289"/>
           </a:xfrm>
           <a:prstGeom prst="rect">
             <a:avLst/>
@@ -9401,7 +8876,7 @@
               <a:buNone/>
             </a:pPr>
             <a:r>
-              <a:rPr lang="fr-FR" sz="1800" i="1">
+              <a:rPr lang="fr-FR" sz="1800" i="1" dirty="0">
                 <a:solidFill>
                   <a:schemeClr val="lt1"/>
                 </a:solidFill>
@@ -9410,9 +8885,21 @@
                 <a:cs typeface="Verdana"/>
                 <a:sym typeface="Verdana"/>
               </a:rPr>
-              <a:t>ICT Risk Assessement</a:t>
-            </a:r>
-            <a:endParaRPr sz="1800" i="1">
+              <a:t>ICT Risk </a:t>
+            </a:r>
+            <a:r>
+              <a:rPr lang="fr-FR" sz="1800" i="1" dirty="0" err="1">
+                <a:solidFill>
+                  <a:schemeClr val="lt1"/>
+                </a:solidFill>
+                <a:latin typeface="Verdana"/>
+                <a:ea typeface="Verdana"/>
+                <a:cs typeface="Verdana"/>
+                <a:sym typeface="Verdana"/>
+              </a:rPr>
+              <a:t>Assessement</a:t>
+            </a:r>
+            <a:endParaRPr sz="1800" i="1" dirty="0">
               <a:solidFill>
                 <a:schemeClr val="lt1"/>
               </a:solidFill>
@@ -9433,7 +8920,7 @@
               <a:buNone/>
             </a:pPr>
             <a:r>
-              <a:rPr lang="fr-FR" sz="1800" i="1">
+              <a:rPr lang="fr-FR" sz="1800" i="1" dirty="0">
                 <a:solidFill>
                   <a:schemeClr val="lt1"/>
                 </a:solidFill>
@@ -9442,22 +8929,10 @@
                 <a:cs typeface="Verdana"/>
                 <a:sym typeface="Verdana"/>
               </a:rPr>
-              <a:t>Melissa Abdelkafi - 702815</a:t>
-            </a:r>
-            <a:endParaRPr/>
-          </a:p>
-          <a:p>
-            <a:pPr marL="0" lvl="0" indent="0" algn="ctr" rtl="0">
-              <a:spcBef>
-                <a:spcPts val="0"/>
-              </a:spcBef>
-              <a:spcAft>
-                <a:spcPts val="0"/>
-              </a:spcAft>
-              <a:buNone/>
-            </a:pPr>
-            <a:r>
-              <a:rPr lang="fr-FR" sz="1800" i="1">
+              <a:t>Melissa </a:t>
+            </a:r>
+            <a:r>
+              <a:rPr lang="fr-FR" sz="1800" i="1" dirty="0" err="1">
                 <a:solidFill>
                   <a:schemeClr val="lt1"/>
                 </a:solidFill>
@@ -9466,9 +8941,69 @@
                 <a:cs typeface="Verdana"/>
                 <a:sym typeface="Verdana"/>
               </a:rPr>
-              <a:t>Academic Year - 2026/2025</a:t>
-            </a:r>
-            <a:endParaRPr sz="1800">
+              <a:t>Abdelkafi</a:t>
+            </a:r>
+            <a:r>
+              <a:rPr lang="fr-FR" sz="1800" i="1" dirty="0">
+                <a:solidFill>
+                  <a:schemeClr val="lt1"/>
+                </a:solidFill>
+                <a:latin typeface="Verdana"/>
+                <a:ea typeface="Verdana"/>
+                <a:cs typeface="Verdana"/>
+                <a:sym typeface="Verdana"/>
+              </a:rPr>
+              <a:t> - 702815</a:t>
+            </a:r>
+            <a:endParaRPr dirty="0"/>
+          </a:p>
+          <a:p>
+            <a:pPr marL="0" lvl="0" indent="0" algn="ctr" rtl="0">
+              <a:spcBef>
+                <a:spcPts val="0"/>
+              </a:spcBef>
+              <a:spcAft>
+                <a:spcPts val="0"/>
+              </a:spcAft>
+              <a:buNone/>
+            </a:pPr>
+            <a:r>
+              <a:rPr lang="fr-FR" sz="1800" i="1" dirty="0">
+                <a:solidFill>
+                  <a:schemeClr val="lt1"/>
+                </a:solidFill>
+                <a:latin typeface="Verdana"/>
+                <a:ea typeface="Verdana"/>
+                <a:cs typeface="Verdana"/>
+                <a:sym typeface="Verdana"/>
+              </a:rPr>
+              <a:t>Academic </a:t>
+            </a:r>
+            <a:r>
+              <a:rPr lang="fr-FR" sz="1800" i="1" dirty="0" err="1">
+                <a:solidFill>
+                  <a:schemeClr val="lt1"/>
+                </a:solidFill>
+                <a:latin typeface="Verdana"/>
+                <a:ea typeface="Verdana"/>
+                <a:cs typeface="Verdana"/>
+                <a:sym typeface="Verdana"/>
+              </a:rPr>
+              <a:t>Year</a:t>
+            </a:r>
+            <a:r>
+              <a:rPr lang="fr-FR" sz="1800" i="1" dirty="0">
+                <a:solidFill>
+                  <a:schemeClr val="lt1"/>
+                </a:solidFill>
+                <a:latin typeface="Verdana"/>
+                <a:ea typeface="Verdana"/>
+                <a:cs typeface="Verdana"/>
+                <a:sym typeface="Verdana"/>
+              </a:rPr>
+              <a:t> : 2025-2026</a:t>
+            </a:r>
+            <a:endParaRPr sz="1800" dirty="0">
               <a:solidFill>
                 <a:schemeClr val="lt1"/>
               </a:solidFill>
@@ -9485,1461 +9020,6 @@
 </file>
 
 <file path=ppt/slides/slide10.xml><?xml version="1.0" encoding="utf-8"?>
-<p:sld xmlns:a="http://schemas.openxmlformats.org/drawingml/2006/main" xmlns:r="http://schemas.openxmlformats.org/officeDocument/2006/relationships" xmlns:p="http://schemas.openxmlformats.org/presentationml/2006/main">
-  <p:cSld>
-    <p:spTree>
-      <p:nvGrpSpPr>
-        <p:cNvPr id="1" name="Shape 123"/>
-        <p:cNvGrpSpPr/>
-        <p:nvPr/>
-      </p:nvGrpSpPr>
-      <p:grpSpPr>
-        <a:xfrm>
-          <a:off x="0" y="0"/>
-          <a:ext cx="0" cy="0"/>
-          <a:chOff x="0" y="0"/>
-          <a:chExt cx="0" cy="0"/>
-        </a:xfrm>
-      </p:grpSpPr>
-      <p:grpSp>
-        <p:nvGrpSpPr>
-          <p:cNvPr id="124" name="Google Shape;124;p10"/>
-          <p:cNvGrpSpPr/>
-          <p:nvPr/>
-        </p:nvGrpSpPr>
-        <p:grpSpPr>
-          <a:xfrm>
-            <a:off x="2895600" y="2324100"/>
-            <a:ext cx="15392231" cy="7962899"/>
-            <a:chOff x="6700400" y="914400"/>
-            <a:chExt cx="11587600" cy="9372599"/>
-          </a:xfrm>
-        </p:grpSpPr>
-        <p:pic>
-          <p:nvPicPr>
-            <p:cNvPr id="125" name="Google Shape;125;p10"/>
-            <p:cNvPicPr preferRelativeResize="0"/>
-            <p:nvPr/>
-          </p:nvPicPr>
-          <p:blipFill rotWithShape="1">
-            <a:blip r:embed="rId3">
-              <a:alphaModFix/>
-            </a:blip>
-            <a:srcRect/>
-            <a:stretch/>
-          </p:blipFill>
-          <p:spPr>
-            <a:xfrm>
-              <a:off x="6700400" y="914400"/>
-              <a:ext cx="11587599" cy="9372599"/>
-            </a:xfrm>
-            <a:prstGeom prst="rect">
-              <a:avLst/>
-            </a:prstGeom>
-            <a:noFill/>
-            <a:ln>
-              <a:noFill/>
-            </a:ln>
-          </p:spPr>
-        </p:pic>
-        <p:pic>
-          <p:nvPicPr>
-            <p:cNvPr id="126" name="Google Shape;126;p10"/>
-            <p:cNvPicPr preferRelativeResize="0"/>
-            <p:nvPr/>
-          </p:nvPicPr>
-          <p:blipFill rotWithShape="1">
-            <a:blip r:embed="rId4">
-              <a:alphaModFix/>
-            </a:blip>
-            <a:srcRect/>
-            <a:stretch/>
-          </p:blipFill>
-          <p:spPr>
-            <a:xfrm>
-              <a:off x="6941750" y="1128650"/>
-              <a:ext cx="11346250" cy="6946799"/>
-            </a:xfrm>
-            <a:prstGeom prst="rect">
-              <a:avLst/>
-            </a:prstGeom>
-            <a:noFill/>
-            <a:ln>
-              <a:noFill/>
-            </a:ln>
-          </p:spPr>
-        </p:pic>
-        <p:pic>
-          <p:nvPicPr>
-            <p:cNvPr id="127" name="Google Shape;127;p10"/>
-            <p:cNvPicPr preferRelativeResize="0"/>
-            <p:nvPr/>
-          </p:nvPicPr>
-          <p:blipFill rotWithShape="1">
-            <a:blip r:embed="rId5">
-              <a:alphaModFix/>
-            </a:blip>
-            <a:srcRect/>
-            <a:stretch/>
-          </p:blipFill>
-          <p:spPr>
-            <a:xfrm>
-              <a:off x="6824125" y="2704925"/>
-              <a:ext cx="11463874" cy="5390124"/>
-            </a:xfrm>
-            <a:prstGeom prst="rect">
-              <a:avLst/>
-            </a:prstGeom>
-            <a:noFill/>
-            <a:ln>
-              <a:noFill/>
-            </a:ln>
-          </p:spPr>
-        </p:pic>
-        <p:pic>
-          <p:nvPicPr>
-            <p:cNvPr id="128" name="Google Shape;128;p10"/>
-            <p:cNvPicPr preferRelativeResize="0"/>
-            <p:nvPr/>
-          </p:nvPicPr>
-          <p:blipFill rotWithShape="1">
-            <a:blip r:embed="rId6">
-              <a:alphaModFix/>
-            </a:blip>
-            <a:srcRect/>
-            <a:stretch/>
-          </p:blipFill>
-          <p:spPr>
-            <a:xfrm>
-              <a:off x="14586725" y="5419824"/>
-              <a:ext cx="2977549" cy="636874"/>
-            </a:xfrm>
-            <a:prstGeom prst="rect">
-              <a:avLst/>
-            </a:prstGeom>
-            <a:noFill/>
-            <a:ln>
-              <a:noFill/>
-            </a:ln>
-          </p:spPr>
-        </p:pic>
-      </p:grpSp>
-      <p:pic>
-        <p:nvPicPr>
-          <p:cNvPr id="129" name="Google Shape;129;p10"/>
-          <p:cNvPicPr preferRelativeResize="0"/>
-          <p:nvPr/>
-        </p:nvPicPr>
-        <p:blipFill rotWithShape="1">
-          <a:blip r:embed="rId7">
-            <a:alphaModFix/>
-          </a:blip>
-          <a:srcRect/>
-          <a:stretch/>
-        </p:blipFill>
-        <p:spPr>
-          <a:xfrm>
-            <a:off x="0" y="0"/>
-            <a:ext cx="146399" cy="10286999"/>
-          </a:xfrm>
-          <a:prstGeom prst="rect">
-            <a:avLst/>
-          </a:prstGeom>
-          <a:noFill/>
-          <a:ln>
-            <a:noFill/>
-          </a:ln>
-        </p:spPr>
-      </p:pic>
-      <p:sp>
-        <p:nvSpPr>
-          <p:cNvPr id="130" name="Google Shape;130;p10"/>
-          <p:cNvSpPr txBox="1">
-            <a:spLocks noGrp="1"/>
-          </p:cNvSpPr>
-          <p:nvPr>
-            <p:ph type="title"/>
-          </p:nvPr>
-        </p:nvSpPr>
-        <p:spPr>
-          <a:xfrm>
-            <a:off x="790815" y="336779"/>
-            <a:ext cx="17121627" cy="1226298"/>
-          </a:xfrm>
-          <a:prstGeom prst="rect">
-            <a:avLst/>
-          </a:prstGeom>
-          <a:noFill/>
-          <a:ln>
-            <a:noFill/>
-          </a:ln>
-        </p:spPr>
-        <p:txBody>
-          <a:bodyPr spcFirstLastPara="1" wrap="square" lIns="0" tIns="128900" rIns="0" bIns="0" anchor="t" anchorCtr="0">
-            <a:spAutoFit/>
-          </a:bodyPr>
-          <a:lstStyle/>
-          <a:p>
-            <a:pPr marL="12700" marR="5080" lvl="0" indent="0" algn="l" rtl="0">
-              <a:lnSpc>
-                <a:spcPct val="95625"/>
-              </a:lnSpc>
-              <a:spcBef>
-                <a:spcPts val="0"/>
-              </a:spcBef>
-              <a:spcAft>
-                <a:spcPts val="0"/>
-              </a:spcAft>
-              <a:buNone/>
-            </a:pPr>
-            <a:r>
-              <a:rPr lang="fr-FR" sz="4400"/>
-              <a:t>Malware Delivery Detection</a:t>
-            </a:r>
-            <a:br>
-              <a:rPr lang="fr-FR" sz="4800"/>
-            </a:br>
-            <a:endParaRPr sz="2400" b="0">
-              <a:latin typeface="Verdana"/>
-              <a:ea typeface="Verdana"/>
-              <a:cs typeface="Verdana"/>
-              <a:sym typeface="Verdana"/>
-            </a:endParaRPr>
-          </a:p>
-        </p:txBody>
-      </p:sp>
-      <p:pic>
-        <p:nvPicPr>
-          <p:cNvPr id="131" name="Google Shape;131;p10"/>
-          <p:cNvPicPr preferRelativeResize="0"/>
-          <p:nvPr/>
-        </p:nvPicPr>
-        <p:blipFill rotWithShape="1">
-          <a:blip r:embed="rId8">
-            <a:alphaModFix/>
-          </a:blip>
-          <a:srcRect/>
-          <a:stretch/>
-        </p:blipFill>
-        <p:spPr>
-          <a:xfrm>
-            <a:off x="3059947" y="2506125"/>
-            <a:ext cx="15228054" cy="6896781"/>
-          </a:xfrm>
-          <a:prstGeom prst="rect">
-            <a:avLst/>
-          </a:prstGeom>
-          <a:noFill/>
-          <a:ln>
-            <a:noFill/>
-          </a:ln>
-        </p:spPr>
-      </p:pic>
-      <p:sp>
-        <p:nvSpPr>
-          <p:cNvPr id="132" name="Google Shape;132;p10"/>
-          <p:cNvSpPr txBox="1"/>
-          <p:nvPr/>
-        </p:nvSpPr>
-        <p:spPr>
-          <a:xfrm>
-            <a:off x="785372" y="1209134"/>
-            <a:ext cx="15902428" cy="707886"/>
-          </a:xfrm>
-          <a:prstGeom prst="rect">
-            <a:avLst/>
-          </a:prstGeom>
-          <a:noFill/>
-          <a:ln>
-            <a:noFill/>
-          </a:ln>
-        </p:spPr>
-        <p:txBody>
-          <a:bodyPr spcFirstLastPara="1" wrap="square" lIns="91425" tIns="45700" rIns="91425" bIns="45700" anchor="t" anchorCtr="0">
-            <a:spAutoFit/>
-          </a:bodyPr>
-          <a:lstStyle/>
-          <a:p>
-            <a:pPr marL="0" lvl="0" indent="0" algn="l" rtl="0">
-              <a:spcBef>
-                <a:spcPts val="0"/>
-              </a:spcBef>
-              <a:spcAft>
-                <a:spcPts val="0"/>
-              </a:spcAft>
-              <a:buNone/>
-            </a:pPr>
-            <a:r>
-              <a:rPr lang="fr-FR" sz="2000" b="0">
-                <a:solidFill>
-                  <a:schemeClr val="lt1"/>
-                </a:solidFill>
-                <a:latin typeface="Verdana"/>
-                <a:ea typeface="Verdana"/>
-                <a:cs typeface="Verdana"/>
-                <a:sym typeface="Verdana"/>
-              </a:rPr>
-              <a:t>Query detects suspicious download activity targeting the infected host (10.8.15.133) by identifying large payloads set above (1000 bytes) from external sources then counts download frequency, malicious sources, and average payload size. </a:t>
-            </a:r>
-            <a:endParaRPr sz="2000">
-              <a:solidFill>
-                <a:schemeClr val="lt1"/>
-              </a:solidFill>
-              <a:latin typeface="Verdana"/>
-              <a:ea typeface="Verdana"/>
-              <a:cs typeface="Verdana"/>
-              <a:sym typeface="Verdana"/>
-            </a:endParaRPr>
-          </a:p>
-        </p:txBody>
-      </p:sp>
-    </p:spTree>
-  </p:cSld>
-  <p:clrMapOvr>
-    <a:masterClrMapping/>
-  </p:clrMapOvr>
-</p:sld>
-</file>
-
-<file path=ppt/slides/slide11.xml><?xml version="1.0" encoding="utf-8"?>
-<p:sld xmlns:a="http://schemas.openxmlformats.org/drawingml/2006/main" xmlns:r="http://schemas.openxmlformats.org/officeDocument/2006/relationships" xmlns:p="http://schemas.openxmlformats.org/presentationml/2006/main">
-  <p:cSld>
-    <p:spTree>
-      <p:nvGrpSpPr>
-        <p:cNvPr id="1" name="Shape 136"/>
-        <p:cNvGrpSpPr/>
-        <p:nvPr/>
-      </p:nvGrpSpPr>
-      <p:grpSpPr>
-        <a:xfrm>
-          <a:off x="0" y="0"/>
-          <a:ext cx="0" cy="0"/>
-          <a:chOff x="0" y="0"/>
-          <a:chExt cx="0" cy="0"/>
-        </a:xfrm>
-      </p:grpSpPr>
-      <p:pic>
-        <p:nvPicPr>
-          <p:cNvPr id="137" name="Google Shape;137;p11"/>
-          <p:cNvPicPr preferRelativeResize="0"/>
-          <p:nvPr/>
-        </p:nvPicPr>
-        <p:blipFill rotWithShape="1">
-          <a:blip r:embed="rId3">
-            <a:alphaModFix/>
-          </a:blip>
-          <a:srcRect/>
-          <a:stretch/>
-        </p:blipFill>
-        <p:spPr>
-          <a:xfrm>
-            <a:off x="0" y="0"/>
-            <a:ext cx="146399" cy="10286999"/>
-          </a:xfrm>
-          <a:prstGeom prst="rect">
-            <a:avLst/>
-          </a:prstGeom>
-          <a:noFill/>
-          <a:ln>
-            <a:noFill/>
-          </a:ln>
-        </p:spPr>
-      </p:pic>
-      <p:sp>
-        <p:nvSpPr>
-          <p:cNvPr id="138" name="Google Shape;138;p11"/>
-          <p:cNvSpPr txBox="1">
-            <a:spLocks noGrp="1"/>
-          </p:cNvSpPr>
-          <p:nvPr>
-            <p:ph type="title"/>
-          </p:nvPr>
-        </p:nvSpPr>
-        <p:spPr>
-          <a:xfrm>
-            <a:off x="693917" y="723900"/>
-            <a:ext cx="16998601" cy="1826847"/>
-          </a:xfrm>
-          <a:prstGeom prst="rect">
-            <a:avLst/>
-          </a:prstGeom>
-          <a:noFill/>
-          <a:ln>
-            <a:noFill/>
-          </a:ln>
-        </p:spPr>
-        <p:txBody>
-          <a:bodyPr spcFirstLastPara="1" wrap="square" lIns="0" tIns="128900" rIns="0" bIns="0" anchor="t" anchorCtr="0">
-            <a:spAutoFit/>
-          </a:bodyPr>
-          <a:lstStyle/>
-          <a:p>
-            <a:pPr marL="12700" marR="5080" lvl="0" indent="0" algn="l" rtl="0">
-              <a:lnSpc>
-                <a:spcPct val="95625"/>
-              </a:lnSpc>
-              <a:spcBef>
-                <a:spcPts val="0"/>
-              </a:spcBef>
-              <a:spcAft>
-                <a:spcPts val="0"/>
-              </a:spcAft>
-              <a:buNone/>
-            </a:pPr>
-            <a:r>
-              <a:rPr lang="fr-FR" sz="4800"/>
-              <a:t>From External Mapping to Attacker Servers Detection</a:t>
-            </a:r>
-            <a:br>
-              <a:rPr lang="fr-FR" sz="4800"/>
-            </a:br>
-            <a:r>
-              <a:rPr lang="fr-FR" sz="3200"/>
-              <a:t>Behavioral analysis</a:t>
-            </a:r>
-            <a:br>
-              <a:rPr lang="fr-FR" sz="4800"/>
-            </a:br>
-            <a:endParaRPr sz="2800" b="0">
-              <a:latin typeface="Verdana"/>
-              <a:ea typeface="Verdana"/>
-              <a:cs typeface="Verdana"/>
-              <a:sym typeface="Verdana"/>
-            </a:endParaRPr>
-          </a:p>
-        </p:txBody>
-      </p:sp>
-      <p:sp>
-        <p:nvSpPr>
-          <p:cNvPr id="139" name="Google Shape;139;p11"/>
-          <p:cNvSpPr txBox="1"/>
-          <p:nvPr/>
-        </p:nvSpPr>
-        <p:spPr>
-          <a:xfrm>
-            <a:off x="595473" y="8393850"/>
-            <a:ext cx="10166700" cy="369300"/>
-          </a:xfrm>
-          <a:prstGeom prst="rect">
-            <a:avLst/>
-          </a:prstGeom>
-          <a:noFill/>
-          <a:ln>
-            <a:noFill/>
-          </a:ln>
-        </p:spPr>
-        <p:txBody>
-          <a:bodyPr spcFirstLastPara="1" wrap="square" lIns="91425" tIns="45700" rIns="91425" bIns="45700" anchor="t" anchorCtr="0">
-            <a:spAutoFit/>
-          </a:bodyPr>
-          <a:lstStyle/>
-          <a:p>
-            <a:pPr marL="0" lvl="0" indent="0" algn="l" rtl="0">
-              <a:spcBef>
-                <a:spcPts val="0"/>
-              </a:spcBef>
-              <a:spcAft>
-                <a:spcPts val="0"/>
-              </a:spcAft>
-              <a:buNone/>
-            </a:pPr>
-            <a:r>
-              <a:rPr lang="fr-FR" sz="1800" b="1" i="0">
-                <a:solidFill>
-                  <a:schemeClr val="lt1"/>
-                </a:solidFill>
-                <a:latin typeface="Arial"/>
-                <a:ea typeface="Arial"/>
-                <a:cs typeface="Arial"/>
-                <a:sym typeface="Arial"/>
-              </a:rPr>
-              <a:t>Question:</a:t>
-            </a:r>
-            <a:r>
-              <a:rPr lang="fr-FR" sz="1800" b="0" i="0">
-                <a:solidFill>
-                  <a:schemeClr val="lt1"/>
-                </a:solidFill>
-                <a:latin typeface="Arial"/>
-                <a:ea typeface="Arial"/>
-                <a:cs typeface="Arial"/>
-                <a:sym typeface="Arial"/>
-              </a:rPr>
-              <a:t> </a:t>
-            </a:r>
-            <a:r>
-              <a:rPr lang="fr-FR" sz="1800">
-                <a:solidFill>
-                  <a:schemeClr val="lt1"/>
-                </a:solidFill>
-                <a:latin typeface="Arial"/>
-                <a:ea typeface="Arial"/>
-                <a:cs typeface="Arial"/>
-                <a:sym typeface="Arial"/>
-              </a:rPr>
-              <a:t>Which of these</a:t>
-            </a:r>
-            <a:r>
-              <a:rPr lang="fr-FR" sz="1800" b="0" i="0">
-                <a:solidFill>
-                  <a:schemeClr val="lt1"/>
-                </a:solidFill>
-                <a:latin typeface="Arial"/>
-                <a:ea typeface="Arial"/>
-                <a:cs typeface="Arial"/>
-                <a:sym typeface="Arial"/>
-              </a:rPr>
-              <a:t> identified external IPs are acting as </a:t>
-            </a:r>
-            <a:r>
-              <a:rPr lang="fr-FR" sz="1800" b="0" i="1">
-                <a:solidFill>
-                  <a:schemeClr val="lt1"/>
-                </a:solidFill>
-                <a:latin typeface="Arial"/>
-                <a:ea typeface="Arial"/>
-                <a:cs typeface="Arial"/>
-                <a:sym typeface="Arial"/>
-              </a:rPr>
-              <a:t>Attacker servers</a:t>
-            </a:r>
-            <a:r>
-              <a:rPr lang="fr-FR" sz="1800" b="0" i="0">
-                <a:solidFill>
-                  <a:schemeClr val="lt1"/>
-                </a:solidFill>
-                <a:latin typeface="Arial"/>
-                <a:ea typeface="Arial"/>
-                <a:cs typeface="Arial"/>
-                <a:sym typeface="Arial"/>
-              </a:rPr>
-              <a:t>?"</a:t>
-            </a:r>
-            <a:endParaRPr/>
-          </a:p>
-        </p:txBody>
-      </p:sp>
-      <p:sp>
-        <p:nvSpPr>
-          <p:cNvPr id="140" name="Google Shape;140;p11"/>
-          <p:cNvSpPr txBox="1"/>
-          <p:nvPr/>
-        </p:nvSpPr>
-        <p:spPr>
-          <a:xfrm>
-            <a:off x="595482" y="8784520"/>
-            <a:ext cx="11893201" cy="800219"/>
-          </a:xfrm>
-          <a:prstGeom prst="rect">
-            <a:avLst/>
-          </a:prstGeom>
-          <a:noFill/>
-          <a:ln>
-            <a:noFill/>
-          </a:ln>
-        </p:spPr>
-        <p:txBody>
-          <a:bodyPr spcFirstLastPara="1" wrap="square" lIns="91425" tIns="45700" rIns="91425" bIns="45700" anchor="t" anchorCtr="0">
-            <a:spAutoFit/>
-          </a:bodyPr>
-          <a:lstStyle/>
-          <a:p>
-            <a:pPr marL="0" lvl="0" indent="0" algn="l" rtl="0">
-              <a:spcBef>
-                <a:spcPts val="0"/>
-              </a:spcBef>
-              <a:spcAft>
-                <a:spcPts val="0"/>
-              </a:spcAft>
-              <a:buClr>
-                <a:schemeClr val="lt1"/>
-              </a:buClr>
-              <a:buSzPts val="1800"/>
-              <a:buFont typeface="Arial"/>
-              <a:buNone/>
-            </a:pPr>
-            <a:r>
-              <a:rPr lang="fr-FR" sz="1800" b="0" i="0">
-                <a:solidFill>
-                  <a:schemeClr val="lt1"/>
-                </a:solidFill>
-                <a:latin typeface="Arial"/>
-                <a:ea typeface="Arial"/>
-                <a:cs typeface="Arial"/>
-                <a:sym typeface="Arial"/>
-              </a:rPr>
-              <a:t>Through correlation of our findings, the </a:t>
-            </a:r>
-            <a:r>
-              <a:rPr lang="fr-FR" sz="1800" b="1" i="0">
-                <a:solidFill>
-                  <a:schemeClr val="lt1"/>
-                </a:solidFill>
-                <a:latin typeface="Arial"/>
-                <a:ea typeface="Arial"/>
-                <a:cs typeface="Arial"/>
-                <a:sym typeface="Arial"/>
-              </a:rPr>
-              <a:t>4 </a:t>
-            </a:r>
-            <a:r>
-              <a:rPr lang="fr-FR" sz="1800" b="1">
-                <a:solidFill>
-                  <a:schemeClr val="lt1"/>
-                </a:solidFill>
-                <a:latin typeface="Arial"/>
-                <a:ea typeface="Arial"/>
-                <a:cs typeface="Arial"/>
-                <a:sym typeface="Arial"/>
-              </a:rPr>
-              <a:t>Attacker </a:t>
-            </a:r>
-            <a:r>
-              <a:rPr lang="fr-FR" sz="1800" b="1" i="0">
-                <a:solidFill>
-                  <a:schemeClr val="lt1"/>
-                </a:solidFill>
-                <a:latin typeface="Arial"/>
-                <a:ea typeface="Arial"/>
-                <a:cs typeface="Arial"/>
-                <a:sym typeface="Arial"/>
-              </a:rPr>
-              <a:t>servers</a:t>
-            </a:r>
-            <a:r>
-              <a:rPr lang="fr-FR" sz="1800" b="0" i="0">
-                <a:solidFill>
-                  <a:schemeClr val="lt1"/>
-                </a:solidFill>
-                <a:latin typeface="Arial"/>
-                <a:ea typeface="Arial"/>
-                <a:cs typeface="Arial"/>
-                <a:sym typeface="Arial"/>
-              </a:rPr>
-              <a:t> are:</a:t>
-            </a:r>
-            <a:endParaRPr sz="1800">
-              <a:solidFill>
-                <a:schemeClr val="lt1"/>
-              </a:solidFill>
-              <a:latin typeface="Arial"/>
-              <a:ea typeface="Arial"/>
-              <a:cs typeface="Arial"/>
-              <a:sym typeface="Arial"/>
-            </a:endParaRPr>
-          </a:p>
-          <a:p>
-            <a:pPr marL="0" lvl="0" indent="0" algn="l" rtl="0">
-              <a:spcBef>
-                <a:spcPts val="1200"/>
-              </a:spcBef>
-              <a:spcAft>
-                <a:spcPts val="0"/>
-              </a:spcAft>
-              <a:buClr>
-                <a:schemeClr val="lt1"/>
-              </a:buClr>
-              <a:buSzPts val="1800"/>
-              <a:buFont typeface="Arial"/>
-              <a:buNone/>
-            </a:pPr>
-            <a:r>
-              <a:rPr lang="fr-FR" sz="1800" b="0" i="0">
-                <a:solidFill>
-                  <a:schemeClr val="lt1"/>
-                </a:solidFill>
-                <a:latin typeface="Arial"/>
-                <a:ea typeface="Arial"/>
-                <a:cs typeface="Arial"/>
-                <a:sym typeface="Arial"/>
-              </a:rPr>
-              <a:t>72.5.43.29</a:t>
-            </a:r>
-            <a:r>
-              <a:rPr lang="fr-FR" sz="1800">
-                <a:solidFill>
-                  <a:schemeClr val="lt1"/>
-                </a:solidFill>
-                <a:latin typeface="Arial"/>
-                <a:ea typeface="Arial"/>
-                <a:cs typeface="Arial"/>
-                <a:sym typeface="Arial"/>
-              </a:rPr>
-              <a:t>,   </a:t>
-            </a:r>
-            <a:r>
-              <a:rPr lang="fr-FR" sz="1800" b="0" i="0">
-                <a:solidFill>
-                  <a:schemeClr val="lt1"/>
-                </a:solidFill>
-                <a:latin typeface="Arial"/>
-                <a:ea typeface="Arial"/>
-                <a:cs typeface="Arial"/>
-                <a:sym typeface="Arial"/>
-              </a:rPr>
-              <a:t>104.21.55.70</a:t>
-            </a:r>
-            <a:r>
-              <a:rPr lang="fr-FR" sz="1800">
-                <a:solidFill>
-                  <a:schemeClr val="lt1"/>
-                </a:solidFill>
-                <a:latin typeface="Arial"/>
-                <a:ea typeface="Arial"/>
-                <a:cs typeface="Arial"/>
-                <a:sym typeface="Arial"/>
-              </a:rPr>
-              <a:t>,   </a:t>
-            </a:r>
-            <a:r>
-              <a:rPr lang="fr-FR" sz="1800" b="0" i="0">
-                <a:solidFill>
-                  <a:schemeClr val="lt1"/>
-                </a:solidFill>
-                <a:latin typeface="Arial"/>
-                <a:ea typeface="Arial"/>
-                <a:cs typeface="Arial"/>
-                <a:sym typeface="Arial"/>
-              </a:rPr>
-              <a:t>23.220.103.8</a:t>
-            </a:r>
-            <a:r>
-              <a:rPr lang="fr-FR" sz="1800">
-                <a:solidFill>
-                  <a:schemeClr val="lt1"/>
-                </a:solidFill>
-                <a:latin typeface="Arial"/>
-                <a:ea typeface="Arial"/>
-                <a:cs typeface="Arial"/>
-                <a:sym typeface="Arial"/>
-              </a:rPr>
-              <a:t>,    </a:t>
-            </a:r>
-            <a:r>
-              <a:rPr lang="fr-FR" sz="1800" b="0" i="0">
-                <a:solidFill>
-                  <a:schemeClr val="lt1"/>
-                </a:solidFill>
-                <a:latin typeface="Arial"/>
-                <a:ea typeface="Arial"/>
-                <a:cs typeface="Arial"/>
-                <a:sym typeface="Arial"/>
-              </a:rPr>
-              <a:t>23.220.103.18</a:t>
-            </a:r>
-            <a:endParaRPr sz="1800" b="0" i="0">
-              <a:solidFill>
-                <a:schemeClr val="lt1"/>
-              </a:solidFill>
-              <a:latin typeface="Arial"/>
-              <a:ea typeface="Arial"/>
-              <a:cs typeface="Arial"/>
-              <a:sym typeface="Arial"/>
-            </a:endParaRPr>
-          </a:p>
-        </p:txBody>
-      </p:sp>
-      <p:sp>
-        <p:nvSpPr>
-          <p:cNvPr id="141" name="Google Shape;141;p11"/>
-          <p:cNvSpPr txBox="1"/>
-          <p:nvPr/>
-        </p:nvSpPr>
-        <p:spPr>
-          <a:xfrm>
-            <a:off x="595482" y="2318475"/>
-            <a:ext cx="16092318" cy="707886"/>
-          </a:xfrm>
-          <a:prstGeom prst="rect">
-            <a:avLst/>
-          </a:prstGeom>
-          <a:noFill/>
-          <a:ln>
-            <a:noFill/>
-          </a:ln>
-        </p:spPr>
-        <p:txBody>
-          <a:bodyPr spcFirstLastPara="1" wrap="square" lIns="91425" tIns="45700" rIns="91425" bIns="45700" anchor="t" anchorCtr="0">
-            <a:spAutoFit/>
-          </a:bodyPr>
-          <a:lstStyle/>
-          <a:p>
-            <a:pPr marL="0" lvl="0" indent="0" algn="l" rtl="0">
-              <a:spcBef>
-                <a:spcPts val="0"/>
-              </a:spcBef>
-              <a:spcAft>
-                <a:spcPts val="0"/>
-              </a:spcAft>
-              <a:buNone/>
-            </a:pPr>
-            <a:r>
-              <a:rPr lang="fr-FR" sz="2000">
-                <a:solidFill>
-                  <a:schemeClr val="lt1"/>
-                </a:solidFill>
-                <a:latin typeface="Verdana"/>
-                <a:ea typeface="Verdana"/>
-                <a:cs typeface="Verdana"/>
-                <a:sym typeface="Verdana"/>
-              </a:rPr>
-              <a:t>Qu</a:t>
-            </a:r>
-            <a:r>
-              <a:rPr lang="fr-FR" sz="2000" b="0">
-                <a:solidFill>
-                  <a:schemeClr val="lt1"/>
-                </a:solidFill>
-                <a:latin typeface="Verdana"/>
-                <a:ea typeface="Verdana"/>
-                <a:cs typeface="Verdana"/>
-                <a:sym typeface="Verdana"/>
-              </a:rPr>
-              <a:t>ery identifies the communication pattern between the infected host and known malicious servers to eventually deduce the Attacker servers, it calculates the check-in frequency with these servers, and determines its average time interval.</a:t>
-            </a:r>
-            <a:endParaRPr sz="2000">
-              <a:solidFill>
-                <a:schemeClr val="lt1"/>
-              </a:solidFill>
-              <a:latin typeface="Verdana"/>
-              <a:ea typeface="Verdana"/>
-              <a:cs typeface="Verdana"/>
-              <a:sym typeface="Verdana"/>
-            </a:endParaRPr>
-          </a:p>
-        </p:txBody>
-      </p:sp>
-      <p:pic>
-        <p:nvPicPr>
-          <p:cNvPr id="142" name="Google Shape;142;p11"/>
-          <p:cNvPicPr preferRelativeResize="0"/>
-          <p:nvPr/>
-        </p:nvPicPr>
-        <p:blipFill rotWithShape="1">
-          <a:blip r:embed="rId4">
-            <a:alphaModFix/>
-          </a:blip>
-          <a:srcRect r="1368"/>
-          <a:stretch/>
-        </p:blipFill>
-        <p:spPr>
-          <a:xfrm>
-            <a:off x="1361440" y="3530074"/>
-            <a:ext cx="15565119" cy="4573912"/>
-          </a:xfrm>
-          <a:prstGeom prst="rect">
-            <a:avLst/>
-          </a:prstGeom>
-          <a:noFill/>
-          <a:ln>
-            <a:noFill/>
-          </a:ln>
-        </p:spPr>
-      </p:pic>
-    </p:spTree>
-  </p:cSld>
-  <p:clrMapOvr>
-    <a:masterClrMapping/>
-  </p:clrMapOvr>
-</p:sld>
-</file>
-
-<file path=ppt/slides/slide12.xml><?xml version="1.0" encoding="utf-8"?>
-<p:sld xmlns:a="http://schemas.openxmlformats.org/drawingml/2006/main" xmlns:r="http://schemas.openxmlformats.org/officeDocument/2006/relationships" xmlns:p="http://schemas.openxmlformats.org/presentationml/2006/main">
-  <p:cSld>
-    <p:spTree>
-      <p:nvGrpSpPr>
-        <p:cNvPr id="1" name="Shape 146"/>
-        <p:cNvGrpSpPr/>
-        <p:nvPr/>
-      </p:nvGrpSpPr>
-      <p:grpSpPr>
-        <a:xfrm>
-          <a:off x="0" y="0"/>
-          <a:ext cx="0" cy="0"/>
-          <a:chOff x="0" y="0"/>
-          <a:chExt cx="0" cy="0"/>
-        </a:xfrm>
-      </p:grpSpPr>
-      <p:grpSp>
-        <p:nvGrpSpPr>
-          <p:cNvPr id="147" name="Google Shape;147;p12"/>
-          <p:cNvGrpSpPr/>
-          <p:nvPr/>
-        </p:nvGrpSpPr>
-        <p:grpSpPr>
-          <a:xfrm>
-            <a:off x="4648200" y="1714500"/>
-            <a:ext cx="13639709" cy="8839199"/>
-            <a:chOff x="6700400" y="914400"/>
-            <a:chExt cx="11587600" cy="9372599"/>
-          </a:xfrm>
-        </p:grpSpPr>
-        <p:pic>
-          <p:nvPicPr>
-            <p:cNvPr id="148" name="Google Shape;148;p12"/>
-            <p:cNvPicPr preferRelativeResize="0"/>
-            <p:nvPr/>
-          </p:nvPicPr>
-          <p:blipFill rotWithShape="1">
-            <a:blip r:embed="rId3">
-              <a:alphaModFix/>
-            </a:blip>
-            <a:srcRect/>
-            <a:stretch/>
-          </p:blipFill>
-          <p:spPr>
-            <a:xfrm>
-              <a:off x="6700400" y="914400"/>
-              <a:ext cx="11587599" cy="9372599"/>
-            </a:xfrm>
-            <a:prstGeom prst="rect">
-              <a:avLst/>
-            </a:prstGeom>
-            <a:noFill/>
-            <a:ln>
-              <a:noFill/>
-            </a:ln>
-          </p:spPr>
-        </p:pic>
-        <p:pic>
-          <p:nvPicPr>
-            <p:cNvPr id="149" name="Google Shape;149;p12"/>
-            <p:cNvPicPr preferRelativeResize="0"/>
-            <p:nvPr/>
-          </p:nvPicPr>
-          <p:blipFill rotWithShape="1">
-            <a:blip r:embed="rId4">
-              <a:alphaModFix/>
-            </a:blip>
-            <a:srcRect/>
-            <a:stretch/>
-          </p:blipFill>
-          <p:spPr>
-            <a:xfrm>
-              <a:off x="6941750" y="1128650"/>
-              <a:ext cx="11346250" cy="6946799"/>
-            </a:xfrm>
-            <a:prstGeom prst="rect">
-              <a:avLst/>
-            </a:prstGeom>
-            <a:noFill/>
-            <a:ln>
-              <a:noFill/>
-            </a:ln>
-          </p:spPr>
-        </p:pic>
-        <p:pic>
-          <p:nvPicPr>
-            <p:cNvPr id="150" name="Google Shape;150;p12"/>
-            <p:cNvPicPr preferRelativeResize="0"/>
-            <p:nvPr/>
-          </p:nvPicPr>
-          <p:blipFill rotWithShape="1">
-            <a:blip r:embed="rId5">
-              <a:alphaModFix/>
-            </a:blip>
-            <a:srcRect/>
-            <a:stretch/>
-          </p:blipFill>
-          <p:spPr>
-            <a:xfrm>
-              <a:off x="6824125" y="2704925"/>
-              <a:ext cx="11463874" cy="5390124"/>
-            </a:xfrm>
-            <a:prstGeom prst="rect">
-              <a:avLst/>
-            </a:prstGeom>
-            <a:noFill/>
-            <a:ln>
-              <a:noFill/>
-            </a:ln>
-          </p:spPr>
-        </p:pic>
-        <p:pic>
-          <p:nvPicPr>
-            <p:cNvPr id="151" name="Google Shape;151;p12"/>
-            <p:cNvPicPr preferRelativeResize="0"/>
-            <p:nvPr/>
-          </p:nvPicPr>
-          <p:blipFill rotWithShape="1">
-            <a:blip r:embed="rId6">
-              <a:alphaModFix/>
-            </a:blip>
-            <a:srcRect/>
-            <a:stretch/>
-          </p:blipFill>
-          <p:spPr>
-            <a:xfrm>
-              <a:off x="14586725" y="5419824"/>
-              <a:ext cx="2977549" cy="636874"/>
-            </a:xfrm>
-            <a:prstGeom prst="rect">
-              <a:avLst/>
-            </a:prstGeom>
-            <a:noFill/>
-            <a:ln>
-              <a:noFill/>
-            </a:ln>
-          </p:spPr>
-        </p:pic>
-      </p:grpSp>
-      <p:pic>
-        <p:nvPicPr>
-          <p:cNvPr id="152" name="Google Shape;152;p12"/>
-          <p:cNvPicPr preferRelativeResize="0"/>
-          <p:nvPr/>
-        </p:nvPicPr>
-        <p:blipFill rotWithShape="1">
-          <a:blip r:embed="rId7">
-            <a:alphaModFix/>
-          </a:blip>
-          <a:srcRect/>
-          <a:stretch/>
-        </p:blipFill>
-        <p:spPr>
-          <a:xfrm>
-            <a:off x="0" y="0"/>
-            <a:ext cx="146399" cy="10286999"/>
-          </a:xfrm>
-          <a:prstGeom prst="rect">
-            <a:avLst/>
-          </a:prstGeom>
-          <a:noFill/>
-          <a:ln>
-            <a:noFill/>
-          </a:ln>
-        </p:spPr>
-      </p:pic>
-      <p:sp>
-        <p:nvSpPr>
-          <p:cNvPr id="153" name="Google Shape;153;p12"/>
-          <p:cNvSpPr txBox="1">
-            <a:spLocks noGrp="1"/>
-          </p:cNvSpPr>
-          <p:nvPr>
-            <p:ph type="title"/>
-          </p:nvPr>
-        </p:nvSpPr>
-        <p:spPr>
-          <a:xfrm>
-            <a:off x="612604" y="663533"/>
-            <a:ext cx="9943266" cy="720069"/>
-          </a:xfrm>
-          <a:prstGeom prst="rect">
-            <a:avLst/>
-          </a:prstGeom>
-          <a:noFill/>
-          <a:ln>
-            <a:noFill/>
-          </a:ln>
-        </p:spPr>
-        <p:txBody>
-          <a:bodyPr spcFirstLastPara="1" wrap="square" lIns="0" tIns="128900" rIns="0" bIns="0" anchor="t" anchorCtr="0">
-            <a:spAutoFit/>
-          </a:bodyPr>
-          <a:lstStyle/>
-          <a:p>
-            <a:pPr marL="12700" marR="5080" lvl="0" indent="0" algn="l" rtl="0">
-              <a:lnSpc>
-                <a:spcPct val="95625"/>
-              </a:lnSpc>
-              <a:spcBef>
-                <a:spcPts val="0"/>
-              </a:spcBef>
-              <a:spcAft>
-                <a:spcPts val="0"/>
-              </a:spcAft>
-              <a:buNone/>
-            </a:pPr>
-            <a:r>
-              <a:rPr lang="fr-FR" sz="4800"/>
-              <a:t>Data Exfiltration Assessment</a:t>
-            </a:r>
-            <a:endParaRPr sz="4500">
-              <a:latin typeface="Verdana"/>
-              <a:ea typeface="Verdana"/>
-              <a:cs typeface="Verdana"/>
-              <a:sym typeface="Verdana"/>
-            </a:endParaRPr>
-          </a:p>
-        </p:txBody>
-      </p:sp>
-      <p:pic>
-        <p:nvPicPr>
-          <p:cNvPr id="154" name="Google Shape;154;p12"/>
-          <p:cNvPicPr preferRelativeResize="0"/>
-          <p:nvPr/>
-        </p:nvPicPr>
-        <p:blipFill rotWithShape="1">
-          <a:blip r:embed="rId8">
-            <a:alphaModFix/>
-          </a:blip>
-          <a:srcRect/>
-          <a:stretch/>
-        </p:blipFill>
-        <p:spPr>
-          <a:xfrm>
-            <a:off x="4799278" y="1844665"/>
-            <a:ext cx="13488630" cy="7629406"/>
-          </a:xfrm>
-          <a:prstGeom prst="rect">
-            <a:avLst/>
-          </a:prstGeom>
-          <a:noFill/>
-          <a:ln>
-            <a:noFill/>
-          </a:ln>
-        </p:spPr>
-      </p:pic>
-      <p:sp>
-        <p:nvSpPr>
-          <p:cNvPr id="155" name="Google Shape;155;p12"/>
-          <p:cNvSpPr txBox="1"/>
-          <p:nvPr/>
-        </p:nvSpPr>
-        <p:spPr>
-          <a:xfrm>
-            <a:off x="607161" y="2541818"/>
-            <a:ext cx="3899525" cy="3139321"/>
-          </a:xfrm>
-          <a:prstGeom prst="rect">
-            <a:avLst/>
-          </a:prstGeom>
-          <a:noFill/>
-          <a:ln>
-            <a:noFill/>
-          </a:ln>
-        </p:spPr>
-        <p:txBody>
-          <a:bodyPr spcFirstLastPara="1" wrap="square" lIns="91425" tIns="45700" rIns="91425" bIns="45700" anchor="t" anchorCtr="0">
-            <a:spAutoFit/>
-          </a:bodyPr>
-          <a:lstStyle/>
-          <a:p>
-            <a:pPr marL="0" lvl="0" indent="0" algn="l" rtl="0">
-              <a:spcBef>
-                <a:spcPts val="0"/>
-              </a:spcBef>
-              <a:spcAft>
-                <a:spcPts val="0"/>
-              </a:spcAft>
-              <a:buNone/>
-            </a:pPr>
-            <a:r>
-              <a:rPr lang="fr-FR" sz="2200">
-                <a:solidFill>
-                  <a:schemeClr val="lt1"/>
-                </a:solidFill>
-              </a:rPr>
-              <a:t>Query measures outbound traffic from the infected host to external destinations, focusing on larger packets above (500 bytes) which likely contains stolen data. Then computes data loss volume, exfiltration frequency, and receiving servers.</a:t>
-            </a:r>
-            <a:endParaRPr sz="2200">
-              <a:solidFill>
-                <a:schemeClr val="lt1"/>
-              </a:solidFill>
-            </a:endParaRPr>
-          </a:p>
-        </p:txBody>
-      </p:sp>
-    </p:spTree>
-  </p:cSld>
-  <p:clrMapOvr>
-    <a:masterClrMapping/>
-  </p:clrMapOvr>
-</p:sld>
-</file>
-
-<file path=ppt/slides/slide13.xml><?xml version="1.0" encoding="utf-8"?>
-<p:sld xmlns:a="http://schemas.openxmlformats.org/drawingml/2006/main" xmlns:r="http://schemas.openxmlformats.org/officeDocument/2006/relationships" xmlns:p="http://schemas.openxmlformats.org/presentationml/2006/main">
-  <p:cSld>
-    <p:spTree>
-      <p:nvGrpSpPr>
-        <p:cNvPr id="1" name="Shape 159"/>
-        <p:cNvGrpSpPr/>
-        <p:nvPr/>
-      </p:nvGrpSpPr>
-      <p:grpSpPr>
-        <a:xfrm>
-          <a:off x="0" y="0"/>
-          <a:ext cx="0" cy="0"/>
-          <a:chOff x="0" y="0"/>
-          <a:chExt cx="0" cy="0"/>
-        </a:xfrm>
-      </p:grpSpPr>
-      <p:pic>
-        <p:nvPicPr>
-          <p:cNvPr id="160" name="Google Shape;160;p16"/>
-          <p:cNvPicPr preferRelativeResize="0"/>
-          <p:nvPr/>
-        </p:nvPicPr>
-        <p:blipFill rotWithShape="1">
-          <a:blip r:embed="rId3">
-            <a:alphaModFix/>
-          </a:blip>
-          <a:srcRect/>
-          <a:stretch/>
-        </p:blipFill>
-        <p:spPr>
-          <a:xfrm>
-            <a:off x="0" y="0"/>
-            <a:ext cx="146399" cy="10286999"/>
-          </a:xfrm>
-          <a:prstGeom prst="rect">
-            <a:avLst/>
-          </a:prstGeom>
-          <a:noFill/>
-          <a:ln>
-            <a:noFill/>
-          </a:ln>
-        </p:spPr>
-      </p:pic>
-      <p:sp>
-        <p:nvSpPr>
-          <p:cNvPr id="161" name="Google Shape;161;p16"/>
-          <p:cNvSpPr txBox="1">
-            <a:spLocks noGrp="1"/>
-          </p:cNvSpPr>
-          <p:nvPr>
-            <p:ph type="title"/>
-          </p:nvPr>
-        </p:nvSpPr>
-        <p:spPr>
-          <a:xfrm>
-            <a:off x="507720" y="190500"/>
-            <a:ext cx="17791166" cy="1998624"/>
-          </a:xfrm>
-          <a:prstGeom prst="rect">
-            <a:avLst/>
-          </a:prstGeom>
-          <a:noFill/>
-          <a:ln>
-            <a:noFill/>
-          </a:ln>
-        </p:spPr>
-        <p:txBody>
-          <a:bodyPr spcFirstLastPara="1" wrap="square" lIns="0" tIns="333375" rIns="0" bIns="0" anchor="t" anchorCtr="0">
-            <a:spAutoFit/>
-          </a:bodyPr>
-          <a:lstStyle/>
-          <a:p>
-            <a:pPr marL="12700" lvl="0" indent="0" algn="l" rtl="0">
-              <a:lnSpc>
-                <a:spcPct val="100000"/>
-              </a:lnSpc>
-              <a:spcBef>
-                <a:spcPts val="0"/>
-              </a:spcBef>
-              <a:spcAft>
-                <a:spcPts val="0"/>
-              </a:spcAft>
-              <a:buNone/>
-            </a:pPr>
-            <a:r>
-              <a:rPr lang="fr-FR" sz="4800">
-                <a:latin typeface="Verdana"/>
-                <a:ea typeface="Verdana"/>
-                <a:cs typeface="Verdana"/>
-                <a:sym typeface="Verdana"/>
-              </a:rPr>
-              <a:t>Attack Timeline Reconstruction</a:t>
-            </a:r>
-            <a:br>
-              <a:rPr lang="fr-FR" sz="4800">
-                <a:latin typeface="Verdana"/>
-                <a:ea typeface="Verdana"/>
-                <a:cs typeface="Verdana"/>
-                <a:sym typeface="Verdana"/>
-              </a:rPr>
-            </a:br>
-            <a:br>
-              <a:rPr lang="fr-FR" sz="3000" b="0">
-                <a:latin typeface="Verdana"/>
-                <a:ea typeface="Verdana"/>
-                <a:cs typeface="Verdana"/>
-                <a:sym typeface="Verdana"/>
-              </a:rPr>
-            </a:br>
-            <a:endParaRPr sz="3000">
-              <a:latin typeface="Verdana"/>
-              <a:ea typeface="Verdana"/>
-              <a:cs typeface="Verdana"/>
-              <a:sym typeface="Verdana"/>
-            </a:endParaRPr>
-          </a:p>
-        </p:txBody>
-      </p:sp>
-      <p:pic>
-        <p:nvPicPr>
-          <p:cNvPr id="162" name="Google Shape;162;p16"/>
-          <p:cNvPicPr preferRelativeResize="0"/>
-          <p:nvPr/>
-        </p:nvPicPr>
-        <p:blipFill rotWithShape="1">
-          <a:blip r:embed="rId4">
-            <a:alphaModFix/>
-          </a:blip>
-          <a:srcRect t="311" r="28576" b="46946"/>
-          <a:stretch/>
-        </p:blipFill>
-        <p:spPr>
-          <a:xfrm>
-            <a:off x="6564075" y="2527280"/>
-            <a:ext cx="11734800" cy="4410074"/>
-          </a:xfrm>
-          <a:prstGeom prst="rect">
-            <a:avLst/>
-          </a:prstGeom>
-          <a:noFill/>
-          <a:ln>
-            <a:noFill/>
-          </a:ln>
-        </p:spPr>
-      </p:pic>
-      <p:pic>
-        <p:nvPicPr>
-          <p:cNvPr id="163" name="Google Shape;163;p16"/>
-          <p:cNvPicPr preferRelativeResize="0"/>
-          <p:nvPr/>
-        </p:nvPicPr>
-        <p:blipFill rotWithShape="1">
-          <a:blip r:embed="rId5">
-            <a:alphaModFix/>
-          </a:blip>
-          <a:srcRect/>
-          <a:stretch/>
-        </p:blipFill>
-        <p:spPr>
-          <a:xfrm>
-            <a:off x="4653068" y="6937353"/>
-            <a:ext cx="13645799" cy="3349647"/>
-          </a:xfrm>
-          <a:prstGeom prst="rect">
-            <a:avLst/>
-          </a:prstGeom>
-          <a:noFill/>
-          <a:ln>
-            <a:noFill/>
-          </a:ln>
-        </p:spPr>
-      </p:pic>
-      <p:sp>
-        <p:nvSpPr>
-          <p:cNvPr id="164" name="Google Shape;164;p16"/>
-          <p:cNvSpPr txBox="1"/>
-          <p:nvPr/>
-        </p:nvSpPr>
-        <p:spPr>
-          <a:xfrm>
-            <a:off x="507720" y="3009900"/>
-            <a:ext cx="5131080" cy="1631216"/>
-          </a:xfrm>
-          <a:prstGeom prst="rect">
-            <a:avLst/>
-          </a:prstGeom>
-          <a:noFill/>
-          <a:ln>
-            <a:noFill/>
-          </a:ln>
-        </p:spPr>
-        <p:txBody>
-          <a:bodyPr spcFirstLastPara="1" wrap="square" lIns="91425" tIns="45700" rIns="91425" bIns="45700" anchor="t" anchorCtr="0">
-            <a:spAutoFit/>
-          </a:bodyPr>
-          <a:lstStyle/>
-          <a:p>
-            <a:pPr marL="0" lvl="0" indent="0" algn="l" rtl="0">
-              <a:spcBef>
-                <a:spcPts val="0"/>
-              </a:spcBef>
-              <a:spcAft>
-                <a:spcPts val="0"/>
-              </a:spcAft>
-              <a:buNone/>
-            </a:pPr>
-            <a:r>
-              <a:rPr lang="fr-FR" sz="2000">
-                <a:solidFill>
-                  <a:schemeClr val="lt1"/>
-                </a:solidFill>
-              </a:rPr>
-              <a:t>Peak activity happened at time: 80.2 - 80.3 (between 00:10:20.200  and  00:10:20.300 UTC). The attack peaked at that specific moment with 946 packets representing the highest concentration of malicious activity. </a:t>
-            </a:r>
-            <a:endParaRPr sz="2000">
-              <a:solidFill>
-                <a:schemeClr val="lt1"/>
-              </a:solidFill>
-            </a:endParaRPr>
-          </a:p>
-        </p:txBody>
-      </p:sp>
-      <p:sp>
-        <p:nvSpPr>
-          <p:cNvPr id="165" name="Google Shape;165;p16"/>
-          <p:cNvSpPr txBox="1"/>
-          <p:nvPr/>
-        </p:nvSpPr>
-        <p:spPr>
-          <a:xfrm>
-            <a:off x="518606" y="1484187"/>
-            <a:ext cx="17388394" cy="769441"/>
-          </a:xfrm>
-          <a:prstGeom prst="rect">
-            <a:avLst/>
-          </a:prstGeom>
-          <a:noFill/>
-          <a:ln>
-            <a:noFill/>
-          </a:ln>
-        </p:spPr>
-        <p:txBody>
-          <a:bodyPr spcFirstLastPara="1" wrap="square" lIns="91425" tIns="45700" rIns="91425" bIns="45700" anchor="t" anchorCtr="0">
-            <a:spAutoFit/>
-          </a:bodyPr>
-          <a:lstStyle/>
-          <a:p>
-            <a:pPr marL="0" lvl="0" indent="0" algn="l" rtl="0">
-              <a:spcBef>
-                <a:spcPts val="0"/>
-              </a:spcBef>
-              <a:spcAft>
-                <a:spcPts val="0"/>
-              </a:spcAft>
-              <a:buNone/>
-            </a:pPr>
-            <a:r>
-              <a:rPr lang="fr-FR" sz="2200" b="0">
-                <a:solidFill>
-                  <a:schemeClr val="lt1"/>
-                </a:solidFill>
-                <a:latin typeface="Verdana"/>
-                <a:ea typeface="Verdana"/>
-                <a:cs typeface="Verdana"/>
-                <a:sym typeface="Verdana"/>
-              </a:rPr>
-              <a:t>Query Creates a time-series visualization of malicious activity by grouping traffic into time buckets and marking communications involving the infected host.</a:t>
-            </a:r>
-            <a:endParaRPr sz="2200">
-              <a:solidFill>
-                <a:schemeClr val="lt1"/>
-              </a:solidFill>
-              <a:latin typeface="Verdana"/>
-              <a:ea typeface="Verdana"/>
-              <a:cs typeface="Verdana"/>
-              <a:sym typeface="Verdana"/>
-            </a:endParaRPr>
-          </a:p>
-        </p:txBody>
-      </p:sp>
-    </p:spTree>
-  </p:cSld>
-  <p:clrMapOvr>
-    <a:masterClrMapping/>
-  </p:clrMapOvr>
-</p:sld>
-</file>
-
-<file path=ppt/slides/slide14.xml><?xml version="1.0" encoding="utf-8"?>
 <p:sld xmlns:a="http://schemas.openxmlformats.org/drawingml/2006/main" xmlns:r="http://schemas.openxmlformats.org/officeDocument/2006/relationships" xmlns:p="http://schemas.openxmlformats.org/presentationml/2006/main">
   <p:cSld>
     <p:spTree>
@@ -11265,7 +9345,7 @@
 </p:sld>
 </file>
 
-<file path=ppt/slides/slide15.xml><?xml version="1.0" encoding="utf-8"?>
+<file path=ppt/slides/slide11.xml><?xml version="1.0" encoding="utf-8"?>
 <p:sld xmlns:a="http://schemas.openxmlformats.org/drawingml/2006/main" xmlns:r="http://schemas.openxmlformats.org/officeDocument/2006/relationships" xmlns:p="http://schemas.openxmlformats.org/presentationml/2006/main">
   <p:cSld>
     <p:spTree>
@@ -11578,7 +9658,7 @@
 </p:sld>
 </file>
 
-<file path=ppt/slides/slide16.xml><?xml version="1.0" encoding="utf-8"?>
+<file path=ppt/slides/slide12.xml><?xml version="1.0" encoding="utf-8"?>
 <p:sld xmlns:a="http://schemas.openxmlformats.org/drawingml/2006/main" xmlns:r="http://schemas.openxmlformats.org/officeDocument/2006/relationships" xmlns:p="http://schemas.openxmlformats.org/presentationml/2006/main">
   <p:cSld>
     <p:spTree>
@@ -11634,7 +9714,7 @@
         </p:nvSpPr>
         <p:spPr>
           <a:xfrm>
-            <a:off x="604157" y="342900"/>
+            <a:off x="604157" y="-201113"/>
             <a:ext cx="15633700" cy="1444626"/>
           </a:xfrm>
           <a:prstGeom prst="rect">
@@ -11661,13 +9741,21 @@
               <a:buNone/>
             </a:pPr>
             <a:r>
-              <a:rPr lang="fr-FR" sz="4800"/>
-              <a:t>Encrypted Traffic Analysis</a:t>
+              <a:rPr lang="fr-FR" sz="4800" dirty="0" err="1"/>
+              <a:t>Encrypted</a:t>
+            </a:r>
+            <a:r>
+              <a:rPr lang="fr-FR" sz="4800" dirty="0"/>
+              <a:t> Traffic </a:t>
+            </a:r>
+            <a:r>
+              <a:rPr lang="fr-FR" sz="4800" dirty="0" err="1"/>
+              <a:t>Analysis</a:t>
             </a:r>
             <a:br>
-              <a:rPr lang="fr-FR" sz="4800"/>
+              <a:rPr lang="fr-FR" sz="4800" dirty="0"/>
             </a:br>
-            <a:endParaRPr sz="2400" b="0">
+            <a:endParaRPr sz="2400" b="0" dirty="0">
               <a:latin typeface="Verdana"/>
               <a:ea typeface="Verdana"/>
               <a:cs typeface="Verdana"/>
@@ -11691,8 +9779,8 @@
         </p:blipFill>
         <p:spPr>
           <a:xfrm>
-            <a:off x="490256" y="2714608"/>
-            <a:ext cx="17546176" cy="4285731"/>
+            <a:off x="909356" y="1966848"/>
+            <a:ext cx="12074211" cy="3206020"/>
           </a:xfrm>
           <a:prstGeom prst="rect">
             <a:avLst/>
@@ -11711,8 +9799,8 @@
         </p:nvSpPr>
         <p:spPr>
           <a:xfrm>
-            <a:off x="609600" y="7734300"/>
-            <a:ext cx="17307488" cy="1323439"/>
+            <a:off x="795056" y="5423434"/>
+            <a:ext cx="17091129" cy="1323399"/>
           </a:xfrm>
           <a:prstGeom prst="rect">
             <a:avLst/>
@@ -11743,14 +9831,62 @@
               <a:buChar char="•"/>
             </a:pPr>
             <a:r>
-              <a:rPr lang="fr-FR" sz="2000">
-                <a:solidFill>
-                  <a:schemeClr val="lt1"/>
-                </a:solidFill>
-              </a:rPr>
-              <a:t>22.9% of all network traffic was encrypted (QUIC + TLSv1.2 + TLSv1.3);</a:t>
-            </a:r>
-            <a:endParaRPr/>
+              <a:rPr lang="fr-FR" sz="2000" dirty="0">
+                <a:solidFill>
+                  <a:schemeClr val="lt1"/>
+                </a:solidFill>
+              </a:rPr>
+              <a:t>22.9% of all network </a:t>
+            </a:r>
+            <a:r>
+              <a:rPr lang="fr-FR" sz="2000" dirty="0" err="1">
+                <a:solidFill>
+                  <a:schemeClr val="lt1"/>
+                </a:solidFill>
+              </a:rPr>
+              <a:t>traffic</a:t>
+            </a:r>
+            <a:r>
+              <a:rPr lang="fr-FR" sz="2000" dirty="0">
+                <a:solidFill>
+                  <a:schemeClr val="lt1"/>
+                </a:solidFill>
+              </a:rPr>
+              <a:t> </a:t>
+            </a:r>
+            <a:r>
+              <a:rPr lang="fr-FR" sz="2000" dirty="0" err="1">
+                <a:solidFill>
+                  <a:schemeClr val="lt1"/>
+                </a:solidFill>
+              </a:rPr>
+              <a:t>was</a:t>
+            </a:r>
+            <a:r>
+              <a:rPr lang="fr-FR" sz="2000" dirty="0">
+                <a:solidFill>
+                  <a:schemeClr val="lt1"/>
+                </a:solidFill>
+              </a:rPr>
+              <a:t> </a:t>
+            </a:r>
+            <a:r>
+              <a:rPr lang="fr-FR" sz="2000" dirty="0" err="1">
+                <a:solidFill>
+                  <a:schemeClr val="lt1"/>
+                </a:solidFill>
+              </a:rPr>
+              <a:t>encrypted</a:t>
+            </a:r>
+            <a:r>
+              <a:rPr lang="fr-FR" sz="2000" dirty="0">
+                <a:solidFill>
+                  <a:schemeClr val="lt1"/>
+                </a:solidFill>
+              </a:rPr>
+              <a:t> (QUIC + TLSv1.2 + TLSv1.3);</a:t>
+            </a:r>
+            <a:endParaRPr dirty="0"/>
           </a:p>
           <a:p>
             <a:pPr marL="285750" lvl="0" indent="-285750" algn="l" rtl="0">
@@ -11768,14 +9904,94 @@
               <a:buChar char="•"/>
             </a:pPr>
             <a:r>
-              <a:rPr lang="fr-FR" sz="2000">
-                <a:solidFill>
-                  <a:schemeClr val="lt1"/>
-                </a:solidFill>
-              </a:rPr>
-              <a:t> This represents 3.15 MB of data that cannot be inspected;</a:t>
-            </a:r>
-            <a:endParaRPr/>
+              <a:rPr lang="fr-FR" sz="2000" dirty="0">
+                <a:solidFill>
+                  <a:schemeClr val="lt1"/>
+                </a:solidFill>
+              </a:rPr>
+              <a:t> This </a:t>
+            </a:r>
+            <a:r>
+              <a:rPr lang="fr-FR" sz="2000" dirty="0" err="1">
+                <a:solidFill>
+                  <a:schemeClr val="lt1"/>
+                </a:solidFill>
+              </a:rPr>
+              <a:t>represents</a:t>
+            </a:r>
+            <a:r>
+              <a:rPr lang="fr-FR" sz="2000" dirty="0">
+                <a:solidFill>
+                  <a:schemeClr val="lt1"/>
+                </a:solidFill>
+              </a:rPr>
+              <a:t> 3.15 MB of data </a:t>
+            </a:r>
+            <a:r>
+              <a:rPr lang="fr-FR" sz="2000" dirty="0" err="1">
+                <a:solidFill>
+                  <a:schemeClr val="lt1"/>
+                </a:solidFill>
+              </a:rPr>
+              <a:t>that</a:t>
+            </a:r>
+            <a:r>
+              <a:rPr lang="fr-FR" sz="2000" dirty="0">
+                <a:solidFill>
+                  <a:schemeClr val="lt1"/>
+                </a:solidFill>
+              </a:rPr>
+              <a:t> </a:t>
+            </a:r>
+            <a:r>
+              <a:rPr lang="fr-FR" sz="2000" dirty="0" err="1">
+                <a:solidFill>
+                  <a:schemeClr val="lt1"/>
+                </a:solidFill>
+              </a:rPr>
+              <a:t>cannot</a:t>
+            </a:r>
+            <a:r>
+              <a:rPr lang="fr-FR" sz="2000" dirty="0">
+                <a:solidFill>
+                  <a:schemeClr val="lt1"/>
+                </a:solidFill>
+              </a:rPr>
+              <a:t> </a:t>
+            </a:r>
+            <a:r>
+              <a:rPr lang="fr-FR" sz="2000" dirty="0" err="1">
+                <a:solidFill>
+                  <a:schemeClr val="lt1"/>
+                </a:solidFill>
+              </a:rPr>
+              <a:t>be</a:t>
+            </a:r>
+            <a:r>
+              <a:rPr lang="fr-FR" sz="2000" dirty="0">
+                <a:solidFill>
+                  <a:schemeClr val="lt1"/>
+                </a:solidFill>
+              </a:rPr>
+              <a:t> </a:t>
+            </a:r>
+            <a:r>
+              <a:rPr lang="fr-FR" sz="2000" dirty="0" err="1">
+                <a:solidFill>
+                  <a:schemeClr val="lt1"/>
+                </a:solidFill>
+              </a:rPr>
+              <a:t>inspected</a:t>
+            </a:r>
+            <a:r>
+              <a:rPr lang="fr-FR" sz="2000" dirty="0">
+                <a:solidFill>
+                  <a:schemeClr val="lt1"/>
+                </a:solidFill>
+              </a:rPr>
+              <a:t>;</a:t>
+            </a:r>
+            <a:endParaRPr dirty="0"/>
           </a:p>
           <a:p>
             <a:pPr marL="285750" lvl="0" indent="-285750" algn="l" rtl="0">
@@ -11793,14 +10009,38 @@
               <a:buChar char="•"/>
             </a:pPr>
             <a:r>
-              <a:rPr lang="fr-FR" sz="2000">
-                <a:solidFill>
-                  <a:schemeClr val="lt1"/>
-                </a:solidFill>
-              </a:rPr>
-              <a:t>WarmCookie malware abused QUIC which is a modern encrypted transport protocol that many security tools do not fully decrypt or inspect;</a:t>
-            </a:r>
-            <a:endParaRPr/>
+              <a:rPr lang="fr-FR" sz="2000" dirty="0" err="1">
+                <a:solidFill>
+                  <a:schemeClr val="lt1"/>
+                </a:solidFill>
+              </a:rPr>
+              <a:t>WarmCookie</a:t>
+            </a:r>
+            <a:r>
+              <a:rPr lang="fr-FR" sz="2000" dirty="0">
+                <a:solidFill>
+                  <a:schemeClr val="lt1"/>
+                </a:solidFill>
+              </a:rPr>
+              <a:t> malware </a:t>
+            </a:r>
+            <a:r>
+              <a:rPr lang="fr-FR" sz="2000" dirty="0" err="1">
+                <a:solidFill>
+                  <a:schemeClr val="lt1"/>
+                </a:solidFill>
+              </a:rPr>
+              <a:t>abused</a:t>
+            </a:r>
+            <a:r>
+              <a:rPr lang="fr-FR" sz="2000" dirty="0">
+                <a:solidFill>
+                  <a:schemeClr val="lt1"/>
+                </a:solidFill>
+              </a:rPr>
+              <a:t> QUIC ;</a:t>
+            </a:r>
+            <a:endParaRPr dirty="0"/>
           </a:p>
           <a:p>
             <a:pPr marL="285750" lvl="0" indent="-285750" algn="l" rtl="0">
@@ -11818,14 +10058,142 @@
               <a:buChar char="•"/>
             </a:pPr>
             <a:r>
-              <a:rPr lang="fr-FR" sz="2000">
-                <a:solidFill>
-                  <a:schemeClr val="lt1"/>
-                </a:solidFill>
-              </a:rPr>
-              <a:t>The existing security alerts didn’t include most encrypted threats.</a:t>
-            </a:r>
-            <a:endParaRPr/>
+              <a:rPr lang="fr-FR" sz="2000" dirty="0">
+                <a:solidFill>
+                  <a:schemeClr val="lt1"/>
+                </a:solidFill>
+              </a:rPr>
+              <a:t>The </a:t>
+            </a:r>
+            <a:r>
+              <a:rPr lang="fr-FR" sz="2000" dirty="0" err="1">
+                <a:solidFill>
+                  <a:schemeClr val="lt1"/>
+                </a:solidFill>
+              </a:rPr>
+              <a:t>existing</a:t>
+            </a:r>
+            <a:r>
+              <a:rPr lang="fr-FR" sz="2000" dirty="0">
+                <a:solidFill>
+                  <a:schemeClr val="lt1"/>
+                </a:solidFill>
+              </a:rPr>
+              <a:t> </a:t>
+            </a:r>
+            <a:r>
+              <a:rPr lang="fr-FR" sz="2000" dirty="0" err="1">
+                <a:solidFill>
+                  <a:schemeClr val="lt1"/>
+                </a:solidFill>
+              </a:rPr>
+              <a:t>security</a:t>
+            </a:r>
+            <a:r>
+              <a:rPr lang="fr-FR" sz="2000" dirty="0">
+                <a:solidFill>
+                  <a:schemeClr val="lt1"/>
+                </a:solidFill>
+              </a:rPr>
+              <a:t> </a:t>
+            </a:r>
+            <a:r>
+              <a:rPr lang="fr-FR" sz="2000" dirty="0" err="1">
+                <a:solidFill>
+                  <a:schemeClr val="lt1"/>
+                </a:solidFill>
+              </a:rPr>
+              <a:t>alerts</a:t>
+            </a:r>
+            <a:r>
+              <a:rPr lang="fr-FR" sz="2000" dirty="0">
+                <a:solidFill>
+                  <a:schemeClr val="lt1"/>
+                </a:solidFill>
+              </a:rPr>
+              <a:t> </a:t>
+            </a:r>
+            <a:r>
+              <a:rPr lang="fr-FR" sz="2000" dirty="0" err="1">
+                <a:solidFill>
+                  <a:schemeClr val="lt1"/>
+                </a:solidFill>
+              </a:rPr>
+              <a:t>didn’t</a:t>
+            </a:r>
+            <a:r>
+              <a:rPr lang="fr-FR" sz="2000" dirty="0">
+                <a:solidFill>
+                  <a:schemeClr val="lt1"/>
+                </a:solidFill>
+              </a:rPr>
+              <a:t> </a:t>
+            </a:r>
+            <a:r>
+              <a:rPr lang="fr-FR" sz="2000" dirty="0" err="1">
+                <a:solidFill>
+                  <a:schemeClr val="lt1"/>
+                </a:solidFill>
+              </a:rPr>
+              <a:t>include</a:t>
+            </a:r>
+            <a:r>
+              <a:rPr lang="fr-FR" sz="2000" dirty="0">
+                <a:solidFill>
+                  <a:schemeClr val="lt1"/>
+                </a:solidFill>
+              </a:rPr>
+              <a:t> </a:t>
+            </a:r>
+            <a:r>
+              <a:rPr lang="fr-FR" sz="2000" dirty="0" err="1">
+                <a:solidFill>
+                  <a:schemeClr val="lt1"/>
+                </a:solidFill>
+              </a:rPr>
+              <a:t>most</a:t>
+            </a:r>
+            <a:r>
+              <a:rPr lang="fr-FR" sz="2000" dirty="0">
+                <a:solidFill>
+                  <a:schemeClr val="lt1"/>
+                </a:solidFill>
+              </a:rPr>
+              <a:t> </a:t>
+            </a:r>
+            <a:r>
+              <a:rPr lang="fr-FR" sz="2000" dirty="0" err="1">
+                <a:solidFill>
+                  <a:schemeClr val="lt1"/>
+                </a:solidFill>
+              </a:rPr>
+              <a:t>encrypted</a:t>
+            </a:r>
+            <a:r>
+              <a:rPr lang="fr-FR" sz="2000" dirty="0">
+                <a:solidFill>
+                  <a:schemeClr val="lt1"/>
+                </a:solidFill>
+              </a:rPr>
+              <a:t> </a:t>
+            </a:r>
+            <a:r>
+              <a:rPr lang="fr-FR" sz="2000" dirty="0" err="1">
+                <a:solidFill>
+                  <a:schemeClr val="lt1"/>
+                </a:solidFill>
+              </a:rPr>
+              <a:t>threats</a:t>
+            </a:r>
+            <a:r>
+              <a:rPr lang="fr-FR" sz="2000" dirty="0">
+                <a:solidFill>
+                  <a:schemeClr val="lt1"/>
+                </a:solidFill>
+              </a:rPr>
+              <a:t>.</a:t>
+            </a:r>
+            <a:endParaRPr dirty="0"/>
           </a:p>
         </p:txBody>
       </p:sp>
@@ -11837,8 +10205,8 @@
         </p:nvSpPr>
         <p:spPr>
           <a:xfrm>
-            <a:off x="517470" y="1518982"/>
-            <a:ext cx="16398930" cy="707886"/>
+            <a:off x="795055" y="1008396"/>
+            <a:ext cx="16088687" cy="707886"/>
           </a:xfrm>
           <a:prstGeom prst="rect">
             <a:avLst/>
@@ -11864,7 +10232,7 @@
               <a:buNone/>
             </a:pPr>
             <a:r>
-              <a:rPr lang="fr-FR" sz="2000" b="0">
+              <a:rPr lang="fr-FR" sz="2000" b="0" dirty="0" err="1">
                 <a:solidFill>
                   <a:schemeClr val="lt1"/>
                 </a:solidFill>
@@ -11873,9 +10241,405 @@
                 <a:cs typeface="Verdana"/>
                 <a:sym typeface="Verdana"/>
               </a:rPr>
-              <a:t>Query filters only encrypted protocols (TLSv1.2, TLSv1.3, QUIC), then counts total encrypted packets and sum their bytes, to then calculate what percentage of total traffic is encrypted.</a:t>
-            </a:r>
-            <a:endParaRPr sz="2000">
+              <a:t>Query</a:t>
+            </a:r>
+            <a:r>
+              <a:rPr lang="fr-FR" sz="2000" b="0" dirty="0">
+                <a:solidFill>
+                  <a:schemeClr val="lt1"/>
+                </a:solidFill>
+                <a:latin typeface="Verdana"/>
+                <a:ea typeface="Verdana"/>
+                <a:cs typeface="Verdana"/>
+                <a:sym typeface="Verdana"/>
+              </a:rPr>
+              <a:t> </a:t>
+            </a:r>
+            <a:r>
+              <a:rPr lang="fr-FR" sz="2000" b="0" dirty="0" err="1">
+                <a:solidFill>
+                  <a:schemeClr val="lt1"/>
+                </a:solidFill>
+                <a:latin typeface="Verdana"/>
+                <a:ea typeface="Verdana"/>
+                <a:cs typeface="Verdana"/>
+                <a:sym typeface="Verdana"/>
+              </a:rPr>
+              <a:t>filters</a:t>
+            </a:r>
+            <a:r>
+              <a:rPr lang="fr-FR" sz="2000" b="0" dirty="0">
+                <a:solidFill>
+                  <a:schemeClr val="lt1"/>
+                </a:solidFill>
+                <a:latin typeface="Verdana"/>
+                <a:ea typeface="Verdana"/>
+                <a:cs typeface="Verdana"/>
+                <a:sym typeface="Verdana"/>
+              </a:rPr>
+              <a:t> </a:t>
+            </a:r>
+            <a:r>
+              <a:rPr lang="fr-FR" sz="2000" b="0" dirty="0" err="1">
+                <a:solidFill>
+                  <a:schemeClr val="lt1"/>
+                </a:solidFill>
+                <a:latin typeface="Verdana"/>
+                <a:ea typeface="Verdana"/>
+                <a:cs typeface="Verdana"/>
+                <a:sym typeface="Verdana"/>
+              </a:rPr>
+              <a:t>only</a:t>
+            </a:r>
+            <a:r>
+              <a:rPr lang="fr-FR" sz="2000" b="0" dirty="0">
+                <a:solidFill>
+                  <a:schemeClr val="lt1"/>
+                </a:solidFill>
+                <a:latin typeface="Verdana"/>
+                <a:ea typeface="Verdana"/>
+                <a:cs typeface="Verdana"/>
+                <a:sym typeface="Verdana"/>
+              </a:rPr>
+              <a:t> </a:t>
+            </a:r>
+            <a:r>
+              <a:rPr lang="fr-FR" sz="2000" b="0" dirty="0" err="1">
+                <a:solidFill>
+                  <a:schemeClr val="lt1"/>
+                </a:solidFill>
+                <a:latin typeface="Verdana"/>
+                <a:ea typeface="Verdana"/>
+                <a:cs typeface="Verdana"/>
+                <a:sym typeface="Verdana"/>
+              </a:rPr>
+              <a:t>encrypted</a:t>
+            </a:r>
+            <a:r>
+              <a:rPr lang="fr-FR" sz="2000" b="0" dirty="0">
+                <a:solidFill>
+                  <a:schemeClr val="lt1"/>
+                </a:solidFill>
+                <a:latin typeface="Verdana"/>
+                <a:ea typeface="Verdana"/>
+                <a:cs typeface="Verdana"/>
+                <a:sym typeface="Verdana"/>
+              </a:rPr>
+              <a:t> </a:t>
+            </a:r>
+            <a:r>
+              <a:rPr lang="fr-FR" sz="2000" b="0" dirty="0" err="1">
+                <a:solidFill>
+                  <a:schemeClr val="lt1"/>
+                </a:solidFill>
+                <a:latin typeface="Verdana"/>
+                <a:ea typeface="Verdana"/>
+                <a:cs typeface="Verdana"/>
+                <a:sym typeface="Verdana"/>
+              </a:rPr>
+              <a:t>protocols</a:t>
+            </a:r>
+            <a:r>
+              <a:rPr lang="fr-FR" sz="2000" b="0" dirty="0">
+                <a:solidFill>
+                  <a:schemeClr val="lt1"/>
+                </a:solidFill>
+                <a:latin typeface="Verdana"/>
+                <a:ea typeface="Verdana"/>
+                <a:cs typeface="Verdana"/>
+                <a:sym typeface="Verdana"/>
+              </a:rPr>
+              <a:t> (TLSv1.2, TLSv1.3, QUIC), </a:t>
+            </a:r>
+            <a:r>
+              <a:rPr lang="fr-FR" sz="2000" b="0" dirty="0" err="1">
+                <a:solidFill>
+                  <a:schemeClr val="lt1"/>
+                </a:solidFill>
+                <a:latin typeface="Verdana"/>
+                <a:ea typeface="Verdana"/>
+                <a:cs typeface="Verdana"/>
+                <a:sym typeface="Verdana"/>
+              </a:rPr>
+              <a:t>then</a:t>
+            </a:r>
+            <a:r>
+              <a:rPr lang="fr-FR" sz="2000" b="0" dirty="0">
+                <a:solidFill>
+                  <a:schemeClr val="lt1"/>
+                </a:solidFill>
+                <a:latin typeface="Verdana"/>
+                <a:ea typeface="Verdana"/>
+                <a:cs typeface="Verdana"/>
+                <a:sym typeface="Verdana"/>
+              </a:rPr>
+              <a:t> </a:t>
+            </a:r>
+            <a:r>
+              <a:rPr lang="fr-FR" sz="2000" b="0" dirty="0" err="1">
+                <a:solidFill>
+                  <a:schemeClr val="lt1"/>
+                </a:solidFill>
+                <a:latin typeface="Verdana"/>
+                <a:ea typeface="Verdana"/>
+                <a:cs typeface="Verdana"/>
+                <a:sym typeface="Verdana"/>
+              </a:rPr>
+              <a:t>counts</a:t>
+            </a:r>
+            <a:r>
+              <a:rPr lang="fr-FR" sz="2000" b="0" dirty="0">
+                <a:solidFill>
+                  <a:schemeClr val="lt1"/>
+                </a:solidFill>
+                <a:latin typeface="Verdana"/>
+                <a:ea typeface="Verdana"/>
+                <a:cs typeface="Verdana"/>
+                <a:sym typeface="Verdana"/>
+              </a:rPr>
+              <a:t> total </a:t>
+            </a:r>
+            <a:r>
+              <a:rPr lang="fr-FR" sz="2000" b="0" dirty="0" err="1">
+                <a:solidFill>
+                  <a:schemeClr val="lt1"/>
+                </a:solidFill>
+                <a:latin typeface="Verdana"/>
+                <a:ea typeface="Verdana"/>
+                <a:cs typeface="Verdana"/>
+                <a:sym typeface="Verdana"/>
+              </a:rPr>
+              <a:t>encrypted</a:t>
+            </a:r>
+            <a:r>
+              <a:rPr lang="fr-FR" sz="2000" b="0" dirty="0">
+                <a:solidFill>
+                  <a:schemeClr val="lt1"/>
+                </a:solidFill>
+                <a:latin typeface="Verdana"/>
+                <a:ea typeface="Verdana"/>
+                <a:cs typeface="Verdana"/>
+                <a:sym typeface="Verdana"/>
+              </a:rPr>
+              <a:t> </a:t>
+            </a:r>
+            <a:r>
+              <a:rPr lang="fr-FR" sz="2000" b="0" dirty="0" err="1">
+                <a:solidFill>
+                  <a:schemeClr val="lt1"/>
+                </a:solidFill>
+                <a:latin typeface="Verdana"/>
+                <a:ea typeface="Verdana"/>
+                <a:cs typeface="Verdana"/>
+                <a:sym typeface="Verdana"/>
+              </a:rPr>
+              <a:t>packets</a:t>
+            </a:r>
+            <a:r>
+              <a:rPr lang="fr-FR" sz="2000" b="0" dirty="0">
+                <a:solidFill>
+                  <a:schemeClr val="lt1"/>
+                </a:solidFill>
+                <a:latin typeface="Verdana"/>
+                <a:ea typeface="Verdana"/>
+                <a:cs typeface="Verdana"/>
+                <a:sym typeface="Verdana"/>
+              </a:rPr>
+              <a:t> and </a:t>
+            </a:r>
+            <a:r>
+              <a:rPr lang="fr-FR" sz="2000" b="0" dirty="0" err="1">
+                <a:solidFill>
+                  <a:schemeClr val="lt1"/>
+                </a:solidFill>
+                <a:latin typeface="Verdana"/>
+                <a:ea typeface="Verdana"/>
+                <a:cs typeface="Verdana"/>
+                <a:sym typeface="Verdana"/>
+              </a:rPr>
+              <a:t>sum</a:t>
+            </a:r>
+            <a:r>
+              <a:rPr lang="fr-FR" sz="2000" b="0" dirty="0">
+                <a:solidFill>
+                  <a:schemeClr val="lt1"/>
+                </a:solidFill>
+                <a:latin typeface="Verdana"/>
+                <a:ea typeface="Verdana"/>
+                <a:cs typeface="Verdana"/>
+                <a:sym typeface="Verdana"/>
+              </a:rPr>
+              <a:t> </a:t>
+            </a:r>
+            <a:r>
+              <a:rPr lang="fr-FR" sz="2000" b="0" dirty="0" err="1">
+                <a:solidFill>
+                  <a:schemeClr val="lt1"/>
+                </a:solidFill>
+                <a:latin typeface="Verdana"/>
+                <a:ea typeface="Verdana"/>
+                <a:cs typeface="Verdana"/>
+                <a:sym typeface="Verdana"/>
+              </a:rPr>
+              <a:t>their</a:t>
+            </a:r>
+            <a:r>
+              <a:rPr lang="fr-FR" sz="2000" b="0" dirty="0">
+                <a:solidFill>
+                  <a:schemeClr val="lt1"/>
+                </a:solidFill>
+                <a:latin typeface="Verdana"/>
+                <a:ea typeface="Verdana"/>
+                <a:cs typeface="Verdana"/>
+                <a:sym typeface="Verdana"/>
+              </a:rPr>
+              <a:t> bytes, to </a:t>
+            </a:r>
+            <a:r>
+              <a:rPr lang="fr-FR" sz="2000" b="0" dirty="0" err="1">
+                <a:solidFill>
+                  <a:schemeClr val="lt1"/>
+                </a:solidFill>
+                <a:latin typeface="Verdana"/>
+                <a:ea typeface="Verdana"/>
+                <a:cs typeface="Verdana"/>
+                <a:sym typeface="Verdana"/>
+              </a:rPr>
+              <a:t>then</a:t>
+            </a:r>
+            <a:r>
+              <a:rPr lang="fr-FR" sz="2000" b="0" dirty="0">
+                <a:solidFill>
+                  <a:schemeClr val="lt1"/>
+                </a:solidFill>
+                <a:latin typeface="Verdana"/>
+                <a:ea typeface="Verdana"/>
+                <a:cs typeface="Verdana"/>
+                <a:sym typeface="Verdana"/>
+              </a:rPr>
+              <a:t> </a:t>
+            </a:r>
+            <a:r>
+              <a:rPr lang="fr-FR" sz="2000" b="0" dirty="0" err="1">
+                <a:solidFill>
+                  <a:schemeClr val="lt1"/>
+                </a:solidFill>
+                <a:latin typeface="Verdana"/>
+                <a:ea typeface="Verdana"/>
+                <a:cs typeface="Verdana"/>
+                <a:sym typeface="Verdana"/>
+              </a:rPr>
+              <a:t>calculate</a:t>
+            </a:r>
+            <a:r>
+              <a:rPr lang="fr-FR" sz="2000" b="0" dirty="0">
+                <a:solidFill>
+                  <a:schemeClr val="lt1"/>
+                </a:solidFill>
+                <a:latin typeface="Verdana"/>
+                <a:ea typeface="Verdana"/>
+                <a:cs typeface="Verdana"/>
+                <a:sym typeface="Verdana"/>
+              </a:rPr>
+              <a:t> </a:t>
+            </a:r>
+            <a:r>
+              <a:rPr lang="fr-FR" sz="2000" b="0" dirty="0" err="1">
+                <a:solidFill>
+                  <a:schemeClr val="lt1"/>
+                </a:solidFill>
+                <a:latin typeface="Verdana"/>
+                <a:ea typeface="Verdana"/>
+                <a:cs typeface="Verdana"/>
+                <a:sym typeface="Verdana"/>
+              </a:rPr>
+              <a:t>what</a:t>
+            </a:r>
+            <a:r>
+              <a:rPr lang="fr-FR" sz="2000" b="0" dirty="0">
+                <a:solidFill>
+                  <a:schemeClr val="lt1"/>
+                </a:solidFill>
+                <a:latin typeface="Verdana"/>
+                <a:ea typeface="Verdana"/>
+                <a:cs typeface="Verdana"/>
+                <a:sym typeface="Verdana"/>
+              </a:rPr>
+              <a:t> percentage of total </a:t>
+            </a:r>
+            <a:r>
+              <a:rPr lang="fr-FR" sz="2000" b="0" dirty="0" err="1">
+                <a:solidFill>
+                  <a:schemeClr val="lt1"/>
+                </a:solidFill>
+                <a:latin typeface="Verdana"/>
+                <a:ea typeface="Verdana"/>
+                <a:cs typeface="Verdana"/>
+                <a:sym typeface="Verdana"/>
+              </a:rPr>
+              <a:t>traffic</a:t>
+            </a:r>
+            <a:r>
+              <a:rPr lang="fr-FR" sz="2000" b="0" dirty="0">
+                <a:solidFill>
+                  <a:schemeClr val="lt1"/>
+                </a:solidFill>
+                <a:latin typeface="Verdana"/>
+                <a:ea typeface="Verdana"/>
+                <a:cs typeface="Verdana"/>
+                <a:sym typeface="Verdana"/>
+              </a:rPr>
+              <a:t> </a:t>
+            </a:r>
+            <a:r>
+              <a:rPr lang="fr-FR" sz="2000" b="0" dirty="0" err="1">
+                <a:solidFill>
+                  <a:schemeClr val="lt1"/>
+                </a:solidFill>
+                <a:latin typeface="Verdana"/>
+                <a:ea typeface="Verdana"/>
+                <a:cs typeface="Verdana"/>
+                <a:sym typeface="Verdana"/>
+              </a:rPr>
+              <a:t>is</a:t>
+            </a:r>
+            <a:r>
+              <a:rPr lang="fr-FR" sz="2000" b="0" dirty="0">
+                <a:solidFill>
+                  <a:schemeClr val="lt1"/>
+                </a:solidFill>
+                <a:latin typeface="Verdana"/>
+                <a:ea typeface="Verdana"/>
+                <a:cs typeface="Verdana"/>
+                <a:sym typeface="Verdana"/>
+              </a:rPr>
+              <a:t> </a:t>
+            </a:r>
+            <a:r>
+              <a:rPr lang="fr-FR" sz="2000" b="0" dirty="0" err="1">
+                <a:solidFill>
+                  <a:schemeClr val="lt1"/>
+                </a:solidFill>
+                <a:latin typeface="Verdana"/>
+                <a:ea typeface="Verdana"/>
+                <a:cs typeface="Verdana"/>
+                <a:sym typeface="Verdana"/>
+              </a:rPr>
+              <a:t>encrypted</a:t>
+            </a:r>
+            <a:r>
+              <a:rPr lang="fr-FR" sz="2000" b="0" dirty="0">
+                <a:solidFill>
+                  <a:schemeClr val="lt1"/>
+                </a:solidFill>
+                <a:latin typeface="Verdana"/>
+                <a:ea typeface="Verdana"/>
+                <a:cs typeface="Verdana"/>
+                <a:sym typeface="Verdana"/>
+              </a:rPr>
+              <a:t>.</a:t>
+            </a:r>
+            <a:endParaRPr sz="2000" dirty="0">
               <a:solidFill>
                 <a:schemeClr val="lt1"/>
               </a:solidFill>
@@ -11883,6 +10647,269 @@
           </a:p>
         </p:txBody>
       </p:sp>
+      <p:sp>
+        <p:nvSpPr>
+          <p:cNvPr id="3" name="ZoneTexte 2">
+            <a:extLst>
+              <a:ext uri="{FF2B5EF4-FFF2-40B4-BE49-F238E27FC236}">
+                <a16:creationId xmlns:a16="http://schemas.microsoft.com/office/drawing/2014/main" id="{C40E5E24-716D-7C60-9BC3-90EBB45DB715}"/>
+              </a:ext>
+            </a:extLst>
+          </p:cNvPr>
+          <p:cNvSpPr txBox="1"/>
+          <p:nvPr/>
+        </p:nvSpPr>
+        <p:spPr>
+          <a:xfrm>
+            <a:off x="598435" y="6935335"/>
+            <a:ext cx="9030378" cy="769441"/>
+          </a:xfrm>
+          <a:prstGeom prst="rect">
+            <a:avLst/>
+          </a:prstGeom>
+          <a:noFill/>
+        </p:spPr>
+        <p:txBody>
+          <a:bodyPr wrap="square">
+            <a:spAutoFit/>
+          </a:bodyPr>
+          <a:lstStyle/>
+          <a:p>
+            <a:r>
+              <a:rPr lang="fr-FR" sz="4400" b="1" dirty="0">
+                <a:solidFill>
+                  <a:schemeClr val="bg1"/>
+                </a:solidFill>
+                <a:latin typeface="Tahoma" panose="020B0604030504040204" pitchFamily="34" charset="0"/>
+                <a:ea typeface="Tahoma" panose="020B0604030504040204" pitchFamily="34" charset="0"/>
+                <a:cs typeface="Tahoma" panose="020B0604030504040204" pitchFamily="34" charset="0"/>
+              </a:rPr>
+              <a:t>Clustering </a:t>
+            </a:r>
+            <a:r>
+              <a:rPr lang="fr-FR" sz="4400" b="1" dirty="0" err="1">
+                <a:solidFill>
+                  <a:schemeClr val="bg1"/>
+                </a:solidFill>
+                <a:latin typeface="Tahoma" panose="020B0604030504040204" pitchFamily="34" charset="0"/>
+                <a:ea typeface="Tahoma" panose="020B0604030504040204" pitchFamily="34" charset="0"/>
+                <a:cs typeface="Tahoma" panose="020B0604030504040204" pitchFamily="34" charset="0"/>
+              </a:rPr>
+              <a:t>Analysis</a:t>
+            </a:r>
+            <a:endParaRPr lang="fr-FR" sz="4400" b="1" dirty="0">
+              <a:solidFill>
+                <a:schemeClr val="bg1"/>
+              </a:solidFill>
+              <a:latin typeface="Tahoma" panose="020B0604030504040204" pitchFamily="34" charset="0"/>
+              <a:ea typeface="Tahoma" panose="020B0604030504040204" pitchFamily="34" charset="0"/>
+              <a:cs typeface="Tahoma" panose="020B0604030504040204" pitchFamily="34" charset="0"/>
+            </a:endParaRPr>
+          </a:p>
+        </p:txBody>
+      </p:sp>
+      <p:sp>
+        <p:nvSpPr>
+          <p:cNvPr id="5" name="ZoneTexte 4">
+            <a:extLst>
+              <a:ext uri="{FF2B5EF4-FFF2-40B4-BE49-F238E27FC236}">
+                <a16:creationId xmlns:a16="http://schemas.microsoft.com/office/drawing/2014/main" id="{C12FE1C5-9968-9B98-5214-5469D4B8E583}"/>
+              </a:ext>
+            </a:extLst>
+          </p:cNvPr>
+          <p:cNvSpPr txBox="1"/>
+          <p:nvPr/>
+        </p:nvSpPr>
+        <p:spPr>
+          <a:xfrm>
+            <a:off x="795055" y="7955165"/>
+            <a:ext cx="5296179" cy="1323439"/>
+          </a:xfrm>
+          <a:prstGeom prst="rect">
+            <a:avLst/>
+          </a:prstGeom>
+          <a:noFill/>
+        </p:spPr>
+        <p:txBody>
+          <a:bodyPr wrap="square">
+            <a:spAutoFit/>
+          </a:bodyPr>
+          <a:lstStyle/>
+          <a:p>
+            <a:r>
+              <a:rPr lang="fr-FR" sz="2000" dirty="0" err="1">
+                <a:solidFill>
+                  <a:schemeClr val="bg1"/>
+                </a:solidFill>
+              </a:rPr>
+              <a:t>Computes</a:t>
+            </a:r>
+            <a:r>
+              <a:rPr lang="fr-FR" sz="2000" dirty="0">
+                <a:solidFill>
+                  <a:schemeClr val="bg1"/>
+                </a:solidFill>
+              </a:rPr>
+              <a:t> </a:t>
+            </a:r>
+            <a:r>
+              <a:rPr lang="fr-FR" sz="2000" dirty="0" err="1">
+                <a:solidFill>
+                  <a:schemeClr val="bg1"/>
+                </a:solidFill>
+              </a:rPr>
+              <a:t>frequency</a:t>
+            </a:r>
+            <a:r>
+              <a:rPr lang="fr-FR" sz="2000" dirty="0">
+                <a:solidFill>
+                  <a:schemeClr val="bg1"/>
+                </a:solidFill>
+              </a:rPr>
+              <a:t> of the communication, the </a:t>
+            </a:r>
+            <a:r>
+              <a:rPr lang="fr-FR" sz="2000" dirty="0" err="1">
+                <a:solidFill>
+                  <a:schemeClr val="bg1"/>
+                </a:solidFill>
+              </a:rPr>
+              <a:t>average</a:t>
+            </a:r>
+            <a:r>
+              <a:rPr lang="fr-FR" sz="2000" dirty="0">
+                <a:solidFill>
+                  <a:schemeClr val="bg1"/>
+                </a:solidFill>
+              </a:rPr>
+              <a:t> message size, the </a:t>
+            </a:r>
+            <a:r>
+              <a:rPr lang="fr-FR" sz="2000" dirty="0" err="1">
+                <a:solidFill>
+                  <a:schemeClr val="bg1"/>
+                </a:solidFill>
+              </a:rPr>
+              <a:t>consistency</a:t>
+            </a:r>
+            <a:r>
+              <a:rPr lang="fr-FR" sz="2000" dirty="0">
+                <a:solidFill>
+                  <a:schemeClr val="bg1"/>
+                </a:solidFill>
+              </a:rPr>
+              <a:t> size for </a:t>
+            </a:r>
+            <a:r>
+              <a:rPr lang="fr-FR" sz="2000" dirty="0" err="1">
+                <a:solidFill>
+                  <a:schemeClr val="bg1"/>
+                </a:solidFill>
+              </a:rPr>
+              <a:t>each</a:t>
+            </a:r>
+            <a:r>
+              <a:rPr lang="fr-FR" sz="2000" dirty="0">
+                <a:solidFill>
+                  <a:schemeClr val="bg1"/>
+                </a:solidFill>
+              </a:rPr>
+              <a:t> src-dst pair, </a:t>
+            </a:r>
+            <a:r>
+              <a:rPr lang="fr-FR" sz="2000" dirty="0" err="1">
+                <a:solidFill>
+                  <a:schemeClr val="bg1"/>
+                </a:solidFill>
+              </a:rPr>
+              <a:t>then</a:t>
+            </a:r>
+            <a:r>
+              <a:rPr lang="fr-FR" sz="2000" dirty="0">
+                <a:solidFill>
+                  <a:schemeClr val="bg1"/>
+                </a:solidFill>
+              </a:rPr>
+              <a:t> clusters the </a:t>
+            </a:r>
+            <a:r>
+              <a:rPr lang="fr-FR" sz="2000" dirty="0" err="1">
+                <a:solidFill>
+                  <a:schemeClr val="bg1"/>
+                </a:solidFill>
+              </a:rPr>
+              <a:t>behavior</a:t>
+            </a:r>
+            <a:r>
+              <a:rPr lang="fr-FR" sz="2000" dirty="0">
+                <a:solidFill>
+                  <a:schemeClr val="bg1"/>
+                </a:solidFill>
+              </a:rPr>
+              <a:t>-type in </a:t>
+            </a:r>
+            <a:r>
+              <a:rPr lang="fr-FR" sz="2000" dirty="0" err="1">
+                <a:solidFill>
+                  <a:schemeClr val="bg1"/>
+                </a:solidFill>
+              </a:rPr>
+              <a:t>three</a:t>
+            </a:r>
+            <a:r>
+              <a:rPr lang="fr-FR" sz="2000" dirty="0">
+                <a:solidFill>
+                  <a:schemeClr val="bg1"/>
+                </a:solidFill>
+              </a:rPr>
+              <a:t> </a:t>
+            </a:r>
+            <a:r>
+              <a:rPr lang="fr-FR" sz="2000" dirty="0" err="1">
+                <a:solidFill>
+                  <a:schemeClr val="bg1"/>
+                </a:solidFill>
+              </a:rPr>
+              <a:t>categories</a:t>
+            </a:r>
+            <a:endParaRPr lang="fr-FR" sz="2000" dirty="0">
+              <a:solidFill>
+                <a:schemeClr val="bg1"/>
+              </a:solidFill>
+            </a:endParaRPr>
+          </a:p>
+        </p:txBody>
+      </p:sp>
+      <p:pic>
+        <p:nvPicPr>
+          <p:cNvPr id="7" name="Image 6">
+            <a:extLst>
+              <a:ext uri="{FF2B5EF4-FFF2-40B4-BE49-F238E27FC236}">
+                <a16:creationId xmlns:a16="http://schemas.microsoft.com/office/drawing/2014/main" id="{0E6ADCA3-ADE4-AC91-A37B-75D2F2425509}"/>
+              </a:ext>
+            </a:extLst>
+          </p:cNvPr>
+          <p:cNvPicPr>
+            <a:picLocks noChangeAspect="1"/>
+          </p:cNvPicPr>
+          <p:nvPr/>
+        </p:nvPicPr>
+        <p:blipFill>
+          <a:blip r:embed="rId5"/>
+          <a:stretch>
+            <a:fillRect/>
+          </a:stretch>
+        </p:blipFill>
+        <p:spPr>
+          <a:xfrm>
+            <a:off x="7359020" y="7643221"/>
+            <a:ext cx="9508441" cy="2385223"/>
+          </a:xfrm>
+          <a:prstGeom prst="rect">
+            <a:avLst/>
+          </a:prstGeom>
+        </p:spPr>
+      </p:pic>
     </p:spTree>
   </p:cSld>
   <p:clrMapOvr>
@@ -11891,324 +10918,7 @@
 </p:sld>
 </file>
 
-<file path=ppt/slides/slide17.xml><?xml version="1.0" encoding="utf-8"?>
-<p:sld xmlns:a="http://schemas.openxmlformats.org/drawingml/2006/main" xmlns:r="http://schemas.openxmlformats.org/officeDocument/2006/relationships" xmlns:p="http://schemas.openxmlformats.org/presentationml/2006/main">
-  <p:cSld>
-    <p:spTree>
-      <p:nvGrpSpPr>
-        <p:cNvPr id="1" name="Shape 204"/>
-        <p:cNvGrpSpPr/>
-        <p:nvPr/>
-      </p:nvGrpSpPr>
-      <p:grpSpPr>
-        <a:xfrm>
-          <a:off x="0" y="0"/>
-          <a:ext cx="0" cy="0"/>
-          <a:chOff x="0" y="0"/>
-          <a:chExt cx="0" cy="0"/>
-        </a:xfrm>
-      </p:grpSpPr>
-      <p:grpSp>
-        <p:nvGrpSpPr>
-          <p:cNvPr id="205" name="Google Shape;205;p17"/>
-          <p:cNvGrpSpPr/>
-          <p:nvPr/>
-        </p:nvGrpSpPr>
-        <p:grpSpPr>
-          <a:xfrm>
-            <a:off x="4419600" y="3162300"/>
-            <a:ext cx="13868298" cy="7391399"/>
-            <a:chOff x="6700400" y="914400"/>
-            <a:chExt cx="11587600" cy="9372599"/>
-          </a:xfrm>
-        </p:grpSpPr>
-        <p:pic>
-          <p:nvPicPr>
-            <p:cNvPr id="206" name="Google Shape;206;p17"/>
-            <p:cNvPicPr preferRelativeResize="0"/>
-            <p:nvPr/>
-          </p:nvPicPr>
-          <p:blipFill rotWithShape="1">
-            <a:blip r:embed="rId3">
-              <a:alphaModFix/>
-            </a:blip>
-            <a:srcRect/>
-            <a:stretch/>
-          </p:blipFill>
-          <p:spPr>
-            <a:xfrm>
-              <a:off x="6700400" y="914400"/>
-              <a:ext cx="11587599" cy="9372599"/>
-            </a:xfrm>
-            <a:prstGeom prst="rect">
-              <a:avLst/>
-            </a:prstGeom>
-            <a:noFill/>
-            <a:ln>
-              <a:noFill/>
-            </a:ln>
-          </p:spPr>
-        </p:pic>
-        <p:pic>
-          <p:nvPicPr>
-            <p:cNvPr id="207" name="Google Shape;207;p17"/>
-            <p:cNvPicPr preferRelativeResize="0"/>
-            <p:nvPr/>
-          </p:nvPicPr>
-          <p:blipFill rotWithShape="1">
-            <a:blip r:embed="rId4">
-              <a:alphaModFix/>
-            </a:blip>
-            <a:srcRect/>
-            <a:stretch/>
-          </p:blipFill>
-          <p:spPr>
-            <a:xfrm>
-              <a:off x="6941750" y="1128650"/>
-              <a:ext cx="11346250" cy="6946799"/>
-            </a:xfrm>
-            <a:prstGeom prst="rect">
-              <a:avLst/>
-            </a:prstGeom>
-            <a:noFill/>
-            <a:ln>
-              <a:noFill/>
-            </a:ln>
-          </p:spPr>
-        </p:pic>
-        <p:pic>
-          <p:nvPicPr>
-            <p:cNvPr id="208" name="Google Shape;208;p17"/>
-            <p:cNvPicPr preferRelativeResize="0"/>
-            <p:nvPr/>
-          </p:nvPicPr>
-          <p:blipFill rotWithShape="1">
-            <a:blip r:embed="rId5">
-              <a:alphaModFix/>
-            </a:blip>
-            <a:srcRect/>
-            <a:stretch/>
-          </p:blipFill>
-          <p:spPr>
-            <a:xfrm>
-              <a:off x="6824125" y="2704925"/>
-              <a:ext cx="11463874" cy="5390124"/>
-            </a:xfrm>
-            <a:prstGeom prst="rect">
-              <a:avLst/>
-            </a:prstGeom>
-            <a:noFill/>
-            <a:ln>
-              <a:noFill/>
-            </a:ln>
-          </p:spPr>
-        </p:pic>
-        <p:pic>
-          <p:nvPicPr>
-            <p:cNvPr id="209" name="Google Shape;209;p17"/>
-            <p:cNvPicPr preferRelativeResize="0"/>
-            <p:nvPr/>
-          </p:nvPicPr>
-          <p:blipFill rotWithShape="1">
-            <a:blip r:embed="rId6">
-              <a:alphaModFix/>
-            </a:blip>
-            <a:srcRect/>
-            <a:stretch/>
-          </p:blipFill>
-          <p:spPr>
-            <a:xfrm>
-              <a:off x="14586725" y="5419824"/>
-              <a:ext cx="2977549" cy="636874"/>
-            </a:xfrm>
-            <a:prstGeom prst="rect">
-              <a:avLst/>
-            </a:prstGeom>
-            <a:noFill/>
-            <a:ln>
-              <a:noFill/>
-            </a:ln>
-          </p:spPr>
-        </p:pic>
-      </p:grpSp>
-      <p:pic>
-        <p:nvPicPr>
-          <p:cNvPr id="210" name="Google Shape;210;p17"/>
-          <p:cNvPicPr preferRelativeResize="0"/>
-          <p:nvPr/>
-        </p:nvPicPr>
-        <p:blipFill rotWithShape="1">
-          <a:blip r:embed="rId7">
-            <a:alphaModFix/>
-          </a:blip>
-          <a:srcRect/>
-          <a:stretch/>
-        </p:blipFill>
-        <p:spPr>
-          <a:xfrm>
-            <a:off x="0" y="0"/>
-            <a:ext cx="146399" cy="10286999"/>
-          </a:xfrm>
-          <a:prstGeom prst="rect">
-            <a:avLst/>
-          </a:prstGeom>
-          <a:noFill/>
-          <a:ln>
-            <a:noFill/>
-          </a:ln>
-        </p:spPr>
-      </p:pic>
-      <p:sp>
-        <p:nvSpPr>
-          <p:cNvPr id="211" name="Google Shape;211;p17"/>
-          <p:cNvSpPr txBox="1">
-            <a:spLocks noGrp="1"/>
-          </p:cNvSpPr>
-          <p:nvPr>
-            <p:ph type="title"/>
-          </p:nvPr>
-        </p:nvSpPr>
-        <p:spPr>
-          <a:xfrm>
-            <a:off x="490132" y="448717"/>
-            <a:ext cx="17711227" cy="1228991"/>
-          </a:xfrm>
-          <a:prstGeom prst="rect">
-            <a:avLst/>
-          </a:prstGeom>
-          <a:noFill/>
-          <a:ln>
-            <a:noFill/>
-          </a:ln>
-        </p:spPr>
-        <p:txBody>
-          <a:bodyPr spcFirstLastPara="1" wrap="square" lIns="0" tIns="128900" rIns="0" bIns="0" anchor="t" anchorCtr="0">
-            <a:spAutoFit/>
-          </a:bodyPr>
-          <a:lstStyle/>
-          <a:p>
-            <a:pPr marL="12700" marR="5080" lvl="0" indent="0" algn="l" rtl="0">
-              <a:lnSpc>
-                <a:spcPct val="104318"/>
-              </a:lnSpc>
-              <a:spcBef>
-                <a:spcPts val="0"/>
-              </a:spcBef>
-              <a:spcAft>
-                <a:spcPts val="0"/>
-              </a:spcAft>
-              <a:buNone/>
-            </a:pPr>
-            <a:r>
-              <a:rPr lang="fr-FR" sz="4400"/>
-              <a:t>Clustering Analysis</a:t>
-            </a:r>
-            <a:br>
-              <a:rPr lang="fr-FR" sz="4400"/>
-            </a:br>
-            <a:endParaRPr sz="2500" b="0">
-              <a:latin typeface="Verdana"/>
-              <a:ea typeface="Verdana"/>
-              <a:cs typeface="Verdana"/>
-              <a:sym typeface="Verdana"/>
-            </a:endParaRPr>
-          </a:p>
-        </p:txBody>
-      </p:sp>
-      <p:pic>
-        <p:nvPicPr>
-          <p:cNvPr id="212" name="Google Shape;212;p17"/>
-          <p:cNvPicPr preferRelativeResize="0"/>
-          <p:nvPr/>
-        </p:nvPicPr>
-        <p:blipFill rotWithShape="1">
-          <a:blip r:embed="rId8">
-            <a:alphaModFix/>
-          </a:blip>
-          <a:srcRect/>
-          <a:stretch/>
-        </p:blipFill>
-        <p:spPr>
-          <a:xfrm>
-            <a:off x="4648200" y="3271084"/>
-            <a:ext cx="13639630" cy="5958191"/>
-          </a:xfrm>
-          <a:prstGeom prst="rect">
-            <a:avLst/>
-          </a:prstGeom>
-          <a:noFill/>
-          <a:ln>
-            <a:noFill/>
-          </a:ln>
-        </p:spPr>
-      </p:pic>
-      <p:sp>
-        <p:nvSpPr>
-          <p:cNvPr id="213" name="Google Shape;213;p17"/>
-          <p:cNvSpPr txBox="1"/>
-          <p:nvPr/>
-        </p:nvSpPr>
-        <p:spPr>
-          <a:xfrm>
-            <a:off x="414377" y="1445446"/>
-            <a:ext cx="17237092" cy="1323439"/>
-          </a:xfrm>
-          <a:prstGeom prst="rect">
-            <a:avLst/>
-          </a:prstGeom>
-          <a:noFill/>
-          <a:ln>
-            <a:noFill/>
-          </a:ln>
-        </p:spPr>
-        <p:txBody>
-          <a:bodyPr spcFirstLastPara="1" wrap="square" lIns="91425" tIns="45700" rIns="91425" bIns="45700" anchor="t" anchorCtr="0">
-            <a:spAutoFit/>
-          </a:bodyPr>
-          <a:lstStyle/>
-          <a:p>
-            <a:pPr marL="0" lvl="0" indent="0" algn="l" rtl="0">
-              <a:spcBef>
-                <a:spcPts val="0"/>
-              </a:spcBef>
-              <a:spcAft>
-                <a:spcPts val="0"/>
-              </a:spcAft>
-              <a:buNone/>
-            </a:pPr>
-            <a:r>
-              <a:rPr lang="fr-FR" sz="2000" b="0">
-                <a:solidFill>
-                  <a:schemeClr val="lt1"/>
-                </a:solidFill>
-                <a:latin typeface="Verdana"/>
-                <a:ea typeface="Verdana"/>
-                <a:cs typeface="Verdana"/>
-                <a:sym typeface="Verdana"/>
-              </a:rPr>
-              <a:t>Query computes frequency of the communication, the average message size, the consistency size for each src-dst pair, then evaluates the behavior-type: ”High volume data transfer” for lots of big data, ”High volume control” for lots of small control messages, and ”Transfer Surges” for few but big transfers and ”Normal communication” for everything else. Finally, it counts each behavior type. </a:t>
-            </a:r>
-            <a:endParaRPr sz="2000">
-              <a:solidFill>
-                <a:schemeClr val="lt1"/>
-              </a:solidFill>
-              <a:latin typeface="Verdana"/>
-              <a:ea typeface="Verdana"/>
-              <a:cs typeface="Verdana"/>
-              <a:sym typeface="Verdana"/>
-            </a:endParaRPr>
-          </a:p>
-        </p:txBody>
-      </p:sp>
-    </p:spTree>
-  </p:cSld>
-  <p:clrMapOvr>
-    <a:masterClrMapping/>
-  </p:clrMapOvr>
-</p:sld>
-</file>
-
-<file path=ppt/slides/slide18.xml><?xml version="1.0" encoding="utf-8"?>
+<file path=ppt/slides/slide13.xml><?xml version="1.0" encoding="utf-8"?>
 <p:sld xmlns:a="http://schemas.openxmlformats.org/drawingml/2006/main" xmlns:r="http://schemas.openxmlformats.org/officeDocument/2006/relationships" xmlns:p="http://schemas.openxmlformats.org/presentationml/2006/main">
   <p:cSld>
     <p:spTree>
@@ -12321,7 +11031,7 @@
 </p:sld>
 </file>
 
-<file path=ppt/slides/slide19.xml><?xml version="1.0" encoding="utf-8"?>
+<file path=ppt/slides/slide14.xml><?xml version="1.0" encoding="utf-8"?>
 <p:sld xmlns:a="http://schemas.openxmlformats.org/drawingml/2006/main" xmlns:r="http://schemas.openxmlformats.org/officeDocument/2006/relationships" xmlns:p="http://schemas.openxmlformats.org/presentationml/2006/main">
   <p:cSld>
     <p:spTree>
@@ -12662,233 +11372,7 @@
 </p:sld>
 </file>
 
-<file path=ppt/slides/slide2.xml><?xml version="1.0" encoding="utf-8"?>
-<p:sld xmlns:a="http://schemas.openxmlformats.org/drawingml/2006/main" xmlns:r="http://schemas.openxmlformats.org/officeDocument/2006/relationships" xmlns:p="http://schemas.openxmlformats.org/presentationml/2006/main">
-  <p:cSld>
-    <p:spTree>
-      <p:nvGrpSpPr>
-        <p:cNvPr id="1" name="Shape 55"/>
-        <p:cNvGrpSpPr/>
-        <p:nvPr/>
-      </p:nvGrpSpPr>
-      <p:grpSpPr>
-        <a:xfrm>
-          <a:off x="0" y="0"/>
-          <a:ext cx="0" cy="0"/>
-          <a:chOff x="0" y="0"/>
-          <a:chExt cx="0" cy="0"/>
-        </a:xfrm>
-      </p:grpSpPr>
-      <p:sp>
-        <p:nvSpPr>
-          <p:cNvPr id="56" name="Google Shape;56;p2"/>
-          <p:cNvSpPr txBox="1"/>
-          <p:nvPr/>
-        </p:nvSpPr>
-        <p:spPr>
-          <a:xfrm>
-            <a:off x="533400" y="952500"/>
-            <a:ext cx="4052249" cy="689932"/>
-          </a:xfrm>
-          <a:prstGeom prst="rect">
-            <a:avLst/>
-          </a:prstGeom>
-          <a:noFill/>
-          <a:ln>
-            <a:noFill/>
-          </a:ln>
-        </p:spPr>
-        <p:txBody>
-          <a:bodyPr spcFirstLastPara="1" wrap="square" lIns="0" tIns="12700" rIns="0" bIns="0" anchor="t" anchorCtr="0">
-            <a:spAutoFit/>
-          </a:bodyPr>
-          <a:lstStyle/>
-          <a:p>
-            <a:pPr marL="12700" marR="5080" lvl="0" indent="0" algn="l" rtl="0">
-              <a:lnSpc>
-                <a:spcPct val="100000"/>
-              </a:lnSpc>
-              <a:spcBef>
-                <a:spcPts val="0"/>
-              </a:spcBef>
-              <a:spcAft>
-                <a:spcPts val="0"/>
-              </a:spcAft>
-              <a:buNone/>
-            </a:pPr>
-            <a:r>
-              <a:rPr lang="fr-FR" sz="4400" b="1">
-                <a:solidFill>
-                  <a:srgbClr val="FFFFFF"/>
-                </a:solidFill>
-                <a:latin typeface="Tahoma"/>
-                <a:ea typeface="Tahoma"/>
-                <a:cs typeface="Tahoma"/>
-                <a:sym typeface="Tahoma"/>
-              </a:rPr>
-              <a:t>Introduction</a:t>
-            </a:r>
-            <a:endParaRPr sz="4400">
-              <a:latin typeface="Tahoma"/>
-              <a:ea typeface="Tahoma"/>
-              <a:cs typeface="Tahoma"/>
-              <a:sym typeface="Tahoma"/>
-            </a:endParaRPr>
-          </a:p>
-        </p:txBody>
-      </p:sp>
-      <p:sp>
-        <p:nvSpPr>
-          <p:cNvPr id="57" name="Google Shape;57;p2"/>
-          <p:cNvSpPr txBox="1"/>
-          <p:nvPr/>
-        </p:nvSpPr>
-        <p:spPr>
-          <a:xfrm>
-            <a:off x="5638800" y="3086100"/>
-            <a:ext cx="12052300" cy="4429033"/>
-          </a:xfrm>
-          <a:prstGeom prst="rect">
-            <a:avLst/>
-          </a:prstGeom>
-          <a:noFill/>
-          <a:ln>
-            <a:noFill/>
-          </a:ln>
-        </p:spPr>
-        <p:txBody>
-          <a:bodyPr spcFirstLastPara="1" wrap="square" lIns="0" tIns="12700" rIns="0" bIns="0" anchor="t" anchorCtr="0">
-            <a:spAutoFit/>
-          </a:bodyPr>
-          <a:lstStyle/>
-          <a:p>
-            <a:pPr marL="12700" marR="5080" lvl="0" indent="0" algn="l" rtl="0">
-              <a:lnSpc>
-                <a:spcPct val="114999"/>
-              </a:lnSpc>
-              <a:spcBef>
-                <a:spcPts val="0"/>
-              </a:spcBef>
-              <a:spcAft>
-                <a:spcPts val="0"/>
-              </a:spcAft>
-              <a:buNone/>
-            </a:pPr>
-            <a:r>
-              <a:rPr lang="fr-FR" sz="2800">
-                <a:solidFill>
-                  <a:schemeClr val="lt1"/>
-                </a:solidFill>
-              </a:rPr>
-              <a:t>The project started as an evaluation of Splunk Entreprise’s technical capabilities in detecting threats as a security analytics platform. While the main point of this study was to test features using synthetic data, a blind analysis was conducted that revealed additional malicious activity that weren’t in the provided alerts file. What started as a straightforward ”</a:t>
-            </a:r>
-            <a:r>
-              <a:rPr lang="fr-FR" sz="2800" b="1">
-                <a:solidFill>
-                  <a:schemeClr val="lt1"/>
-                </a:solidFill>
-              </a:rPr>
-              <a:t>Can Splunk Enterprise detect threats</a:t>
-            </a:r>
-            <a:r>
-              <a:rPr lang="fr-FR" sz="2800">
-                <a:solidFill>
-                  <a:schemeClr val="lt1"/>
-                </a:solidFill>
-              </a:rPr>
-              <a:t>?” turned into a much more intriguing question: ”</a:t>
-            </a:r>
-            <a:r>
-              <a:rPr lang="fr-FR" sz="2800" b="1">
-                <a:solidFill>
-                  <a:schemeClr val="lt1"/>
-                </a:solidFill>
-              </a:rPr>
-              <a:t>Can Splunk Enterprise effectively identify additional threats that were missed</a:t>
-            </a:r>
-            <a:r>
-              <a:rPr lang="fr-FR" sz="2800">
-                <a:solidFill>
-                  <a:schemeClr val="lt1"/>
-                </a:solidFill>
-              </a:rPr>
-              <a:t>?” This report documents my attempts to answer this question.</a:t>
-            </a:r>
-            <a:endParaRPr sz="2800" b="1">
-              <a:solidFill>
-                <a:schemeClr val="lt1"/>
-              </a:solidFill>
-              <a:latin typeface="Verdana"/>
-              <a:ea typeface="Verdana"/>
-              <a:cs typeface="Verdana"/>
-              <a:sym typeface="Verdana"/>
-            </a:endParaRPr>
-          </a:p>
-        </p:txBody>
-      </p:sp>
-      <p:pic>
-        <p:nvPicPr>
-          <p:cNvPr id="58" name="Google Shape;58;p2"/>
-          <p:cNvPicPr preferRelativeResize="0"/>
-          <p:nvPr/>
-        </p:nvPicPr>
-        <p:blipFill rotWithShape="1">
-          <a:blip r:embed="rId3">
-            <a:alphaModFix/>
-          </a:blip>
-          <a:srcRect/>
-          <a:stretch/>
-        </p:blipFill>
-        <p:spPr>
-          <a:xfrm>
-            <a:off x="5377411" y="8343900"/>
-            <a:ext cx="12037199" cy="91499"/>
-          </a:xfrm>
-          <a:prstGeom prst="rect">
-            <a:avLst/>
-          </a:prstGeom>
-          <a:noFill/>
-          <a:ln>
-            <a:noFill/>
-          </a:ln>
-        </p:spPr>
-      </p:pic>
-      <p:pic>
-        <p:nvPicPr>
-          <p:cNvPr id="59" name="Google Shape;59;p2"/>
-          <p:cNvPicPr preferRelativeResize="0"/>
-          <p:nvPr/>
-        </p:nvPicPr>
-        <p:blipFill rotWithShape="1">
-          <a:blip r:embed="rId4">
-            <a:alphaModFix/>
-          </a:blip>
-          <a:srcRect/>
-          <a:stretch/>
-        </p:blipFill>
-        <p:spPr>
-          <a:xfrm>
-            <a:off x="4800600" y="0"/>
-            <a:ext cx="146399" cy="10286999"/>
-          </a:xfrm>
-          <a:prstGeom prst="rect">
-            <a:avLst/>
-          </a:prstGeom>
-          <a:noFill/>
-          <a:ln>
-            <a:noFill/>
-          </a:ln>
-        </p:spPr>
-      </p:pic>
-    </p:spTree>
-  </p:cSld>
-  <p:clrMapOvr>
-    <a:masterClrMapping/>
-  </p:clrMapOvr>
-</p:sld>
-</file>
-
-<file path=ppt/slides/slide20.xml><?xml version="1.0" encoding="utf-8"?>
+<file path=ppt/slides/slide15.xml><?xml version="1.0" encoding="utf-8"?>
 <p:sld xmlns:a="http://schemas.openxmlformats.org/drawingml/2006/main" xmlns:r="http://schemas.openxmlformats.org/officeDocument/2006/relationships" xmlns:p="http://schemas.openxmlformats.org/presentationml/2006/main">
   <p:cSld>
     <p:spTree>
@@ -13253,7 +11737,7 @@
 </p:sld>
 </file>
 
-<file path=ppt/slides/slide21.xml><?xml version="1.0" encoding="utf-8"?>
+<file path=ppt/slides/slide16.xml><?xml version="1.0" encoding="utf-8"?>
 <p:sld xmlns:a="http://schemas.openxmlformats.org/drawingml/2006/main" xmlns:r="http://schemas.openxmlformats.org/officeDocument/2006/relationships" xmlns:p="http://schemas.openxmlformats.org/presentationml/2006/main">
   <p:cSld>
     <p:spTree>
@@ -13559,7 +12043,7 @@
 </p:sld>
 </file>
 
-<file path=ppt/slides/slide22.xml><?xml version="1.0" encoding="utf-8"?>
+<file path=ppt/slides/slide17.xml><?xml version="1.0" encoding="utf-8"?>
 <p:sld xmlns:a="http://schemas.openxmlformats.org/drawingml/2006/main" xmlns:r="http://schemas.openxmlformats.org/officeDocument/2006/relationships" xmlns:p="http://schemas.openxmlformats.org/presentationml/2006/main">
   <p:cSld>
     <p:spTree>
@@ -14024,7 +12508,7 @@
 </p:sld>
 </file>
 
-<file path=ppt/slides/slide23.xml><?xml version="1.0" encoding="utf-8"?>
+<file path=ppt/slides/slide18.xml><?xml version="1.0" encoding="utf-8"?>
 <p:sld xmlns:a="http://schemas.openxmlformats.org/drawingml/2006/main" xmlns:r="http://schemas.openxmlformats.org/officeDocument/2006/relationships" xmlns:p="http://schemas.openxmlformats.org/presentationml/2006/main">
   <p:cSld>
     <p:spTree>
@@ -14133,7 +12617,7 @@
 </p:sld>
 </file>
 
-<file path=ppt/slides/slide24.xml><?xml version="1.0" encoding="utf-8"?>
+<file path=ppt/slides/slide19.xml><?xml version="1.0" encoding="utf-8"?>
 <p:sld xmlns:a="http://schemas.openxmlformats.org/drawingml/2006/main" xmlns:r="http://schemas.openxmlformats.org/officeDocument/2006/relationships" xmlns:p="http://schemas.openxmlformats.org/presentationml/2006/main">
   <p:cSld>
     <p:spTree>
@@ -14518,7 +13002,1001 @@
 </p:sld>
 </file>
 
-<file path=ppt/slides/slide25.xml><?xml version="1.0" encoding="utf-8"?>
+<file path=ppt/slides/slide2.xml><?xml version="1.0" encoding="utf-8"?>
+<p:sld xmlns:a="http://schemas.openxmlformats.org/drawingml/2006/main" xmlns:r="http://schemas.openxmlformats.org/officeDocument/2006/relationships" xmlns:p="http://schemas.openxmlformats.org/presentationml/2006/main">
+  <p:cSld>
+    <p:spTree>
+      <p:nvGrpSpPr>
+        <p:cNvPr id="1" name="Shape 55"/>
+        <p:cNvGrpSpPr/>
+        <p:nvPr/>
+      </p:nvGrpSpPr>
+      <p:grpSpPr>
+        <a:xfrm>
+          <a:off x="0" y="0"/>
+          <a:ext cx="0" cy="0"/>
+          <a:chOff x="0" y="0"/>
+          <a:chExt cx="0" cy="0"/>
+        </a:xfrm>
+      </p:grpSpPr>
+      <p:sp>
+        <p:nvSpPr>
+          <p:cNvPr id="56" name="Google Shape;56;p2"/>
+          <p:cNvSpPr txBox="1"/>
+          <p:nvPr/>
+        </p:nvSpPr>
+        <p:spPr>
+          <a:xfrm>
+            <a:off x="533400" y="952500"/>
+            <a:ext cx="4052249" cy="689932"/>
+          </a:xfrm>
+          <a:prstGeom prst="rect">
+            <a:avLst/>
+          </a:prstGeom>
+          <a:noFill/>
+          <a:ln>
+            <a:noFill/>
+          </a:ln>
+        </p:spPr>
+        <p:txBody>
+          <a:bodyPr spcFirstLastPara="1" wrap="square" lIns="0" tIns="12700" rIns="0" bIns="0" anchor="t" anchorCtr="0">
+            <a:spAutoFit/>
+          </a:bodyPr>
+          <a:lstStyle/>
+          <a:p>
+            <a:pPr marL="12700" marR="5080" lvl="0" indent="0" algn="l" rtl="0">
+              <a:lnSpc>
+                <a:spcPct val="100000"/>
+              </a:lnSpc>
+              <a:spcBef>
+                <a:spcPts val="0"/>
+              </a:spcBef>
+              <a:spcAft>
+                <a:spcPts val="0"/>
+              </a:spcAft>
+              <a:buNone/>
+            </a:pPr>
+            <a:r>
+              <a:rPr lang="fr-FR" sz="4400" b="1">
+                <a:solidFill>
+                  <a:srgbClr val="FFFFFF"/>
+                </a:solidFill>
+                <a:latin typeface="Tahoma"/>
+                <a:ea typeface="Tahoma"/>
+                <a:cs typeface="Tahoma"/>
+                <a:sym typeface="Tahoma"/>
+              </a:rPr>
+              <a:t>Introduction</a:t>
+            </a:r>
+            <a:endParaRPr sz="4400">
+              <a:latin typeface="Tahoma"/>
+              <a:ea typeface="Tahoma"/>
+              <a:cs typeface="Tahoma"/>
+              <a:sym typeface="Tahoma"/>
+            </a:endParaRPr>
+          </a:p>
+        </p:txBody>
+      </p:sp>
+      <p:sp>
+        <p:nvSpPr>
+          <p:cNvPr id="57" name="Google Shape;57;p2"/>
+          <p:cNvSpPr txBox="1"/>
+          <p:nvPr/>
+        </p:nvSpPr>
+        <p:spPr>
+          <a:xfrm>
+            <a:off x="5638800" y="3086100"/>
+            <a:ext cx="12052300" cy="4472506"/>
+          </a:xfrm>
+          <a:prstGeom prst="rect">
+            <a:avLst/>
+          </a:prstGeom>
+          <a:noFill/>
+          <a:ln>
+            <a:noFill/>
+          </a:ln>
+        </p:spPr>
+        <p:txBody>
+          <a:bodyPr spcFirstLastPara="1" wrap="square" lIns="0" tIns="12700" rIns="0" bIns="0" anchor="t" anchorCtr="0">
+            <a:spAutoFit/>
+          </a:bodyPr>
+          <a:lstStyle/>
+          <a:p>
+            <a:pPr marL="12700" marR="5080" lvl="0" indent="0" algn="l" rtl="0">
+              <a:lnSpc>
+                <a:spcPct val="114999"/>
+              </a:lnSpc>
+              <a:spcBef>
+                <a:spcPts val="0"/>
+              </a:spcBef>
+              <a:spcAft>
+                <a:spcPts val="0"/>
+              </a:spcAft>
+              <a:buNone/>
+            </a:pPr>
+            <a:r>
+              <a:rPr lang="fr-FR" sz="2800" dirty="0">
+                <a:solidFill>
+                  <a:schemeClr val="lt1"/>
+                </a:solidFill>
+              </a:rPr>
+              <a:t>The </a:t>
+            </a:r>
+            <a:r>
+              <a:rPr lang="fr-FR" sz="2800" dirty="0" err="1">
+                <a:solidFill>
+                  <a:schemeClr val="lt1"/>
+                </a:solidFill>
+              </a:rPr>
+              <a:t>project</a:t>
+            </a:r>
+            <a:r>
+              <a:rPr lang="fr-FR" sz="2800" dirty="0">
+                <a:solidFill>
+                  <a:schemeClr val="lt1"/>
+                </a:solidFill>
+              </a:rPr>
+              <a:t> </a:t>
+            </a:r>
+            <a:r>
+              <a:rPr lang="fr-FR" sz="2800" dirty="0" err="1">
+                <a:solidFill>
+                  <a:schemeClr val="lt1"/>
+                </a:solidFill>
+              </a:rPr>
+              <a:t>started</a:t>
+            </a:r>
+            <a:r>
+              <a:rPr lang="fr-FR" sz="2800" dirty="0">
+                <a:solidFill>
+                  <a:schemeClr val="lt1"/>
+                </a:solidFill>
+              </a:rPr>
+              <a:t> as an </a:t>
+            </a:r>
+            <a:r>
+              <a:rPr lang="fr-FR" sz="2800" dirty="0" err="1">
+                <a:solidFill>
+                  <a:schemeClr val="lt1"/>
+                </a:solidFill>
+              </a:rPr>
+              <a:t>evaluation</a:t>
+            </a:r>
+            <a:r>
+              <a:rPr lang="fr-FR" sz="2800" dirty="0">
+                <a:solidFill>
+                  <a:schemeClr val="lt1"/>
+                </a:solidFill>
+              </a:rPr>
+              <a:t> of Splunk </a:t>
+            </a:r>
+            <a:r>
+              <a:rPr lang="fr-FR" sz="2800" dirty="0" err="1">
+                <a:solidFill>
+                  <a:schemeClr val="lt1"/>
+                </a:solidFill>
+              </a:rPr>
+              <a:t>Enterprise’s</a:t>
+            </a:r>
+            <a:r>
+              <a:rPr lang="fr-FR" sz="2800" dirty="0">
+                <a:solidFill>
+                  <a:schemeClr val="lt1"/>
+                </a:solidFill>
+              </a:rPr>
+              <a:t> </a:t>
+            </a:r>
+            <a:r>
+              <a:rPr lang="fr-FR" sz="2800" dirty="0" err="1">
+                <a:solidFill>
+                  <a:schemeClr val="lt1"/>
+                </a:solidFill>
+              </a:rPr>
+              <a:t>technical</a:t>
+            </a:r>
+            <a:r>
+              <a:rPr lang="fr-FR" sz="2800" dirty="0">
+                <a:solidFill>
+                  <a:schemeClr val="lt1"/>
+                </a:solidFill>
+              </a:rPr>
+              <a:t> </a:t>
+            </a:r>
+            <a:r>
+              <a:rPr lang="fr-FR" sz="2800" dirty="0" err="1">
+                <a:solidFill>
+                  <a:schemeClr val="lt1"/>
+                </a:solidFill>
+              </a:rPr>
+              <a:t>capabilities</a:t>
+            </a:r>
+            <a:r>
+              <a:rPr lang="fr-FR" sz="2800" dirty="0">
+                <a:solidFill>
+                  <a:schemeClr val="lt1"/>
+                </a:solidFill>
+              </a:rPr>
+              <a:t> in </a:t>
+            </a:r>
+            <a:r>
+              <a:rPr lang="fr-FR" sz="2800" dirty="0" err="1">
+                <a:solidFill>
+                  <a:schemeClr val="lt1"/>
+                </a:solidFill>
+              </a:rPr>
+              <a:t>detecting</a:t>
+            </a:r>
+            <a:r>
+              <a:rPr lang="fr-FR" sz="2800" dirty="0">
+                <a:solidFill>
+                  <a:schemeClr val="lt1"/>
+                </a:solidFill>
+              </a:rPr>
+              <a:t> </a:t>
+            </a:r>
+            <a:r>
+              <a:rPr lang="fr-FR" sz="2800" dirty="0" err="1">
+                <a:solidFill>
+                  <a:schemeClr val="lt1"/>
+                </a:solidFill>
+              </a:rPr>
+              <a:t>threats</a:t>
+            </a:r>
+            <a:r>
+              <a:rPr lang="fr-FR" sz="2800" dirty="0">
+                <a:solidFill>
+                  <a:schemeClr val="lt1"/>
+                </a:solidFill>
+              </a:rPr>
+              <a:t> as a </a:t>
+            </a:r>
+            <a:r>
+              <a:rPr lang="fr-FR" sz="2800" dirty="0" err="1">
+                <a:solidFill>
+                  <a:schemeClr val="lt1"/>
+                </a:solidFill>
+              </a:rPr>
+              <a:t>security</a:t>
+            </a:r>
+            <a:r>
+              <a:rPr lang="fr-FR" sz="2800" dirty="0">
+                <a:solidFill>
+                  <a:schemeClr val="lt1"/>
+                </a:solidFill>
+              </a:rPr>
+              <a:t> </a:t>
+            </a:r>
+            <a:r>
+              <a:rPr lang="fr-FR" sz="2800" dirty="0" err="1">
+                <a:solidFill>
+                  <a:schemeClr val="lt1"/>
+                </a:solidFill>
+              </a:rPr>
+              <a:t>analytics</a:t>
+            </a:r>
+            <a:r>
+              <a:rPr lang="fr-FR" sz="2800" dirty="0">
+                <a:solidFill>
+                  <a:schemeClr val="lt1"/>
+                </a:solidFill>
+              </a:rPr>
+              <a:t> platform. </a:t>
+            </a:r>
+            <a:r>
+              <a:rPr lang="fr-FR" sz="2800" dirty="0" err="1">
+                <a:solidFill>
+                  <a:schemeClr val="lt1"/>
+                </a:solidFill>
+              </a:rPr>
+              <a:t>While</a:t>
+            </a:r>
+            <a:r>
+              <a:rPr lang="fr-FR" sz="2800" dirty="0">
+                <a:solidFill>
+                  <a:schemeClr val="lt1"/>
+                </a:solidFill>
+              </a:rPr>
+              <a:t> the main point of </a:t>
+            </a:r>
+            <a:r>
+              <a:rPr lang="fr-FR" sz="2800" dirty="0" err="1">
+                <a:solidFill>
+                  <a:schemeClr val="lt1"/>
+                </a:solidFill>
+              </a:rPr>
+              <a:t>this</a:t>
+            </a:r>
+            <a:r>
+              <a:rPr lang="fr-FR" sz="2800" dirty="0">
+                <a:solidFill>
+                  <a:schemeClr val="lt1"/>
+                </a:solidFill>
+              </a:rPr>
+              <a:t> </a:t>
+            </a:r>
+            <a:r>
+              <a:rPr lang="fr-FR" sz="2800" dirty="0" err="1">
+                <a:solidFill>
+                  <a:schemeClr val="lt1"/>
+                </a:solidFill>
+              </a:rPr>
+              <a:t>study</a:t>
+            </a:r>
+            <a:r>
+              <a:rPr lang="fr-FR" sz="2800" dirty="0">
+                <a:solidFill>
+                  <a:schemeClr val="lt1"/>
+                </a:solidFill>
+              </a:rPr>
+              <a:t> </a:t>
+            </a:r>
+            <a:r>
+              <a:rPr lang="fr-FR" sz="2800" dirty="0" err="1">
+                <a:solidFill>
+                  <a:schemeClr val="lt1"/>
+                </a:solidFill>
+              </a:rPr>
+              <a:t>was</a:t>
+            </a:r>
+            <a:r>
+              <a:rPr lang="fr-FR" sz="2800" dirty="0">
+                <a:solidFill>
+                  <a:schemeClr val="lt1"/>
+                </a:solidFill>
+              </a:rPr>
+              <a:t> to test </a:t>
+            </a:r>
+            <a:r>
+              <a:rPr lang="fr-FR" sz="2800" dirty="0" err="1">
+                <a:solidFill>
+                  <a:schemeClr val="lt1"/>
+                </a:solidFill>
+              </a:rPr>
+              <a:t>features</a:t>
+            </a:r>
+            <a:r>
+              <a:rPr lang="fr-FR" sz="2800" dirty="0">
+                <a:solidFill>
+                  <a:schemeClr val="lt1"/>
+                </a:solidFill>
+              </a:rPr>
+              <a:t> </a:t>
+            </a:r>
+            <a:r>
+              <a:rPr lang="fr-FR" sz="2800" dirty="0" err="1">
+                <a:solidFill>
+                  <a:schemeClr val="lt1"/>
+                </a:solidFill>
+              </a:rPr>
+              <a:t>using</a:t>
+            </a:r>
+            <a:r>
+              <a:rPr lang="fr-FR" sz="2800" dirty="0">
+                <a:solidFill>
+                  <a:schemeClr val="lt1"/>
+                </a:solidFill>
+              </a:rPr>
+              <a:t> </a:t>
+            </a:r>
+            <a:r>
+              <a:rPr lang="fr-FR" sz="2800" dirty="0" err="1">
+                <a:solidFill>
+                  <a:schemeClr val="lt1"/>
+                </a:solidFill>
+              </a:rPr>
+              <a:t>synthetic</a:t>
+            </a:r>
+            <a:r>
+              <a:rPr lang="fr-FR" sz="2800" dirty="0">
+                <a:solidFill>
+                  <a:schemeClr val="lt1"/>
+                </a:solidFill>
+              </a:rPr>
+              <a:t> data, a blind </a:t>
+            </a:r>
+            <a:r>
+              <a:rPr lang="fr-FR" sz="2800" dirty="0" err="1">
+                <a:solidFill>
+                  <a:schemeClr val="lt1"/>
+                </a:solidFill>
+              </a:rPr>
+              <a:t>analysis</a:t>
+            </a:r>
+            <a:r>
+              <a:rPr lang="fr-FR" sz="2800" dirty="0">
+                <a:solidFill>
+                  <a:schemeClr val="lt1"/>
+                </a:solidFill>
+              </a:rPr>
+              <a:t> </a:t>
+            </a:r>
+            <a:r>
+              <a:rPr lang="fr-FR" sz="2800" dirty="0" err="1">
+                <a:solidFill>
+                  <a:schemeClr val="lt1"/>
+                </a:solidFill>
+              </a:rPr>
+              <a:t>was</a:t>
+            </a:r>
+            <a:r>
+              <a:rPr lang="fr-FR" sz="2800" dirty="0">
+                <a:solidFill>
+                  <a:schemeClr val="lt1"/>
+                </a:solidFill>
+              </a:rPr>
+              <a:t> </a:t>
+            </a:r>
+            <a:r>
+              <a:rPr lang="fr-FR" sz="2800" dirty="0" err="1">
+                <a:solidFill>
+                  <a:schemeClr val="lt1"/>
+                </a:solidFill>
+              </a:rPr>
+              <a:t>conducted</a:t>
+            </a:r>
+            <a:r>
+              <a:rPr lang="fr-FR" sz="2800" dirty="0">
+                <a:solidFill>
+                  <a:schemeClr val="lt1"/>
+                </a:solidFill>
+              </a:rPr>
+              <a:t> </a:t>
+            </a:r>
+            <a:r>
+              <a:rPr lang="fr-FR" sz="2800" dirty="0" err="1">
+                <a:solidFill>
+                  <a:schemeClr val="lt1"/>
+                </a:solidFill>
+              </a:rPr>
+              <a:t>that</a:t>
+            </a:r>
+            <a:r>
+              <a:rPr lang="fr-FR" sz="2800" dirty="0">
+                <a:solidFill>
+                  <a:schemeClr val="lt1"/>
+                </a:solidFill>
+              </a:rPr>
+              <a:t> </a:t>
+            </a:r>
+            <a:r>
+              <a:rPr lang="fr-FR" sz="2800" dirty="0" err="1">
+                <a:solidFill>
+                  <a:schemeClr val="lt1"/>
+                </a:solidFill>
+              </a:rPr>
+              <a:t>revealed</a:t>
+            </a:r>
+            <a:r>
+              <a:rPr lang="fr-FR" sz="2800" dirty="0">
+                <a:solidFill>
+                  <a:schemeClr val="lt1"/>
+                </a:solidFill>
+              </a:rPr>
+              <a:t> </a:t>
+            </a:r>
+            <a:r>
+              <a:rPr lang="fr-FR" sz="2800" dirty="0" err="1">
+                <a:solidFill>
+                  <a:schemeClr val="lt1"/>
+                </a:solidFill>
+              </a:rPr>
+              <a:t>additional</a:t>
+            </a:r>
+            <a:r>
+              <a:rPr lang="fr-FR" sz="2800" dirty="0">
+                <a:solidFill>
+                  <a:schemeClr val="lt1"/>
+                </a:solidFill>
+              </a:rPr>
+              <a:t> </a:t>
+            </a:r>
+            <a:r>
+              <a:rPr lang="fr-FR" sz="2800" dirty="0" err="1">
+                <a:solidFill>
+                  <a:schemeClr val="lt1"/>
+                </a:solidFill>
+              </a:rPr>
+              <a:t>malicious</a:t>
+            </a:r>
+            <a:r>
+              <a:rPr lang="fr-FR" sz="2800" dirty="0">
+                <a:solidFill>
+                  <a:schemeClr val="lt1"/>
+                </a:solidFill>
+              </a:rPr>
+              <a:t> </a:t>
+            </a:r>
+            <a:r>
+              <a:rPr lang="fr-FR" sz="2800" dirty="0" err="1">
+                <a:solidFill>
+                  <a:schemeClr val="lt1"/>
+                </a:solidFill>
+              </a:rPr>
+              <a:t>activity</a:t>
+            </a:r>
+            <a:r>
+              <a:rPr lang="fr-FR" sz="2800" dirty="0">
+                <a:solidFill>
+                  <a:schemeClr val="lt1"/>
+                </a:solidFill>
+              </a:rPr>
+              <a:t> </a:t>
+            </a:r>
+            <a:r>
+              <a:rPr lang="fr-FR" sz="2800" dirty="0" err="1">
+                <a:solidFill>
+                  <a:schemeClr val="lt1"/>
+                </a:solidFill>
+              </a:rPr>
+              <a:t>that</a:t>
+            </a:r>
+            <a:r>
+              <a:rPr lang="fr-FR" sz="2800" dirty="0">
+                <a:solidFill>
+                  <a:schemeClr val="lt1"/>
+                </a:solidFill>
+              </a:rPr>
+              <a:t> </a:t>
+            </a:r>
+            <a:r>
+              <a:rPr lang="fr-FR" sz="2800" dirty="0" err="1">
+                <a:solidFill>
+                  <a:schemeClr val="lt1"/>
+                </a:solidFill>
+              </a:rPr>
+              <a:t>weren’t</a:t>
+            </a:r>
+            <a:r>
+              <a:rPr lang="fr-FR" sz="2800" dirty="0">
+                <a:solidFill>
+                  <a:schemeClr val="lt1"/>
+                </a:solidFill>
+              </a:rPr>
+              <a:t> in the </a:t>
+            </a:r>
+            <a:r>
+              <a:rPr lang="fr-FR" sz="2800" dirty="0" err="1">
+                <a:solidFill>
+                  <a:schemeClr val="lt1"/>
+                </a:solidFill>
+              </a:rPr>
+              <a:t>provided</a:t>
+            </a:r>
+            <a:r>
+              <a:rPr lang="fr-FR" sz="2800" dirty="0">
+                <a:solidFill>
+                  <a:schemeClr val="lt1"/>
+                </a:solidFill>
+              </a:rPr>
+              <a:t> </a:t>
+            </a:r>
+            <a:r>
+              <a:rPr lang="fr-FR" sz="2800" dirty="0" err="1">
+                <a:solidFill>
+                  <a:schemeClr val="lt1"/>
+                </a:solidFill>
+              </a:rPr>
+              <a:t>alerts</a:t>
+            </a:r>
+            <a:r>
+              <a:rPr lang="fr-FR" sz="2800" dirty="0">
+                <a:solidFill>
+                  <a:schemeClr val="lt1"/>
+                </a:solidFill>
+              </a:rPr>
+              <a:t> file. </a:t>
+            </a:r>
+            <a:r>
+              <a:rPr lang="fr-FR" sz="2800" dirty="0" err="1">
+                <a:solidFill>
+                  <a:schemeClr val="lt1"/>
+                </a:solidFill>
+              </a:rPr>
+              <a:t>What</a:t>
+            </a:r>
+            <a:r>
+              <a:rPr lang="fr-FR" sz="2800" dirty="0">
+                <a:solidFill>
+                  <a:schemeClr val="lt1"/>
+                </a:solidFill>
+              </a:rPr>
+              <a:t> </a:t>
+            </a:r>
+            <a:r>
+              <a:rPr lang="fr-FR" sz="2800" dirty="0" err="1">
+                <a:solidFill>
+                  <a:schemeClr val="lt1"/>
+                </a:solidFill>
+              </a:rPr>
+              <a:t>started</a:t>
+            </a:r>
+            <a:r>
+              <a:rPr lang="fr-FR" sz="2800" dirty="0">
+                <a:solidFill>
+                  <a:schemeClr val="lt1"/>
+                </a:solidFill>
+              </a:rPr>
+              <a:t> as a </a:t>
+            </a:r>
+            <a:r>
+              <a:rPr lang="fr-FR" sz="2800" dirty="0" err="1">
+                <a:solidFill>
+                  <a:schemeClr val="lt1"/>
+                </a:solidFill>
+              </a:rPr>
+              <a:t>straightforward</a:t>
+            </a:r>
+            <a:r>
+              <a:rPr lang="fr-FR" sz="2800" dirty="0">
+                <a:solidFill>
+                  <a:schemeClr val="lt1"/>
+                </a:solidFill>
+              </a:rPr>
+              <a:t> ”</a:t>
+            </a:r>
+            <a:r>
+              <a:rPr lang="fr-FR" sz="2800" b="1" dirty="0">
+                <a:solidFill>
+                  <a:schemeClr val="lt1"/>
+                </a:solidFill>
+              </a:rPr>
+              <a:t>Can Splunk Enterprise </a:t>
+            </a:r>
+            <a:r>
+              <a:rPr lang="fr-FR" sz="2800" b="1" dirty="0" err="1">
+                <a:solidFill>
+                  <a:schemeClr val="lt1"/>
+                </a:solidFill>
+              </a:rPr>
+              <a:t>detect</a:t>
+            </a:r>
+            <a:r>
+              <a:rPr lang="fr-FR" sz="2800" b="1" dirty="0">
+                <a:solidFill>
+                  <a:schemeClr val="lt1"/>
+                </a:solidFill>
+              </a:rPr>
+              <a:t> </a:t>
+            </a:r>
+            <a:r>
+              <a:rPr lang="fr-FR" sz="2800" b="1" dirty="0" err="1">
+                <a:solidFill>
+                  <a:schemeClr val="lt1"/>
+                </a:solidFill>
+              </a:rPr>
+              <a:t>threats</a:t>
+            </a:r>
+            <a:r>
+              <a:rPr lang="fr-FR" sz="2800" dirty="0">
+                <a:solidFill>
+                  <a:schemeClr val="lt1"/>
+                </a:solidFill>
+              </a:rPr>
+              <a:t>?” </a:t>
+            </a:r>
+            <a:r>
+              <a:rPr lang="fr-FR" sz="2800" dirty="0" err="1">
+                <a:solidFill>
+                  <a:schemeClr val="lt1"/>
+                </a:solidFill>
+              </a:rPr>
+              <a:t>turned</a:t>
+            </a:r>
+            <a:r>
+              <a:rPr lang="fr-FR" sz="2800" dirty="0">
+                <a:solidFill>
+                  <a:schemeClr val="lt1"/>
+                </a:solidFill>
+              </a:rPr>
+              <a:t> </a:t>
+            </a:r>
+            <a:r>
+              <a:rPr lang="fr-FR" sz="2800" dirty="0" err="1">
+                <a:solidFill>
+                  <a:schemeClr val="lt1"/>
+                </a:solidFill>
+              </a:rPr>
+              <a:t>into</a:t>
+            </a:r>
+            <a:r>
+              <a:rPr lang="fr-FR" sz="2800" dirty="0">
+                <a:solidFill>
+                  <a:schemeClr val="lt1"/>
+                </a:solidFill>
+              </a:rPr>
+              <a:t> a </a:t>
+            </a:r>
+            <a:r>
+              <a:rPr lang="fr-FR" sz="2800" dirty="0" err="1">
+                <a:solidFill>
+                  <a:schemeClr val="lt1"/>
+                </a:solidFill>
+              </a:rPr>
+              <a:t>much</a:t>
+            </a:r>
+            <a:r>
+              <a:rPr lang="fr-FR" sz="2800" dirty="0">
+                <a:solidFill>
+                  <a:schemeClr val="lt1"/>
+                </a:solidFill>
+              </a:rPr>
+              <a:t> more </a:t>
+            </a:r>
+            <a:r>
+              <a:rPr lang="fr-FR" sz="2800" dirty="0" err="1">
+                <a:solidFill>
+                  <a:schemeClr val="lt1"/>
+                </a:solidFill>
+              </a:rPr>
+              <a:t>intriguing</a:t>
+            </a:r>
+            <a:r>
+              <a:rPr lang="fr-FR" sz="2800" dirty="0">
+                <a:solidFill>
+                  <a:schemeClr val="lt1"/>
+                </a:solidFill>
+              </a:rPr>
+              <a:t> question: ”</a:t>
+            </a:r>
+            <a:r>
+              <a:rPr lang="fr-FR" sz="2800" b="1" dirty="0">
+                <a:solidFill>
+                  <a:schemeClr val="lt1"/>
+                </a:solidFill>
+              </a:rPr>
+              <a:t>Can Splunk Enterprise </a:t>
+            </a:r>
+            <a:r>
+              <a:rPr lang="fr-FR" sz="2800" b="1" dirty="0" err="1">
+                <a:solidFill>
+                  <a:schemeClr val="lt1"/>
+                </a:solidFill>
+              </a:rPr>
+              <a:t>effectively</a:t>
+            </a:r>
+            <a:r>
+              <a:rPr lang="fr-FR" sz="2800" b="1" dirty="0">
+                <a:solidFill>
+                  <a:schemeClr val="lt1"/>
+                </a:solidFill>
+              </a:rPr>
+              <a:t> </a:t>
+            </a:r>
+            <a:r>
+              <a:rPr lang="fr-FR" sz="2800" b="1" dirty="0" err="1">
+                <a:solidFill>
+                  <a:schemeClr val="lt1"/>
+                </a:solidFill>
+              </a:rPr>
+              <a:t>identify</a:t>
+            </a:r>
+            <a:r>
+              <a:rPr lang="fr-FR" sz="2800" b="1" dirty="0">
+                <a:solidFill>
+                  <a:schemeClr val="lt1"/>
+                </a:solidFill>
+              </a:rPr>
+              <a:t> </a:t>
+            </a:r>
+            <a:r>
+              <a:rPr lang="fr-FR" sz="2800" b="1" dirty="0" err="1">
+                <a:solidFill>
+                  <a:schemeClr val="lt1"/>
+                </a:solidFill>
+              </a:rPr>
+              <a:t>additional</a:t>
+            </a:r>
+            <a:r>
+              <a:rPr lang="fr-FR" sz="2800" b="1" dirty="0">
+                <a:solidFill>
+                  <a:schemeClr val="lt1"/>
+                </a:solidFill>
+              </a:rPr>
+              <a:t> </a:t>
+            </a:r>
+            <a:r>
+              <a:rPr lang="fr-FR" sz="2800" b="1" dirty="0" err="1">
+                <a:solidFill>
+                  <a:schemeClr val="lt1"/>
+                </a:solidFill>
+              </a:rPr>
+              <a:t>threats</a:t>
+            </a:r>
+            <a:r>
+              <a:rPr lang="fr-FR" sz="2800" b="1" dirty="0">
+                <a:solidFill>
+                  <a:schemeClr val="lt1"/>
+                </a:solidFill>
+              </a:rPr>
+              <a:t> </a:t>
+            </a:r>
+            <a:r>
+              <a:rPr lang="fr-FR" sz="2800" b="1" dirty="0" err="1">
+                <a:solidFill>
+                  <a:schemeClr val="lt1"/>
+                </a:solidFill>
+              </a:rPr>
+              <a:t>that</a:t>
+            </a:r>
+            <a:r>
+              <a:rPr lang="fr-FR" sz="2800" b="1" dirty="0">
+                <a:solidFill>
+                  <a:schemeClr val="lt1"/>
+                </a:solidFill>
+              </a:rPr>
+              <a:t> </a:t>
+            </a:r>
+            <a:r>
+              <a:rPr lang="fr-FR" sz="2800" b="1" dirty="0" err="1">
+                <a:solidFill>
+                  <a:schemeClr val="lt1"/>
+                </a:solidFill>
+              </a:rPr>
+              <a:t>were</a:t>
+            </a:r>
+            <a:r>
+              <a:rPr lang="fr-FR" sz="2800" b="1" dirty="0">
+                <a:solidFill>
+                  <a:schemeClr val="lt1"/>
+                </a:solidFill>
+              </a:rPr>
+              <a:t> </a:t>
+            </a:r>
+            <a:r>
+              <a:rPr lang="fr-FR" sz="2800" b="1" dirty="0" err="1">
+                <a:solidFill>
+                  <a:schemeClr val="lt1"/>
+                </a:solidFill>
+              </a:rPr>
+              <a:t>missed</a:t>
+            </a:r>
+            <a:r>
+              <a:rPr lang="fr-FR" sz="2800" dirty="0">
+                <a:solidFill>
+                  <a:schemeClr val="lt1"/>
+                </a:solidFill>
+              </a:rPr>
+              <a:t>?” This report documents </a:t>
+            </a:r>
+            <a:r>
+              <a:rPr lang="fr-FR" sz="2800" dirty="0" err="1">
+                <a:solidFill>
+                  <a:schemeClr val="lt1"/>
+                </a:solidFill>
+              </a:rPr>
+              <a:t>my</a:t>
+            </a:r>
+            <a:r>
+              <a:rPr lang="fr-FR" sz="2800" dirty="0">
+                <a:solidFill>
+                  <a:schemeClr val="lt1"/>
+                </a:solidFill>
+              </a:rPr>
+              <a:t> </a:t>
+            </a:r>
+            <a:r>
+              <a:rPr lang="fr-FR" sz="2800" dirty="0" err="1">
+                <a:solidFill>
+                  <a:schemeClr val="lt1"/>
+                </a:solidFill>
+              </a:rPr>
+              <a:t>attempts</a:t>
+            </a:r>
+            <a:r>
+              <a:rPr lang="fr-FR" sz="2800" dirty="0">
+                <a:solidFill>
+                  <a:schemeClr val="lt1"/>
+                </a:solidFill>
+              </a:rPr>
+              <a:t> to </a:t>
+            </a:r>
+            <a:r>
+              <a:rPr lang="fr-FR" sz="2800" dirty="0" err="1">
+                <a:solidFill>
+                  <a:schemeClr val="lt1"/>
+                </a:solidFill>
+              </a:rPr>
+              <a:t>answer</a:t>
+            </a:r>
+            <a:r>
+              <a:rPr lang="fr-FR" sz="2800" dirty="0">
+                <a:solidFill>
+                  <a:schemeClr val="lt1"/>
+                </a:solidFill>
+              </a:rPr>
+              <a:t> </a:t>
+            </a:r>
+            <a:r>
+              <a:rPr lang="fr-FR" sz="2800" dirty="0" err="1">
+                <a:solidFill>
+                  <a:schemeClr val="lt1"/>
+                </a:solidFill>
+              </a:rPr>
+              <a:t>this</a:t>
+            </a:r>
+            <a:r>
+              <a:rPr lang="fr-FR" sz="2800" dirty="0">
+                <a:solidFill>
+                  <a:schemeClr val="lt1"/>
+                </a:solidFill>
+              </a:rPr>
+              <a:t> question.</a:t>
+            </a:r>
+            <a:endParaRPr sz="2800" b="1" dirty="0">
+              <a:solidFill>
+                <a:schemeClr val="lt1"/>
+              </a:solidFill>
+              <a:latin typeface="Verdana"/>
+              <a:ea typeface="Verdana"/>
+              <a:cs typeface="Verdana"/>
+              <a:sym typeface="Verdana"/>
+            </a:endParaRPr>
+          </a:p>
+        </p:txBody>
+      </p:sp>
+      <p:pic>
+        <p:nvPicPr>
+          <p:cNvPr id="58" name="Google Shape;58;p2"/>
+          <p:cNvPicPr preferRelativeResize="0"/>
+          <p:nvPr/>
+        </p:nvPicPr>
+        <p:blipFill rotWithShape="1">
+          <a:blip r:embed="rId3">
+            <a:alphaModFix/>
+          </a:blip>
+          <a:srcRect/>
+          <a:stretch/>
+        </p:blipFill>
+        <p:spPr>
+          <a:xfrm>
+            <a:off x="5377411" y="8343900"/>
+            <a:ext cx="12037199" cy="91499"/>
+          </a:xfrm>
+          <a:prstGeom prst="rect">
+            <a:avLst/>
+          </a:prstGeom>
+          <a:noFill/>
+          <a:ln>
+            <a:noFill/>
+          </a:ln>
+        </p:spPr>
+      </p:pic>
+      <p:pic>
+        <p:nvPicPr>
+          <p:cNvPr id="59" name="Google Shape;59;p2"/>
+          <p:cNvPicPr preferRelativeResize="0"/>
+          <p:nvPr/>
+        </p:nvPicPr>
+        <p:blipFill rotWithShape="1">
+          <a:blip r:embed="rId4">
+            <a:alphaModFix/>
+          </a:blip>
+          <a:srcRect/>
+          <a:stretch/>
+        </p:blipFill>
+        <p:spPr>
+          <a:xfrm>
+            <a:off x="4800600" y="0"/>
+            <a:ext cx="146399" cy="10286999"/>
+          </a:xfrm>
+          <a:prstGeom prst="rect">
+            <a:avLst/>
+          </a:prstGeom>
+          <a:noFill/>
+          <a:ln>
+            <a:noFill/>
+          </a:ln>
+        </p:spPr>
+      </p:pic>
+    </p:spTree>
+  </p:cSld>
+  <p:clrMapOvr>
+    <a:masterClrMapping/>
+  </p:clrMapOvr>
+</p:sld>
+</file>
+
+<file path=ppt/slides/slide20.xml><?xml version="1.0" encoding="utf-8"?>
 <p:sld xmlns:a="http://schemas.openxmlformats.org/drawingml/2006/main" xmlns:r="http://schemas.openxmlformats.org/officeDocument/2006/relationships" xmlns:p="http://schemas.openxmlformats.org/presentationml/2006/main">
   <p:cSld>
     <p:spTree>
@@ -14627,7 +14105,7 @@
 </p:sld>
 </file>
 
-<file path=ppt/slides/slide26.xml><?xml version="1.0" encoding="utf-8"?>
+<file path=ppt/slides/slide21.xml><?xml version="1.0" encoding="utf-8"?>
 <p:sld xmlns:a="http://schemas.openxmlformats.org/drawingml/2006/main" xmlns:r="http://schemas.openxmlformats.org/officeDocument/2006/relationships" xmlns:p="http://schemas.openxmlformats.org/presentationml/2006/main">
   <p:cSld>
     <p:spTree>
@@ -15099,7 +14577,7 @@
 </p:sld>
 </file>
 
-<file path=ppt/slides/slide27.xml><?xml version="1.0" encoding="utf-8"?>
+<file path=ppt/slides/slide22.xml><?xml version="1.0" encoding="utf-8"?>
 <p:sld xmlns:a="http://schemas.openxmlformats.org/drawingml/2006/main" xmlns:r="http://schemas.openxmlformats.org/officeDocument/2006/relationships" xmlns:p="http://schemas.openxmlformats.org/presentationml/2006/main">
   <p:cSld>
     <p:spTree>
@@ -15300,10 +14778,38 @@
               <a:buAutoNum type="arabicPeriod"/>
             </a:pPr>
             <a:r>
-              <a:rPr lang="fr-FR" sz="2200"/>
-              <a:t>Isolate infected host (10.8.15.133) to prevent further compromise.</a:t>
-            </a:r>
-            <a:endParaRPr/>
+              <a:rPr lang="fr-FR" sz="2200" dirty="0" err="1"/>
+              <a:t>Isolate</a:t>
+            </a:r>
+            <a:r>
+              <a:rPr lang="fr-FR" sz="2200" dirty="0"/>
+              <a:t> </a:t>
+            </a:r>
+            <a:r>
+              <a:rPr lang="fr-FR" sz="2200" dirty="0" err="1"/>
+              <a:t>infected</a:t>
+            </a:r>
+            <a:r>
+              <a:rPr lang="fr-FR" sz="2200" dirty="0"/>
+              <a:t> host (10.8.15.133) to </a:t>
+            </a:r>
+            <a:r>
+              <a:rPr lang="fr-FR" sz="2200" dirty="0" err="1"/>
+              <a:t>prevent</a:t>
+            </a:r>
+            <a:r>
+              <a:rPr lang="fr-FR" sz="2200" dirty="0"/>
+              <a:t> </a:t>
+            </a:r>
+            <a:r>
+              <a:rPr lang="fr-FR" sz="2200" dirty="0" err="1"/>
+              <a:t>further</a:t>
+            </a:r>
+            <a:r>
+              <a:rPr lang="fr-FR" sz="2200" dirty="0"/>
+              <a:t> compromise.</a:t>
+            </a:r>
+            <a:endParaRPr dirty="0"/>
           </a:p>
           <a:p>
             <a:pPr marL="457200" lvl="0" indent="-317500" algn="l" rtl="0">
@@ -15320,7 +14826,7 @@
               <a:buFont typeface="Calibri"/>
               <a:buNone/>
             </a:pPr>
-            <a:endParaRPr sz="2200"/>
+            <a:endParaRPr sz="2200" dirty="0"/>
           </a:p>
           <a:p>
             <a:pPr marL="457200" lvl="0" indent="-457200" algn="l" rtl="0">
@@ -15338,10 +14844,58 @@
               <a:buAutoNum type="arabicPeriod"/>
             </a:pPr>
             <a:r>
-              <a:rPr lang="fr-FR" sz="2200"/>
-              <a:t> Block identified Attack infrastructure by implementing firewall rules for 72.5.43.29,23.205.110.48, 23.33.138.184, and 60+ additional malicious IPs.</a:t>
-            </a:r>
-            <a:endParaRPr/>
+              <a:rPr lang="fr-FR" sz="2200" dirty="0"/>
+              <a:t> Block </a:t>
+            </a:r>
+            <a:r>
+              <a:rPr lang="fr-FR" sz="2200" dirty="0" err="1"/>
+              <a:t>identified</a:t>
+            </a:r>
+            <a:r>
+              <a:rPr lang="fr-FR" sz="2200" dirty="0"/>
+              <a:t> Attack infrastructure by </a:t>
+            </a:r>
+            <a:r>
+              <a:rPr lang="fr-FR" sz="2200" dirty="0" err="1"/>
+              <a:t>implementing</a:t>
+            </a:r>
+            <a:r>
+              <a:rPr lang="fr-FR" sz="2200" dirty="0"/>
+              <a:t> firewall </a:t>
+            </a:r>
+            <a:r>
+              <a:rPr lang="fr-FR" sz="2200" dirty="0" err="1"/>
+              <a:t>rules</a:t>
+            </a:r>
+            <a:r>
+              <a:rPr lang="fr-FR" sz="2200" dirty="0"/>
+              <a:t> for 72.5.43.29,23.205.110.48, 23.33.138.184, and 60+ </a:t>
+            </a:r>
+            <a:r>
+              <a:rPr lang="fr-FR" sz="2200" dirty="0" err="1"/>
+              <a:t>additional</a:t>
+            </a:r>
+            <a:r>
+              <a:rPr lang="fr-FR" sz="2200" dirty="0"/>
+              <a:t> </a:t>
+            </a:r>
+            <a:r>
+              <a:rPr lang="fr-FR" sz="2200" dirty="0" err="1"/>
+              <a:t>malicious</a:t>
+            </a:r>
+            <a:r>
+              <a:rPr lang="fr-FR" sz="2200" dirty="0"/>
+              <a:t> </a:t>
+            </a:r>
+            <a:r>
+              <a:rPr lang="fr-FR" sz="2200" dirty="0" err="1"/>
+              <a:t>IPs</a:t>
+            </a:r>
+            <a:r>
+              <a:rPr lang="fr-FR" sz="2200" dirty="0"/>
+              <a:t>.</a:t>
+            </a:r>
+            <a:endParaRPr dirty="0"/>
           </a:p>
           <a:p>
             <a:pPr marL="457200" lvl="0" indent="-317500" algn="l" rtl="0">
@@ -15358,7 +14912,7 @@
               <a:buFont typeface="Calibri"/>
               <a:buNone/>
             </a:pPr>
-            <a:endParaRPr sz="2200"/>
+            <a:endParaRPr sz="2200" dirty="0"/>
           </a:p>
           <a:p>
             <a:pPr marL="457200" lvl="0" indent="-457200" algn="l" rtl="0">
@@ -15376,10 +14930,46 @@
               <a:buAutoNum type="arabicPeriod"/>
             </a:pPr>
             <a:r>
-              <a:rPr lang="fr-FR" sz="2200"/>
-              <a:t>Investigate domain controller (10.8.15.4) for movement evidence.</a:t>
-            </a:r>
-            <a:endParaRPr/>
+              <a:rPr lang="fr-FR" sz="2200" dirty="0" err="1"/>
+              <a:t>Investigate</a:t>
+            </a:r>
+            <a:r>
+              <a:rPr lang="fr-FR" sz="2200" dirty="0"/>
+              <a:t> </a:t>
+            </a:r>
+            <a:r>
+              <a:rPr lang="fr-FR" sz="2200" dirty="0" err="1"/>
+              <a:t>domain</a:t>
+            </a:r>
+            <a:r>
+              <a:rPr lang="fr-FR" sz="2200" dirty="0"/>
+              <a:t> </a:t>
+            </a:r>
+            <a:r>
+              <a:rPr lang="fr-FR" sz="2200" dirty="0" err="1"/>
+              <a:t>controller</a:t>
+            </a:r>
+            <a:r>
+              <a:rPr lang="fr-FR" sz="2200" dirty="0"/>
+              <a:t> (10.8.15.4) for </a:t>
+            </a:r>
+            <a:r>
+              <a:rPr lang="fr-FR" sz="2200" dirty="0" err="1"/>
+              <a:t>movement</a:t>
+            </a:r>
+            <a:r>
+              <a:rPr lang="fr-FR" sz="2200" dirty="0"/>
+              <a:t> </a:t>
+            </a:r>
+            <a:r>
+              <a:rPr lang="fr-FR" sz="2200" dirty="0" err="1"/>
+              <a:t>evidence</a:t>
+            </a:r>
+            <a:r>
+              <a:rPr lang="fr-FR" sz="2200" dirty="0"/>
+              <a:t>.</a:t>
+            </a:r>
+            <a:endParaRPr dirty="0"/>
           </a:p>
           <a:p>
             <a:pPr marL="457200" lvl="0" indent="-317500" algn="l" rtl="0">
@@ -15396,7 +14986,7 @@
               <a:buFont typeface="Calibri"/>
               <a:buNone/>
             </a:pPr>
-            <a:endParaRPr sz="2200"/>
+            <a:endParaRPr sz="2200" dirty="0"/>
           </a:p>
           <a:p>
             <a:pPr marL="457200" lvl="0" indent="-457200" algn="l" rtl="0">
@@ -15414,10 +15004,86 @@
               <a:buAutoNum type="arabicPeriod"/>
             </a:pPr>
             <a:r>
-              <a:rPr lang="fr-FR" sz="2200"/>
-              <a:t>Encrypted Traffic Profiling for QUIC and TLSv1.3 to external destinations. Packet contents cannot be inspected but metadata can identify anomalous encrypted channels.</a:t>
-            </a:r>
-            <a:endParaRPr sz="2200"/>
+              <a:rPr lang="fr-FR" sz="2200" dirty="0" err="1"/>
+              <a:t>Encrypted</a:t>
+            </a:r>
+            <a:r>
+              <a:rPr lang="fr-FR" sz="2200" dirty="0"/>
+              <a:t> Traffic Profiling for QUIC and TLSv1.3 to </a:t>
+            </a:r>
+            <a:r>
+              <a:rPr lang="fr-FR" sz="2200" dirty="0" err="1"/>
+              <a:t>external</a:t>
+            </a:r>
+            <a:r>
+              <a:rPr lang="fr-FR" sz="2200" dirty="0"/>
+              <a:t> destinations. </a:t>
+            </a:r>
+            <a:r>
+              <a:rPr lang="fr-FR" sz="2200" dirty="0" err="1"/>
+              <a:t>Packet</a:t>
+            </a:r>
+            <a:r>
+              <a:rPr lang="fr-FR" sz="2200" dirty="0"/>
+              <a:t> contents </a:t>
+            </a:r>
+            <a:r>
+              <a:rPr lang="fr-FR" sz="2200" dirty="0" err="1"/>
+              <a:t>can’t</a:t>
+            </a:r>
+            <a:r>
+              <a:rPr lang="fr-FR" sz="2200" dirty="0"/>
+              <a:t> </a:t>
+            </a:r>
+            <a:r>
+              <a:rPr lang="fr-FR" sz="2200" dirty="0" err="1"/>
+              <a:t>be</a:t>
+            </a:r>
+            <a:r>
+              <a:rPr lang="fr-FR" sz="2200" dirty="0"/>
+              <a:t> </a:t>
+            </a:r>
+            <a:r>
+              <a:rPr lang="fr-FR" sz="2200" dirty="0" err="1"/>
+              <a:t>inspected</a:t>
+            </a:r>
+            <a:r>
+              <a:rPr lang="fr-FR" sz="2200" dirty="0"/>
+              <a:t> but </a:t>
+            </a:r>
+            <a:r>
+              <a:rPr lang="fr-FR" sz="2200" dirty="0" err="1"/>
+              <a:t>metadata</a:t>
+            </a:r>
+            <a:r>
+              <a:rPr lang="fr-FR" sz="2200" dirty="0"/>
+              <a:t> can </a:t>
+            </a:r>
+            <a:r>
+              <a:rPr lang="fr-FR" sz="2200" dirty="0" err="1"/>
+              <a:t>identify</a:t>
+            </a:r>
+            <a:r>
+              <a:rPr lang="fr-FR" sz="2200" dirty="0"/>
+              <a:t> </a:t>
+            </a:r>
+            <a:r>
+              <a:rPr lang="fr-FR" sz="2200" dirty="0" err="1"/>
+              <a:t>anomalous</a:t>
+            </a:r>
+            <a:r>
+              <a:rPr lang="fr-FR" sz="2200" dirty="0"/>
+              <a:t> </a:t>
+            </a:r>
+            <a:r>
+              <a:rPr lang="fr-FR" sz="2200" dirty="0" err="1"/>
+              <a:t>encrypted</a:t>
+            </a:r>
+            <a:r>
+              <a:rPr lang="fr-FR" sz="2200" dirty="0"/>
+              <a:t> channels.</a:t>
+            </a:r>
+            <a:endParaRPr sz="2200" dirty="0"/>
           </a:p>
           <a:p>
             <a:pPr marL="457200" lvl="0" indent="-317500" algn="l" rtl="0">
@@ -15434,7 +15100,7 @@
               <a:buFont typeface="Calibri"/>
               <a:buNone/>
             </a:pPr>
-            <a:endParaRPr sz="2200"/>
+            <a:endParaRPr sz="2200" dirty="0"/>
           </a:p>
           <a:p>
             <a:pPr marL="457200" lvl="0" indent="-457200" algn="l" rtl="0">
@@ -15452,10 +15118,46 @@
               <a:buAutoNum type="arabicPeriod"/>
             </a:pPr>
             <a:r>
-              <a:rPr lang="fr-FR" sz="2200"/>
-              <a:t>Query Depth Monitoring by tracking query sizes and responses.</a:t>
-            </a:r>
-            <a:endParaRPr/>
+              <a:rPr lang="fr-FR" sz="2200" dirty="0" err="1"/>
+              <a:t>Query</a:t>
+            </a:r>
+            <a:r>
+              <a:rPr lang="fr-FR" sz="2200" dirty="0"/>
+              <a:t> </a:t>
+            </a:r>
+            <a:r>
+              <a:rPr lang="fr-FR" sz="2200" dirty="0" err="1"/>
+              <a:t>Depth</a:t>
+            </a:r>
+            <a:r>
+              <a:rPr lang="fr-FR" sz="2200" dirty="0"/>
+              <a:t> Monitoring by </a:t>
+            </a:r>
+            <a:r>
+              <a:rPr lang="fr-FR" sz="2200" dirty="0" err="1"/>
+              <a:t>tracking</a:t>
+            </a:r>
+            <a:r>
+              <a:rPr lang="fr-FR" sz="2200" dirty="0"/>
+              <a:t> </a:t>
+            </a:r>
+            <a:r>
+              <a:rPr lang="fr-FR" sz="2200" dirty="0" err="1"/>
+              <a:t>query</a:t>
+            </a:r>
+            <a:r>
+              <a:rPr lang="fr-FR" sz="2200" dirty="0"/>
+              <a:t> sizes and </a:t>
+            </a:r>
+            <a:r>
+              <a:rPr lang="fr-FR" sz="2200" dirty="0" err="1"/>
+              <a:t>responses</a:t>
+            </a:r>
+            <a:r>
+              <a:rPr lang="fr-FR" sz="2200" dirty="0"/>
+              <a:t>.</a:t>
+            </a:r>
+            <a:endParaRPr dirty="0"/>
           </a:p>
           <a:p>
             <a:pPr marL="457200" lvl="0" indent="-317500" algn="l" rtl="0">
@@ -15472,7 +15174,7 @@
               <a:buFont typeface="Calibri"/>
               <a:buNone/>
             </a:pPr>
-            <a:endParaRPr sz="2200"/>
+            <a:endParaRPr sz="2200" dirty="0"/>
           </a:p>
           <a:p>
             <a:pPr marL="457200" lvl="0" indent="-457200" algn="l" rtl="0">
@@ -15490,10 +15192,50 @@
               <a:buAutoNum type="arabicPeriod"/>
             </a:pPr>
             <a:r>
-              <a:rPr lang="fr-FR" sz="2200"/>
-              <a:t>Protocol Abuse Detection by monitoring non-web protocols (e.g OCSP) for anomalous payload sizes.</a:t>
-            </a:r>
-            <a:endParaRPr/>
+              <a:rPr lang="fr-FR" sz="2200" dirty="0"/>
+              <a:t>Protocol Abuse </a:t>
+            </a:r>
+            <a:r>
+              <a:rPr lang="fr-FR" sz="2200" dirty="0" err="1"/>
+              <a:t>Detection</a:t>
+            </a:r>
+            <a:r>
+              <a:rPr lang="fr-FR" sz="2200" dirty="0"/>
+              <a:t> by monitoring non-web </a:t>
+            </a:r>
+            <a:r>
+              <a:rPr lang="fr-FR" sz="2200" dirty="0" err="1"/>
+              <a:t>protocols</a:t>
+            </a:r>
+            <a:r>
+              <a:rPr lang="fr-FR" sz="2200" dirty="0"/>
+              <a:t> (</a:t>
+            </a:r>
+            <a:r>
+              <a:rPr lang="fr-FR" sz="2200" dirty="0" err="1"/>
+              <a:t>e.g</a:t>
+            </a:r>
+            <a:r>
+              <a:rPr lang="fr-FR" sz="2200" dirty="0"/>
+              <a:t> OCSP) for </a:t>
+            </a:r>
+            <a:r>
+              <a:rPr lang="fr-FR" sz="2200" dirty="0" err="1"/>
+              <a:t>anomalous</a:t>
+            </a:r>
+            <a:r>
+              <a:rPr lang="fr-FR" sz="2200" dirty="0"/>
+              <a:t> </a:t>
+            </a:r>
+            <a:r>
+              <a:rPr lang="fr-FR" sz="2200" dirty="0" err="1"/>
+              <a:t>payload</a:t>
+            </a:r>
+            <a:r>
+              <a:rPr lang="fr-FR" sz="2200" dirty="0"/>
+              <a:t> sizes.</a:t>
+            </a:r>
+            <a:endParaRPr dirty="0"/>
           </a:p>
           <a:p>
             <a:pPr marL="457200" lvl="0" indent="-317500" algn="l" rtl="0">
@@ -15510,7 +15252,7 @@
               <a:buFont typeface="Calibri"/>
               <a:buNone/>
             </a:pPr>
-            <a:endParaRPr sz="2200"/>
+            <a:endParaRPr sz="2200" dirty="0"/>
           </a:p>
           <a:p>
             <a:pPr marL="457200" lvl="0" indent="-457200" algn="l" rtl="0">
@@ -15528,13 +15270,113 @@
               <a:buAutoNum type="arabicPeriod"/>
             </a:pPr>
             <a:r>
-              <a:rPr lang="fr-FR" sz="2200"/>
-              <a:t>Lateral Movement Baseline by establishing communication baselines for LDAP,SMB, and DCERPC traffic and any deviation from normal patterns involving the infected host should trigger immediate containment.</a:t>
+              <a:rPr lang="fr-FR" sz="2200" dirty="0" err="1"/>
+              <a:t>Lateral</a:t>
+            </a:r>
+            <a:r>
+              <a:rPr lang="fr-FR" sz="2200" dirty="0"/>
+              <a:t> </a:t>
+            </a:r>
+            <a:r>
+              <a:rPr lang="fr-FR" sz="2200" dirty="0" err="1"/>
+              <a:t>Movement</a:t>
+            </a:r>
+            <a:r>
+              <a:rPr lang="fr-FR" sz="2200" dirty="0"/>
+              <a:t> Baseline by </a:t>
+            </a:r>
+            <a:r>
+              <a:rPr lang="fr-FR" sz="2200" dirty="0" err="1"/>
+              <a:t>establishing</a:t>
+            </a:r>
+            <a:r>
+              <a:rPr lang="fr-FR" sz="2200" dirty="0"/>
+              <a:t> communication </a:t>
+            </a:r>
+            <a:r>
+              <a:rPr lang="fr-FR" sz="2200" dirty="0" err="1"/>
+              <a:t>baselines</a:t>
+            </a:r>
+            <a:r>
+              <a:rPr lang="fr-FR" sz="2200" dirty="0"/>
+              <a:t> for LDAP,SMB, and DCERPC </a:t>
+            </a:r>
+            <a:r>
+              <a:rPr lang="fr-FR" sz="2200" dirty="0" err="1"/>
+              <a:t>traffic</a:t>
+            </a:r>
+            <a:r>
+              <a:rPr lang="fr-FR" sz="2200" dirty="0"/>
+              <a:t> and </a:t>
+            </a:r>
+            <a:r>
+              <a:rPr lang="fr-FR" sz="2200" dirty="0" err="1"/>
+              <a:t>any</a:t>
+            </a:r>
+            <a:r>
+              <a:rPr lang="fr-FR" sz="2200" dirty="0"/>
+              <a:t> </a:t>
+            </a:r>
+            <a:r>
+              <a:rPr lang="fr-FR" sz="2200" dirty="0" err="1"/>
+              <a:t>deviation</a:t>
+            </a:r>
+            <a:r>
+              <a:rPr lang="fr-FR" sz="2200" dirty="0"/>
+              <a:t> </a:t>
+            </a:r>
+            <a:r>
+              <a:rPr lang="fr-FR" sz="2200" dirty="0" err="1"/>
+              <a:t>from</a:t>
+            </a:r>
+            <a:r>
+              <a:rPr lang="fr-FR" sz="2200" dirty="0"/>
+              <a:t> normal patterns </a:t>
+            </a:r>
+            <a:r>
+              <a:rPr lang="fr-FR" sz="2200" dirty="0" err="1"/>
+              <a:t>involving</a:t>
+            </a:r>
+            <a:r>
+              <a:rPr lang="fr-FR" sz="2200" dirty="0"/>
+              <a:t> the </a:t>
+            </a:r>
+            <a:r>
+              <a:rPr lang="fr-FR" sz="2200" dirty="0" err="1"/>
+              <a:t>infected</a:t>
+            </a:r>
+            <a:r>
+              <a:rPr lang="fr-FR" sz="2200" dirty="0"/>
+              <a:t> host </a:t>
+            </a:r>
+            <a:r>
+              <a:rPr lang="fr-FR" sz="2200" dirty="0" err="1"/>
+              <a:t>should</a:t>
+            </a:r>
+            <a:r>
+              <a:rPr lang="fr-FR" sz="2200" dirty="0"/>
+              <a:t> trigger </a:t>
+            </a:r>
+            <a:r>
+              <a:rPr lang="fr-FR" sz="2200" dirty="0" err="1"/>
+              <a:t>immediate</a:t>
+            </a:r>
+            <a:r>
+              <a:rPr lang="fr-FR" sz="2200" dirty="0"/>
+              <a:t> </a:t>
+            </a:r>
+            <a:r>
+              <a:rPr lang="fr-FR" sz="2200" dirty="0" err="1"/>
+              <a:t>containment</a:t>
+            </a:r>
+            <a:r>
+              <a:rPr lang="fr-FR" sz="2200" dirty="0"/>
+              <a:t>.</a:t>
             </a:r>
             <a:br>
-              <a:rPr lang="fr-FR"/>
+              <a:rPr lang="fr-FR" dirty="0"/>
             </a:br>
-            <a:endParaRPr sz="2800"/>
+            <a:endParaRPr sz="2800" dirty="0"/>
           </a:p>
         </p:txBody>
       </p:sp>
@@ -15596,7 +15438,7 @@
 </p:sld>
 </file>
 
-<file path=ppt/slides/slide28.xml><?xml version="1.0" encoding="utf-8"?>
+<file path=ppt/slides/slide23.xml><?xml version="1.0" encoding="utf-8"?>
 <p:sld xmlns:a="http://schemas.openxmlformats.org/drawingml/2006/main" xmlns:r="http://schemas.openxmlformats.org/officeDocument/2006/relationships" xmlns:p="http://schemas.openxmlformats.org/presentationml/2006/main">
   <p:cSld>
     <p:spTree>
@@ -16733,7 +16575,7 @@
 </p:sld>
 </file>
 
-<file path=ppt/slides/slide29.xml><?xml version="1.0" encoding="utf-8"?>
+<file path=ppt/slides/slide24.xml><?xml version="1.0" encoding="utf-8"?>
 <p:sld xmlns:a="http://schemas.openxmlformats.org/drawingml/2006/main" xmlns:r="http://schemas.openxmlformats.org/officeDocument/2006/relationships" xmlns:p="http://schemas.openxmlformats.org/presentationml/2006/main" showMasterSp="0">
   <p:cSld>
     <p:spTree>
@@ -18428,8 +18270,8 @@
         </p:nvSpPr>
         <p:spPr>
           <a:xfrm>
-            <a:off x="901700" y="1201735"/>
-            <a:ext cx="15633700" cy="1598515"/>
+            <a:off x="5630447" y="30316"/>
+            <a:ext cx="15633700" cy="1444626"/>
           </a:xfrm>
           <a:prstGeom prst="rect">
             <a:avLst/>
@@ -18455,21 +18297,13 @@
               <a:buNone/>
             </a:pPr>
             <a:r>
-              <a:rPr lang="fr-FR" sz="5400"/>
-              <a:t>Network Discovery - Baseline Analysis</a:t>
+              <a:rPr lang="fr-FR" sz="4800" dirty="0"/>
+              <a:t>Network Discovery</a:t>
             </a:r>
             <a:br>
-              <a:rPr lang="fr-FR"/>
+              <a:rPr lang="fr-FR" dirty="0"/>
             </a:br>
-            <a:r>
-              <a:rPr lang="fr-FR" sz="2800"/>
-              <a:t> </a:t>
-            </a:r>
-            <a:r>
-              <a:rPr lang="fr-FR" sz="2400" b="0"/>
-              <a:t>Query extractes total packets, sources, destinations, average packet size.</a:t>
-            </a:r>
-            <a:endParaRPr sz="2400" b="0">
+            <a:endParaRPr sz="2400" b="0" dirty="0">
               <a:latin typeface="Verdana"/>
               <a:ea typeface="Verdana"/>
               <a:cs typeface="Verdana"/>
@@ -18488,26 +18322,126 @@
           <a:blip r:embed="rId4">
             <a:alphaModFix/>
           </a:blip>
-          <a:srcRect/>
-          <a:stretch/>
+          <a:srcRect l="494" t="2016" r="53044" b="41514"/>
+          <a:stretch>
+            <a:fillRect/>
+          </a:stretch>
         </p:blipFill>
         <p:spPr>
           <a:xfrm>
-            <a:off x="381000" y="3314700"/>
-            <a:ext cx="17700648" cy="6477000"/>
+            <a:off x="10162862" y="3800053"/>
+            <a:ext cx="7635040" cy="2498272"/>
+          </a:xfrm>
+          <a:prstGeom prst="roundRect">
+            <a:avLst>
+              <a:gd name="adj" fmla="val 4167"/>
+            </a:avLst>
+          </a:prstGeom>
+          <a:solidFill>
+            <a:srgbClr val="FFFFFF"/>
+          </a:solidFill>
+          <a:ln w="76200" cap="sq">
+            <a:solidFill>
+              <a:srgbClr val="EAEAEA"/>
+            </a:solidFill>
+            <a:miter lim="800000"/>
+          </a:ln>
+          <a:effectLst>
+            <a:reflection blurRad="12700" stA="33000" endPos="28000" dist="5000" dir="5400000" sy="-100000" algn="bl" rotWithShape="0"/>
+          </a:effectLst>
+          <a:scene3d>
+            <a:camera prst="orthographicFront"/>
+            <a:lightRig rig="threePt" dir="t">
+              <a:rot lat="0" lon="0" rev="2700000"/>
+            </a:lightRig>
+          </a:scene3d>
+          <a:sp3d contourW="6350">
+            <a:bevelT h="38100"/>
+            <a:contourClr>
+              <a:srgbClr val="C0C0C0"/>
+            </a:contourClr>
+          </a:sp3d>
+        </p:spPr>
+      </p:pic>
+      <p:pic>
+        <p:nvPicPr>
+          <p:cNvPr id="111" name="Google Shape;111;p8"/>
+          <p:cNvPicPr preferRelativeResize="0"/>
+          <p:nvPr/>
+        </p:nvPicPr>
+        <p:blipFill rotWithShape="1">
+          <a:blip r:embed="rId5">
+            <a:alphaModFix/>
+          </a:blip>
+          <a:srcRect r="59041" b="76562"/>
+          <a:stretch>
+            <a:fillRect/>
+          </a:stretch>
+        </p:blipFill>
+        <p:spPr>
+          <a:xfrm>
+            <a:off x="10141720" y="1646806"/>
+            <a:ext cx="7635040" cy="1844736"/>
+          </a:xfrm>
+          <a:prstGeom prst="roundRect">
+            <a:avLst>
+              <a:gd name="adj" fmla="val 4167"/>
+            </a:avLst>
+          </a:prstGeom>
+          <a:solidFill>
+            <a:srgbClr val="FFFFFF"/>
+          </a:solidFill>
+          <a:ln w="76200" cap="sq">
+            <a:solidFill>
+              <a:srgbClr val="EAEAEA"/>
+            </a:solidFill>
+            <a:miter lim="800000"/>
+          </a:ln>
+          <a:effectLst>
+            <a:reflection blurRad="12700" stA="33000" endPos="28000" dist="5000" dir="5400000" sy="-100000" algn="bl" rotWithShape="0"/>
+          </a:effectLst>
+          <a:scene3d>
+            <a:camera prst="orthographicFront"/>
+            <a:lightRig rig="threePt" dir="t">
+              <a:rot lat="0" lon="0" rev="2700000"/>
+            </a:lightRig>
+          </a:scene3d>
+          <a:sp3d contourW="6350">
+            <a:bevelT h="38100"/>
+            <a:contourClr>
+              <a:srgbClr val="C0C0C0"/>
+            </a:contourClr>
+          </a:sp3d>
+        </p:spPr>
+      </p:pic>
+      <p:pic>
+        <p:nvPicPr>
+          <p:cNvPr id="118" name="Google Shape;118;p9"/>
+          <p:cNvPicPr preferRelativeResize="0"/>
+          <p:nvPr/>
+        </p:nvPicPr>
+        <p:blipFill rotWithShape="1">
+          <a:blip r:embed="rId6">
+            <a:alphaModFix/>
+          </a:blip>
+          <a:srcRect t="50725" r="45902"/>
+          <a:stretch>
+            <a:fillRect/>
+          </a:stretch>
+        </p:blipFill>
+        <p:spPr>
+          <a:xfrm>
+            <a:off x="10107998" y="6503258"/>
+            <a:ext cx="7744768" cy="3177584"/>
           </a:xfrm>
           <a:prstGeom prst="rect">
             <a:avLst/>
           </a:prstGeom>
-          <a:noFill/>
-          <a:ln w="127000" cap="sq" cmpd="sng">
+          <a:ln w="127000" cap="sq">
             <a:solidFill>
               <a:srgbClr val="000000"/>
             </a:solidFill>
-            <a:prstDash val="solid"/>
             <a:miter lim="800000"/>
-            <a:headEnd type="none" w="sm" len="sm"/>
-            <a:tailEnd type="none" w="sm" len="sm"/>
           </a:ln>
           <a:effectLst>
             <a:outerShdw blurRad="57150" dist="50800" dir="2700000" algn="tl" rotWithShape="0">
@@ -18518,6 +18452,923 @@
           </a:effectLst>
         </p:spPr>
       </p:pic>
+      <p:sp>
+        <p:nvSpPr>
+          <p:cNvPr id="3" name="ZoneTexte 2">
+            <a:extLst>
+              <a:ext uri="{FF2B5EF4-FFF2-40B4-BE49-F238E27FC236}">
+                <a16:creationId xmlns:a16="http://schemas.microsoft.com/office/drawing/2014/main" id="{9BEAA255-C4BA-DBAD-EC14-2A1F94B17992}"/>
+              </a:ext>
+            </a:extLst>
+          </p:cNvPr>
+          <p:cNvSpPr txBox="1"/>
+          <p:nvPr/>
+        </p:nvSpPr>
+        <p:spPr>
+          <a:xfrm>
+            <a:off x="1376855" y="1599678"/>
+            <a:ext cx="4253592" cy="1938992"/>
+          </a:xfrm>
+          <a:prstGeom prst="rect">
+            <a:avLst/>
+          </a:prstGeom>
+          <a:noFill/>
+        </p:spPr>
+        <p:txBody>
+          <a:bodyPr wrap="square">
+            <a:spAutoFit/>
+          </a:bodyPr>
+          <a:lstStyle/>
+          <a:p>
+            <a:r>
+              <a:rPr lang="fr-FR" sz="2400" b="1" dirty="0">
+                <a:solidFill>
+                  <a:schemeClr val="bg1"/>
+                </a:solidFill>
+              </a:rPr>
+              <a:t>Baseline </a:t>
+            </a:r>
+            <a:r>
+              <a:rPr lang="fr-FR" sz="2400" b="1" dirty="0" err="1">
+                <a:solidFill>
+                  <a:schemeClr val="bg1"/>
+                </a:solidFill>
+              </a:rPr>
+              <a:t>Statistics</a:t>
+            </a:r>
+            <a:r>
+              <a:rPr lang="fr-FR" sz="2400" b="1" dirty="0">
+                <a:solidFill>
+                  <a:schemeClr val="bg1"/>
+                </a:solidFill>
+              </a:rPr>
+              <a:t>:</a:t>
+            </a:r>
+          </a:p>
+          <a:p>
+            <a:pPr marL="342900" indent="-342900">
+              <a:buClr>
+                <a:schemeClr val="bg1"/>
+              </a:buClr>
+              <a:buFont typeface="Arial" panose="020B0604020202020204" pitchFamily="34" charset="0"/>
+              <a:buChar char="•"/>
+            </a:pPr>
+            <a:r>
+              <a:rPr lang="fr-FR" sz="2400" dirty="0">
+                <a:solidFill>
+                  <a:schemeClr val="bg1"/>
+                </a:solidFill>
+              </a:rPr>
+              <a:t>Total </a:t>
+            </a:r>
+            <a:r>
+              <a:rPr lang="fr-FR" sz="2400" dirty="0" err="1">
+                <a:solidFill>
+                  <a:schemeClr val="bg1"/>
+                </a:solidFill>
+              </a:rPr>
+              <a:t>Packets</a:t>
+            </a:r>
+            <a:r>
+              <a:rPr lang="fr-FR" sz="2400" dirty="0">
+                <a:solidFill>
+                  <a:schemeClr val="bg1"/>
+                </a:solidFill>
+              </a:rPr>
+              <a:t>: 18,189</a:t>
+            </a:r>
+          </a:p>
+          <a:p>
+            <a:pPr marL="342900" indent="-342900">
+              <a:buClr>
+                <a:schemeClr val="bg1"/>
+              </a:buClr>
+              <a:buFont typeface="Arial" panose="020B0604020202020204" pitchFamily="34" charset="0"/>
+              <a:buChar char="•"/>
+            </a:pPr>
+            <a:r>
+              <a:rPr lang="fr-FR" sz="2400" dirty="0">
+                <a:solidFill>
+                  <a:schemeClr val="bg1"/>
+                </a:solidFill>
+              </a:rPr>
+              <a:t>Unique Sources: 72</a:t>
+            </a:r>
+          </a:p>
+          <a:p>
+            <a:pPr marL="342900" indent="-342900">
+              <a:buClr>
+                <a:schemeClr val="bg1"/>
+              </a:buClr>
+              <a:buFont typeface="Arial" panose="020B0604020202020204" pitchFamily="34" charset="0"/>
+              <a:buChar char="•"/>
+            </a:pPr>
+            <a:r>
+              <a:rPr lang="fr-FR" sz="2400" dirty="0">
+                <a:solidFill>
+                  <a:schemeClr val="bg1"/>
+                </a:solidFill>
+              </a:rPr>
+              <a:t>Unique Destinations: 78</a:t>
+            </a:r>
+          </a:p>
+          <a:p>
+            <a:pPr marL="342900" indent="-342900">
+              <a:buClr>
+                <a:schemeClr val="bg1"/>
+              </a:buClr>
+              <a:buFont typeface="Arial" panose="020B0604020202020204" pitchFamily="34" charset="0"/>
+              <a:buChar char="•"/>
+            </a:pPr>
+            <a:r>
+              <a:rPr lang="fr-FR" sz="2400" dirty="0" err="1">
+                <a:solidFill>
+                  <a:schemeClr val="bg1"/>
+                </a:solidFill>
+              </a:rPr>
+              <a:t>Avg</a:t>
+            </a:r>
+            <a:r>
+              <a:rPr lang="fr-FR" sz="2400" dirty="0">
+                <a:solidFill>
+                  <a:schemeClr val="bg1"/>
+                </a:solidFill>
+              </a:rPr>
+              <a:t> </a:t>
+            </a:r>
+            <a:r>
+              <a:rPr lang="fr-FR" sz="2400" dirty="0" err="1">
+                <a:solidFill>
+                  <a:schemeClr val="bg1"/>
+                </a:solidFill>
+              </a:rPr>
+              <a:t>Packet</a:t>
+            </a:r>
+            <a:r>
+              <a:rPr lang="fr-FR" sz="2400" dirty="0">
+                <a:solidFill>
+                  <a:schemeClr val="bg1"/>
+                </a:solidFill>
+              </a:rPr>
+              <a:t> Size: 642 bytes</a:t>
+            </a:r>
+          </a:p>
+        </p:txBody>
+      </p:sp>
+      <p:sp>
+        <p:nvSpPr>
+          <p:cNvPr id="5" name="ZoneTexte 4">
+            <a:extLst>
+              <a:ext uri="{FF2B5EF4-FFF2-40B4-BE49-F238E27FC236}">
+                <a16:creationId xmlns:a16="http://schemas.microsoft.com/office/drawing/2014/main" id="{ED810BD4-69ED-6D85-3A1E-8AB76E751F4B}"/>
+              </a:ext>
+            </a:extLst>
+          </p:cNvPr>
+          <p:cNvSpPr txBox="1"/>
+          <p:nvPr/>
+        </p:nvSpPr>
+        <p:spPr>
+          <a:xfrm>
+            <a:off x="1376855" y="3760621"/>
+            <a:ext cx="8603473" cy="1569660"/>
+          </a:xfrm>
+          <a:prstGeom prst="rect">
+            <a:avLst/>
+          </a:prstGeom>
+          <a:noFill/>
+        </p:spPr>
+        <p:txBody>
+          <a:bodyPr wrap="square">
+            <a:spAutoFit/>
+          </a:bodyPr>
+          <a:lstStyle/>
+          <a:p>
+            <a:r>
+              <a:rPr lang="fr-FR" sz="2400" b="1" dirty="0">
+                <a:solidFill>
+                  <a:schemeClr val="bg1"/>
+                </a:solidFill>
+              </a:rPr>
+              <a:t>The ‘</a:t>
+            </a:r>
+            <a:r>
+              <a:rPr lang="fr-FR" sz="2400" b="1" dirty="0" err="1">
+                <a:solidFill>
+                  <a:schemeClr val="bg1"/>
+                </a:solidFill>
+              </a:rPr>
+              <a:t>Noisiest</a:t>
+            </a:r>
+            <a:r>
+              <a:rPr lang="fr-FR" sz="2400" b="1" dirty="0">
+                <a:solidFill>
+                  <a:schemeClr val="bg1"/>
+                </a:solidFill>
+              </a:rPr>
+              <a:t>’ </a:t>
+            </a:r>
+            <a:r>
+              <a:rPr lang="fr-FR" sz="2400" b="1" dirty="0" err="1">
+                <a:solidFill>
+                  <a:schemeClr val="bg1"/>
+                </a:solidFill>
+              </a:rPr>
+              <a:t>Device</a:t>
+            </a:r>
+            <a:r>
+              <a:rPr lang="fr-FR" sz="2400" b="1" dirty="0">
+                <a:solidFill>
+                  <a:schemeClr val="bg1"/>
+                </a:solidFill>
+              </a:rPr>
+              <a:t>:</a:t>
+            </a:r>
+          </a:p>
+          <a:p>
+            <a:pPr marL="342900" indent="-342900">
+              <a:buClr>
+                <a:schemeClr val="bg1"/>
+              </a:buClr>
+              <a:buFont typeface="Arial" panose="020B0604020202020204" pitchFamily="34" charset="0"/>
+              <a:buChar char="•"/>
+            </a:pPr>
+            <a:r>
+              <a:rPr lang="fr-FR" sz="2400" dirty="0">
+                <a:solidFill>
+                  <a:schemeClr val="bg1"/>
+                </a:solidFill>
+              </a:rPr>
+              <a:t>10.8.15.133 </a:t>
+            </a:r>
+          </a:p>
+          <a:p>
+            <a:pPr marL="342900" indent="-342900">
+              <a:buClr>
+                <a:schemeClr val="bg1"/>
+              </a:buClr>
+              <a:buFont typeface="Arial" panose="020B0604020202020204" pitchFamily="34" charset="0"/>
+              <a:buChar char="•"/>
+            </a:pPr>
+            <a:r>
+              <a:rPr lang="fr-FR" sz="2400" dirty="0">
+                <a:solidFill>
+                  <a:schemeClr val="bg1"/>
+                </a:solidFill>
+              </a:rPr>
+              <a:t>6,646 </a:t>
+            </a:r>
+            <a:r>
+              <a:rPr lang="fr-FR" sz="2400" dirty="0" err="1">
+                <a:solidFill>
+                  <a:schemeClr val="bg1"/>
+                </a:solidFill>
+              </a:rPr>
+              <a:t>packets</a:t>
+            </a:r>
+            <a:r>
+              <a:rPr lang="fr-FR" sz="2400" dirty="0">
+                <a:solidFill>
+                  <a:schemeClr val="bg1"/>
+                </a:solidFill>
+              </a:rPr>
+              <a:t> (36.5% of all </a:t>
+            </a:r>
+            <a:r>
+              <a:rPr lang="fr-FR" sz="2400" dirty="0" err="1">
+                <a:solidFill>
+                  <a:schemeClr val="bg1"/>
+                </a:solidFill>
+              </a:rPr>
+              <a:t>traffic</a:t>
+            </a:r>
+            <a:r>
+              <a:rPr lang="fr-FR" sz="2400" dirty="0">
+                <a:solidFill>
+                  <a:schemeClr val="bg1"/>
+                </a:solidFill>
+              </a:rPr>
+              <a:t>)</a:t>
+            </a:r>
+          </a:p>
+          <a:p>
+            <a:pPr marL="342900" indent="-342900">
+              <a:buClr>
+                <a:schemeClr val="bg1"/>
+              </a:buClr>
+              <a:buFont typeface="Arial" panose="020B0604020202020204" pitchFamily="34" charset="0"/>
+              <a:buChar char="•"/>
+            </a:pPr>
+            <a:r>
+              <a:rPr lang="fr-FR" sz="2400" dirty="0">
+                <a:solidFill>
+                  <a:schemeClr val="bg1"/>
+                </a:solidFill>
+              </a:rPr>
+              <a:t>One </a:t>
+            </a:r>
+            <a:r>
+              <a:rPr lang="fr-FR" sz="2400" dirty="0" err="1">
+                <a:solidFill>
+                  <a:schemeClr val="bg1"/>
+                </a:solidFill>
+              </a:rPr>
+              <a:t>internal</a:t>
+            </a:r>
+            <a:r>
+              <a:rPr lang="fr-FR" sz="2400" dirty="0">
+                <a:solidFill>
+                  <a:schemeClr val="bg1"/>
+                </a:solidFill>
+              </a:rPr>
+              <a:t> </a:t>
+            </a:r>
+            <a:r>
+              <a:rPr lang="fr-FR" sz="2400" dirty="0" err="1">
+                <a:solidFill>
+                  <a:schemeClr val="bg1"/>
+                </a:solidFill>
+              </a:rPr>
+              <a:t>device</a:t>
+            </a:r>
+            <a:r>
+              <a:rPr lang="fr-FR" sz="2400" dirty="0">
+                <a:solidFill>
+                  <a:schemeClr val="bg1"/>
+                </a:solidFill>
+              </a:rPr>
+              <a:t> </a:t>
+            </a:r>
+            <a:r>
+              <a:rPr lang="fr-FR" sz="2400" dirty="0" err="1">
+                <a:solidFill>
+                  <a:schemeClr val="bg1"/>
+                </a:solidFill>
+              </a:rPr>
+              <a:t>doing</a:t>
+            </a:r>
+            <a:r>
+              <a:rPr lang="fr-FR" sz="2400" dirty="0">
+                <a:solidFill>
+                  <a:schemeClr val="bg1"/>
+                </a:solidFill>
+              </a:rPr>
+              <a:t> 1/3 of the </a:t>
+            </a:r>
+            <a:r>
+              <a:rPr lang="fr-FR" sz="2400" dirty="0" err="1">
+                <a:solidFill>
+                  <a:schemeClr val="bg1"/>
+                </a:solidFill>
+              </a:rPr>
+              <a:t>traffic</a:t>
+            </a:r>
+            <a:endParaRPr lang="fr-FR" sz="2400" dirty="0">
+              <a:solidFill>
+                <a:schemeClr val="bg1"/>
+              </a:solidFill>
+            </a:endParaRPr>
+          </a:p>
+        </p:txBody>
+      </p:sp>
+      <p:sp>
+        <p:nvSpPr>
+          <p:cNvPr id="4" name="ZoneTexte 3">
+            <a:extLst>
+              <a:ext uri="{FF2B5EF4-FFF2-40B4-BE49-F238E27FC236}">
+                <a16:creationId xmlns:a16="http://schemas.microsoft.com/office/drawing/2014/main" id="{AC2AF81E-BE5A-0D53-C1BE-31A83E3E62CE}"/>
+              </a:ext>
+            </a:extLst>
+          </p:cNvPr>
+          <p:cNvSpPr txBox="1"/>
+          <p:nvPr/>
+        </p:nvSpPr>
+        <p:spPr>
+          <a:xfrm>
+            <a:off x="1376855" y="5741549"/>
+            <a:ext cx="4253592" cy="1938992"/>
+          </a:xfrm>
+          <a:prstGeom prst="rect">
+            <a:avLst/>
+          </a:prstGeom>
+          <a:noFill/>
+        </p:spPr>
+        <p:txBody>
+          <a:bodyPr wrap="square">
+            <a:spAutoFit/>
+          </a:bodyPr>
+          <a:lstStyle/>
+          <a:p>
+            <a:r>
+              <a:rPr lang="fr-FR" sz="2400" b="1" dirty="0" err="1">
+                <a:solidFill>
+                  <a:schemeClr val="bg1"/>
+                </a:solidFill>
+              </a:rPr>
+              <a:t>External</a:t>
+            </a:r>
+            <a:r>
+              <a:rPr lang="fr-FR" sz="2400" b="1" dirty="0">
+                <a:solidFill>
+                  <a:schemeClr val="bg1"/>
+                </a:solidFill>
+              </a:rPr>
+              <a:t> Communication:</a:t>
+            </a:r>
+          </a:p>
+          <a:p>
+            <a:pPr marL="342900" indent="-342900">
+              <a:buClr>
+                <a:schemeClr val="bg1"/>
+              </a:buClr>
+              <a:buFont typeface="Arial" panose="020B0604020202020204" pitchFamily="34" charset="0"/>
+              <a:buChar char="•"/>
+            </a:pPr>
+            <a:r>
+              <a:rPr lang="fr-FR" sz="2400" dirty="0">
+                <a:solidFill>
+                  <a:schemeClr val="bg1"/>
+                </a:solidFill>
+              </a:rPr>
+              <a:t>Total </a:t>
+            </a:r>
+            <a:r>
+              <a:rPr lang="fr-FR" sz="2400" dirty="0" err="1">
+                <a:solidFill>
+                  <a:schemeClr val="bg1"/>
+                </a:solidFill>
+              </a:rPr>
+              <a:t>Packets</a:t>
+            </a:r>
+            <a:r>
+              <a:rPr lang="fr-FR" sz="2400" dirty="0">
+                <a:solidFill>
+                  <a:schemeClr val="bg1"/>
+                </a:solidFill>
+              </a:rPr>
+              <a:t>: 18,189</a:t>
+            </a:r>
+          </a:p>
+          <a:p>
+            <a:pPr marL="342900" indent="-342900">
+              <a:buClr>
+                <a:schemeClr val="bg1"/>
+              </a:buClr>
+              <a:buFont typeface="Arial" panose="020B0604020202020204" pitchFamily="34" charset="0"/>
+              <a:buChar char="•"/>
+            </a:pPr>
+            <a:r>
+              <a:rPr lang="fr-FR" sz="2400" dirty="0">
+                <a:solidFill>
+                  <a:schemeClr val="bg1"/>
+                </a:solidFill>
+              </a:rPr>
+              <a:t>Unique Sources: 72</a:t>
+            </a:r>
+          </a:p>
+          <a:p>
+            <a:pPr marL="342900" indent="-342900">
+              <a:buClr>
+                <a:schemeClr val="bg1"/>
+              </a:buClr>
+              <a:buFont typeface="Arial" panose="020B0604020202020204" pitchFamily="34" charset="0"/>
+              <a:buChar char="•"/>
+            </a:pPr>
+            <a:r>
+              <a:rPr lang="fr-FR" sz="2400" dirty="0">
+                <a:solidFill>
+                  <a:schemeClr val="bg1"/>
+                </a:solidFill>
+              </a:rPr>
+              <a:t>Unique Destinations: 78</a:t>
+            </a:r>
+          </a:p>
+          <a:p>
+            <a:pPr marL="342900" indent="-342900">
+              <a:buClr>
+                <a:schemeClr val="bg1"/>
+              </a:buClr>
+              <a:buFont typeface="Arial" panose="020B0604020202020204" pitchFamily="34" charset="0"/>
+              <a:buChar char="•"/>
+            </a:pPr>
+            <a:r>
+              <a:rPr lang="fr-FR" sz="2400" dirty="0" err="1">
+                <a:solidFill>
+                  <a:schemeClr val="bg1"/>
+                </a:solidFill>
+              </a:rPr>
+              <a:t>Avg</a:t>
+            </a:r>
+            <a:r>
+              <a:rPr lang="fr-FR" sz="2400" dirty="0">
+                <a:solidFill>
+                  <a:schemeClr val="bg1"/>
+                </a:solidFill>
+              </a:rPr>
+              <a:t> </a:t>
+            </a:r>
+            <a:r>
+              <a:rPr lang="fr-FR" sz="2400" dirty="0" err="1">
+                <a:solidFill>
+                  <a:schemeClr val="bg1"/>
+                </a:solidFill>
+              </a:rPr>
+              <a:t>Packet</a:t>
+            </a:r>
+            <a:r>
+              <a:rPr lang="fr-FR" sz="2400" dirty="0">
+                <a:solidFill>
+                  <a:schemeClr val="bg1"/>
+                </a:solidFill>
+              </a:rPr>
+              <a:t> Size: 642 bytes</a:t>
+            </a:r>
+          </a:p>
+        </p:txBody>
+      </p:sp>
+      <p:sp>
+        <p:nvSpPr>
+          <p:cNvPr id="7" name="ZoneTexte 6">
+            <a:extLst>
+              <a:ext uri="{FF2B5EF4-FFF2-40B4-BE49-F238E27FC236}">
+                <a16:creationId xmlns:a16="http://schemas.microsoft.com/office/drawing/2014/main" id="{583D296B-940B-3EEA-1798-D38F8A547B2D}"/>
+              </a:ext>
+            </a:extLst>
+          </p:cNvPr>
+          <p:cNvSpPr txBox="1"/>
+          <p:nvPr/>
+        </p:nvSpPr>
+        <p:spPr>
+          <a:xfrm>
+            <a:off x="745478" y="8285157"/>
+            <a:ext cx="9396242" cy="1569660"/>
+          </a:xfrm>
+          <a:prstGeom prst="rect">
+            <a:avLst/>
+          </a:prstGeom>
+          <a:noFill/>
+        </p:spPr>
+        <p:txBody>
+          <a:bodyPr wrap="square">
+            <a:spAutoFit/>
+          </a:bodyPr>
+          <a:lstStyle/>
+          <a:p>
+            <a:r>
+              <a:rPr lang="fr-FR" sz="2400" b="1" dirty="0">
+                <a:solidFill>
+                  <a:schemeClr val="bg1"/>
+                </a:solidFill>
+              </a:rPr>
+              <a:t>Discovery </a:t>
+            </a:r>
+            <a:r>
+              <a:rPr lang="fr-FR" sz="2400" b="1" dirty="0" err="1">
+                <a:solidFill>
+                  <a:schemeClr val="bg1"/>
+                </a:solidFill>
+              </a:rPr>
+              <a:t>Takeaway</a:t>
+            </a:r>
+            <a:r>
+              <a:rPr lang="fr-FR" sz="2400" b="1" dirty="0">
+                <a:solidFill>
+                  <a:schemeClr val="bg1"/>
+                </a:solidFill>
+              </a:rPr>
+              <a:t>:</a:t>
+            </a:r>
+          </a:p>
+          <a:p>
+            <a:r>
+              <a:rPr lang="fr-FR" sz="2400" dirty="0">
+                <a:solidFill>
+                  <a:schemeClr val="bg1"/>
+                </a:solidFill>
+              </a:rPr>
+              <a:t>The network </a:t>
+            </a:r>
+            <a:r>
+              <a:rPr lang="fr-FR" sz="2400" dirty="0" err="1">
+                <a:solidFill>
+                  <a:schemeClr val="bg1"/>
+                </a:solidFill>
+              </a:rPr>
+              <a:t>baseline</a:t>
+            </a:r>
+            <a:r>
+              <a:rPr lang="fr-FR" sz="2400" dirty="0">
+                <a:solidFill>
+                  <a:schemeClr val="bg1"/>
+                </a:solidFill>
+              </a:rPr>
+              <a:t> gave us a suspect (10.8.15.133) and a destination to </a:t>
+            </a:r>
+            <a:r>
+              <a:rPr lang="fr-FR" sz="2400" dirty="0" err="1">
+                <a:solidFill>
+                  <a:schemeClr val="bg1"/>
+                </a:solidFill>
+              </a:rPr>
+              <a:t>watch</a:t>
+            </a:r>
+            <a:r>
+              <a:rPr lang="fr-FR" sz="2400" dirty="0">
+                <a:solidFill>
+                  <a:schemeClr val="bg1"/>
+                </a:solidFill>
+              </a:rPr>
+              <a:t> (72.5.43.29). </a:t>
+            </a:r>
+          </a:p>
+          <a:p>
+            <a:endParaRPr lang="fr-FR" sz="2400" b="1" dirty="0">
+              <a:solidFill>
+                <a:schemeClr val="bg1"/>
+              </a:solidFill>
+            </a:endParaRPr>
+          </a:p>
+        </p:txBody>
+      </p:sp>
+      <p:sp>
+        <p:nvSpPr>
+          <p:cNvPr id="8" name="Google Shape;302;p27">
+            <a:extLst>
+              <a:ext uri="{FF2B5EF4-FFF2-40B4-BE49-F238E27FC236}">
+                <a16:creationId xmlns:a16="http://schemas.microsoft.com/office/drawing/2014/main" id="{3FC523AB-B363-D83D-F0FB-D449D1A63656}"/>
+              </a:ext>
+            </a:extLst>
+          </p:cNvPr>
+          <p:cNvSpPr/>
+          <p:nvPr/>
+        </p:nvSpPr>
+        <p:spPr>
+          <a:xfrm>
+            <a:off x="699759" y="8119753"/>
+            <a:ext cx="45719" cy="1569660"/>
+          </a:xfrm>
+          <a:custGeom>
+            <a:avLst/>
+            <a:gdLst/>
+            <a:ahLst/>
+            <a:cxnLst/>
+            <a:rect l="l" t="t" r="r" b="b"/>
+            <a:pathLst>
+              <a:path w="28575" h="10287000" extrusionOk="0">
+                <a:moveTo>
+                  <a:pt x="0" y="0"/>
+                </a:moveTo>
+                <a:lnTo>
+                  <a:pt x="28574" y="0"/>
+                </a:lnTo>
+                <a:lnTo>
+                  <a:pt x="28574" y="10286999"/>
+                </a:lnTo>
+                <a:lnTo>
+                  <a:pt x="0" y="10286999"/>
+                </a:lnTo>
+                <a:lnTo>
+                  <a:pt x="0" y="0"/>
+                </a:lnTo>
+                <a:close/>
+              </a:path>
+            </a:pathLst>
+          </a:custGeom>
+          <a:solidFill>
+            <a:srgbClr val="FFFFFF"/>
+          </a:solidFill>
+          <a:ln>
+            <a:noFill/>
+          </a:ln>
+        </p:spPr>
+        <p:txBody>
+          <a:bodyPr spcFirstLastPara="1" wrap="square" lIns="0" tIns="0" rIns="0" bIns="0" anchor="t" anchorCtr="0">
+            <a:noAutofit/>
+          </a:bodyPr>
+          <a:lstStyle/>
+          <a:p>
+            <a:pPr marL="0" lvl="0" indent="0" algn="l" rtl="0">
+              <a:spcBef>
+                <a:spcPts val="0"/>
+              </a:spcBef>
+              <a:spcAft>
+                <a:spcPts val="0"/>
+              </a:spcAft>
+              <a:buNone/>
+            </a:pPr>
+            <a:endParaRPr sz="1800"/>
+          </a:p>
+        </p:txBody>
+      </p:sp>
+      <p:sp>
+        <p:nvSpPr>
+          <p:cNvPr id="9" name="Google Shape;302;p27">
+            <a:extLst>
+              <a:ext uri="{FF2B5EF4-FFF2-40B4-BE49-F238E27FC236}">
+                <a16:creationId xmlns:a16="http://schemas.microsoft.com/office/drawing/2014/main" id="{882CE168-2A39-8286-F855-3B95C21CAF88}"/>
+              </a:ext>
+            </a:extLst>
+          </p:cNvPr>
+          <p:cNvSpPr/>
+          <p:nvPr/>
+        </p:nvSpPr>
+        <p:spPr>
+          <a:xfrm rot="5400000">
+            <a:off x="5057176" y="3744732"/>
+            <a:ext cx="45719" cy="8761476"/>
+          </a:xfrm>
+          <a:custGeom>
+            <a:avLst/>
+            <a:gdLst/>
+            <a:ahLst/>
+            <a:cxnLst/>
+            <a:rect l="l" t="t" r="r" b="b"/>
+            <a:pathLst>
+              <a:path w="28575" h="10287000" extrusionOk="0">
+                <a:moveTo>
+                  <a:pt x="0" y="0"/>
+                </a:moveTo>
+                <a:lnTo>
+                  <a:pt x="28574" y="0"/>
+                </a:lnTo>
+                <a:lnTo>
+                  <a:pt x="28574" y="10286999"/>
+                </a:lnTo>
+                <a:lnTo>
+                  <a:pt x="0" y="10286999"/>
+                </a:lnTo>
+                <a:lnTo>
+                  <a:pt x="0" y="0"/>
+                </a:lnTo>
+                <a:close/>
+              </a:path>
+            </a:pathLst>
+          </a:custGeom>
+          <a:solidFill>
+            <a:srgbClr val="FFFFFF"/>
+          </a:solidFill>
+          <a:ln>
+            <a:noFill/>
+          </a:ln>
+        </p:spPr>
+        <p:txBody>
+          <a:bodyPr spcFirstLastPara="1" wrap="square" lIns="0" tIns="0" rIns="0" bIns="0" anchor="t" anchorCtr="0">
+            <a:noAutofit/>
+          </a:bodyPr>
+          <a:lstStyle/>
+          <a:p>
+            <a:pPr marL="0" lvl="0" indent="0" algn="l" rtl="0">
+              <a:spcBef>
+                <a:spcPts val="0"/>
+              </a:spcBef>
+              <a:spcAft>
+                <a:spcPts val="0"/>
+              </a:spcAft>
+              <a:buNone/>
+            </a:pPr>
+            <a:endParaRPr sz="1800"/>
+          </a:p>
+        </p:txBody>
+      </p:sp>
+      <p:sp>
+        <p:nvSpPr>
+          <p:cNvPr id="10" name="Google Shape;302;p27">
+            <a:extLst>
+              <a:ext uri="{FF2B5EF4-FFF2-40B4-BE49-F238E27FC236}">
+                <a16:creationId xmlns:a16="http://schemas.microsoft.com/office/drawing/2014/main" id="{BC86D8A1-A385-265A-DD16-9A739FE0B428}"/>
+              </a:ext>
+            </a:extLst>
+          </p:cNvPr>
+          <p:cNvSpPr/>
+          <p:nvPr/>
+        </p:nvSpPr>
+        <p:spPr>
+          <a:xfrm rot="5400000">
+            <a:off x="5057176" y="5285815"/>
+            <a:ext cx="45719" cy="8761476"/>
+          </a:xfrm>
+          <a:custGeom>
+            <a:avLst/>
+            <a:gdLst/>
+            <a:ahLst/>
+            <a:cxnLst/>
+            <a:rect l="l" t="t" r="r" b="b"/>
+            <a:pathLst>
+              <a:path w="28575" h="10287000" extrusionOk="0">
+                <a:moveTo>
+                  <a:pt x="0" y="0"/>
+                </a:moveTo>
+                <a:lnTo>
+                  <a:pt x="28574" y="0"/>
+                </a:lnTo>
+                <a:lnTo>
+                  <a:pt x="28574" y="10286999"/>
+                </a:lnTo>
+                <a:lnTo>
+                  <a:pt x="0" y="10286999"/>
+                </a:lnTo>
+                <a:lnTo>
+                  <a:pt x="0" y="0"/>
+                </a:lnTo>
+                <a:close/>
+              </a:path>
+            </a:pathLst>
+          </a:custGeom>
+          <a:solidFill>
+            <a:srgbClr val="FFFFFF"/>
+          </a:solidFill>
+          <a:ln>
+            <a:noFill/>
+          </a:ln>
+        </p:spPr>
+        <p:txBody>
+          <a:bodyPr spcFirstLastPara="1" wrap="square" lIns="0" tIns="0" rIns="0" bIns="0" anchor="t" anchorCtr="0">
+            <a:noAutofit/>
+          </a:bodyPr>
+          <a:lstStyle/>
+          <a:p>
+            <a:pPr marL="0" lvl="0" indent="0" algn="l" rtl="0">
+              <a:spcBef>
+                <a:spcPts val="0"/>
+              </a:spcBef>
+              <a:spcAft>
+                <a:spcPts val="0"/>
+              </a:spcAft>
+              <a:buNone/>
+            </a:pPr>
+            <a:endParaRPr sz="1800"/>
+          </a:p>
+        </p:txBody>
+      </p:sp>
+      <p:sp>
+        <p:nvSpPr>
+          <p:cNvPr id="12" name="Google Shape;302;p27">
+            <a:extLst>
+              <a:ext uri="{FF2B5EF4-FFF2-40B4-BE49-F238E27FC236}">
+                <a16:creationId xmlns:a16="http://schemas.microsoft.com/office/drawing/2014/main" id="{605208DA-2477-DFDE-646B-59A25A5FA356}"/>
+              </a:ext>
+            </a:extLst>
+          </p:cNvPr>
+          <p:cNvSpPr/>
+          <p:nvPr/>
+        </p:nvSpPr>
+        <p:spPr>
+          <a:xfrm>
+            <a:off x="9415055" y="8111182"/>
+            <a:ext cx="45719" cy="1569660"/>
+          </a:xfrm>
+          <a:custGeom>
+            <a:avLst/>
+            <a:gdLst/>
+            <a:ahLst/>
+            <a:cxnLst/>
+            <a:rect l="l" t="t" r="r" b="b"/>
+            <a:pathLst>
+              <a:path w="28575" h="10287000" extrusionOk="0">
+                <a:moveTo>
+                  <a:pt x="0" y="0"/>
+                </a:moveTo>
+                <a:lnTo>
+                  <a:pt x="28574" y="0"/>
+                </a:lnTo>
+                <a:lnTo>
+                  <a:pt x="28574" y="10286999"/>
+                </a:lnTo>
+                <a:lnTo>
+                  <a:pt x="0" y="10286999"/>
+                </a:lnTo>
+                <a:lnTo>
+                  <a:pt x="0" y="0"/>
+                </a:lnTo>
+                <a:close/>
+              </a:path>
+            </a:pathLst>
+          </a:custGeom>
+          <a:solidFill>
+            <a:srgbClr val="FFFFFF"/>
+          </a:solidFill>
+          <a:ln>
+            <a:noFill/>
+          </a:ln>
+        </p:spPr>
+        <p:txBody>
+          <a:bodyPr spcFirstLastPara="1" wrap="square" lIns="0" tIns="0" rIns="0" bIns="0" anchor="t" anchorCtr="0">
+            <a:noAutofit/>
+          </a:bodyPr>
+          <a:lstStyle/>
+          <a:p>
+            <a:pPr marL="0" lvl="0" indent="0" algn="l" rtl="0">
+              <a:spcBef>
+                <a:spcPts val="0"/>
+              </a:spcBef>
+              <a:spcAft>
+                <a:spcPts val="0"/>
+              </a:spcAft>
+              <a:buNone/>
+            </a:pPr>
+            <a:endParaRPr sz="1800"/>
+          </a:p>
+        </p:txBody>
+      </p:sp>
     </p:spTree>
   </p:cSld>
   <p:clrMapOvr>
@@ -18531,7 +19382,7 @@
   <p:cSld>
     <p:spTree>
       <p:nvGrpSpPr>
-        <p:cNvPr id="1" name="Shape 108"/>
+        <p:cNvPr id="1" name="Shape 136"/>
         <p:cNvGrpSpPr/>
         <p:nvPr/>
       </p:nvGrpSpPr>
@@ -18545,7 +19396,1433 @@
       </p:grpSpPr>
       <p:pic>
         <p:nvPicPr>
-          <p:cNvPr id="109" name="Google Shape;109;p8"/>
+          <p:cNvPr id="20" name="Google Shape;292;p26">
+            <a:extLst>
+              <a:ext uri="{FF2B5EF4-FFF2-40B4-BE49-F238E27FC236}">
+                <a16:creationId xmlns:a16="http://schemas.microsoft.com/office/drawing/2014/main" id="{3E438CE3-5E97-E607-B14F-E882BC57EBC5}"/>
+              </a:ext>
+            </a:extLst>
+          </p:cNvPr>
+          <p:cNvPicPr preferRelativeResize="0"/>
+          <p:nvPr/>
+        </p:nvPicPr>
+        <p:blipFill rotWithShape="1">
+          <a:blip r:embed="rId3">
+            <a:alphaModFix/>
+          </a:blip>
+          <a:srcRect/>
+          <a:stretch/>
+        </p:blipFill>
+        <p:spPr>
+          <a:xfrm>
+            <a:off x="3818404" y="5539803"/>
+            <a:ext cx="6655824" cy="655357"/>
+          </a:xfrm>
+          <a:prstGeom prst="rect">
+            <a:avLst/>
+          </a:prstGeom>
+          <a:noFill/>
+          <a:ln>
+            <a:noFill/>
+          </a:ln>
+        </p:spPr>
+      </p:pic>
+      <p:pic>
+        <p:nvPicPr>
+          <p:cNvPr id="18" name="Google Shape;292;p26">
+            <a:extLst>
+              <a:ext uri="{FF2B5EF4-FFF2-40B4-BE49-F238E27FC236}">
+                <a16:creationId xmlns:a16="http://schemas.microsoft.com/office/drawing/2014/main" id="{13C25572-2AC1-7CC3-E1A3-93FBEBF43120}"/>
+              </a:ext>
+            </a:extLst>
+          </p:cNvPr>
+          <p:cNvPicPr preferRelativeResize="0"/>
+          <p:nvPr/>
+        </p:nvPicPr>
+        <p:blipFill rotWithShape="1">
+          <a:blip r:embed="rId3">
+            <a:alphaModFix/>
+          </a:blip>
+          <a:srcRect/>
+          <a:stretch/>
+        </p:blipFill>
+        <p:spPr>
+          <a:xfrm>
+            <a:off x="6239951" y="1296066"/>
+            <a:ext cx="4861471" cy="655357"/>
+          </a:xfrm>
+          <a:prstGeom prst="rect">
+            <a:avLst/>
+          </a:prstGeom>
+          <a:noFill/>
+          <a:ln>
+            <a:noFill/>
+          </a:ln>
+        </p:spPr>
+      </p:pic>
+      <p:pic>
+        <p:nvPicPr>
+          <p:cNvPr id="137" name="Google Shape;137;p11"/>
+          <p:cNvPicPr preferRelativeResize="0"/>
+          <p:nvPr/>
+        </p:nvPicPr>
+        <p:blipFill rotWithShape="1">
+          <a:blip r:embed="rId4">
+            <a:alphaModFix/>
+          </a:blip>
+          <a:srcRect/>
+          <a:stretch/>
+        </p:blipFill>
+        <p:spPr>
+          <a:xfrm>
+            <a:off x="0" y="0"/>
+            <a:ext cx="146399" cy="10286999"/>
+          </a:xfrm>
+          <a:prstGeom prst="rect">
+            <a:avLst/>
+          </a:prstGeom>
+          <a:noFill/>
+          <a:ln>
+            <a:noFill/>
+          </a:ln>
+        </p:spPr>
+      </p:pic>
+      <p:sp>
+        <p:nvSpPr>
+          <p:cNvPr id="138" name="Google Shape;138;p11"/>
+          <p:cNvSpPr txBox="1">
+            <a:spLocks noGrp="1"/>
+          </p:cNvSpPr>
+          <p:nvPr>
+            <p:ph type="title"/>
+          </p:nvPr>
+        </p:nvSpPr>
+        <p:spPr>
+          <a:xfrm>
+            <a:off x="3522132" y="-497437"/>
+            <a:ext cx="13435303" cy="3380216"/>
+          </a:xfrm>
+          <a:prstGeom prst="rect">
+            <a:avLst/>
+          </a:prstGeom>
+          <a:noFill/>
+          <a:ln>
+            <a:noFill/>
+          </a:ln>
+        </p:spPr>
+        <p:txBody>
+          <a:bodyPr spcFirstLastPara="1" wrap="square" lIns="0" tIns="128900" rIns="0" bIns="0" anchor="t" anchorCtr="0">
+            <a:spAutoFit/>
+          </a:bodyPr>
+          <a:lstStyle/>
+          <a:p>
+            <a:pPr marL="12700" marR="5080">
+              <a:lnSpc>
+                <a:spcPct val="95625"/>
+              </a:lnSpc>
+            </a:pPr>
+            <a:br>
+              <a:rPr lang="en-US" sz="4800" dirty="0"/>
+            </a:br>
+            <a:r>
+              <a:rPr lang="en-US" sz="4800" dirty="0"/>
+              <a:t>From Reconnaissance To Detection</a:t>
+            </a:r>
+            <a:br>
+              <a:rPr lang="en-US" dirty="0"/>
+            </a:br>
+            <a:br>
+              <a:rPr lang="fr-FR" sz="4800" dirty="0"/>
+            </a:br>
+            <a:br>
+              <a:rPr lang="fr-FR" sz="4800" dirty="0"/>
+            </a:br>
+            <a:endParaRPr sz="2800" b="0" dirty="0">
+              <a:latin typeface="Verdana"/>
+              <a:ea typeface="Verdana"/>
+              <a:cs typeface="Verdana"/>
+              <a:sym typeface="Verdana"/>
+            </a:endParaRPr>
+          </a:p>
+        </p:txBody>
+      </p:sp>
+      <p:sp>
+        <p:nvSpPr>
+          <p:cNvPr id="6" name="ZoneTexte 5">
+            <a:extLst>
+              <a:ext uri="{FF2B5EF4-FFF2-40B4-BE49-F238E27FC236}">
+                <a16:creationId xmlns:a16="http://schemas.microsoft.com/office/drawing/2014/main" id="{64408448-94D3-370F-DF43-AAAC43EC44AB}"/>
+              </a:ext>
+            </a:extLst>
+          </p:cNvPr>
+          <p:cNvSpPr txBox="1"/>
+          <p:nvPr/>
+        </p:nvSpPr>
+        <p:spPr>
+          <a:xfrm>
+            <a:off x="6239951" y="1298823"/>
+            <a:ext cx="5167245" cy="592751"/>
+          </a:xfrm>
+          <a:prstGeom prst="rect">
+            <a:avLst/>
+          </a:prstGeom>
+          <a:noFill/>
+        </p:spPr>
+        <p:txBody>
+          <a:bodyPr wrap="square">
+            <a:spAutoFit/>
+          </a:bodyPr>
+          <a:lstStyle/>
+          <a:p>
+            <a:r>
+              <a:rPr lang="en-GB" sz="3200" dirty="0">
+                <a:solidFill>
+                  <a:schemeClr val="bg1"/>
+                </a:solidFill>
+                <a:latin typeface="Verdana" panose="020B0604030504040204" pitchFamily="34" charset="0"/>
+                <a:ea typeface="Verdana" panose="020B0604030504040204" pitchFamily="34" charset="0"/>
+              </a:rPr>
+              <a:t>T</a:t>
+            </a:r>
+            <a:r>
+              <a:rPr lang="fr-FR" sz="3200" dirty="0" err="1">
+                <a:solidFill>
+                  <a:schemeClr val="bg1"/>
+                </a:solidFill>
+                <a:latin typeface="Verdana" panose="020B0604030504040204" pitchFamily="34" charset="0"/>
+                <a:ea typeface="Verdana" panose="020B0604030504040204" pitchFamily="34" charset="0"/>
+              </a:rPr>
+              <a:t>he</a:t>
+            </a:r>
+            <a:r>
+              <a:rPr lang="fr-FR" sz="3200" dirty="0">
+                <a:solidFill>
+                  <a:schemeClr val="bg1"/>
+                </a:solidFill>
+                <a:latin typeface="Verdana" panose="020B0604030504040204" pitchFamily="34" charset="0"/>
+                <a:ea typeface="Verdana" panose="020B0604030504040204" pitchFamily="34" charset="0"/>
+              </a:rPr>
+              <a:t> investigation flow</a:t>
+            </a:r>
+          </a:p>
+        </p:txBody>
+      </p:sp>
+      <p:cxnSp>
+        <p:nvCxnSpPr>
+          <p:cNvPr id="8" name="Connecteur droit avec flèche 7">
+            <a:extLst>
+              <a:ext uri="{FF2B5EF4-FFF2-40B4-BE49-F238E27FC236}">
+                <a16:creationId xmlns:a16="http://schemas.microsoft.com/office/drawing/2014/main" id="{CC10D863-F27F-BDAA-0FFF-107AF0831649}"/>
+              </a:ext>
+            </a:extLst>
+          </p:cNvPr>
+          <p:cNvCxnSpPr>
+            <a:cxnSpLocks/>
+          </p:cNvCxnSpPr>
+          <p:nvPr/>
+        </p:nvCxnSpPr>
+        <p:spPr>
+          <a:xfrm>
+            <a:off x="3642215" y="3110449"/>
+            <a:ext cx="880799" cy="0"/>
+          </a:xfrm>
+          <a:prstGeom prst="straightConnector1">
+            <a:avLst/>
+          </a:prstGeom>
+          <a:ln>
+            <a:solidFill>
+              <a:schemeClr val="bg1"/>
+            </a:solidFill>
+            <a:headEnd type="none" w="med" len="med"/>
+            <a:tailEnd type="arrow" w="med" len="med"/>
+          </a:ln>
+        </p:spPr>
+        <p:style>
+          <a:lnRef idx="3">
+            <a:schemeClr val="dk1"/>
+          </a:lnRef>
+          <a:fillRef idx="0">
+            <a:schemeClr val="dk1"/>
+          </a:fillRef>
+          <a:effectRef idx="2">
+            <a:schemeClr val="dk1"/>
+          </a:effectRef>
+          <a:fontRef idx="minor">
+            <a:schemeClr val="tx1"/>
+          </a:fontRef>
+        </p:style>
+      </p:cxnSp>
+      <p:cxnSp>
+        <p:nvCxnSpPr>
+          <p:cNvPr id="9" name="Connecteur droit avec flèche 8">
+            <a:extLst>
+              <a:ext uri="{FF2B5EF4-FFF2-40B4-BE49-F238E27FC236}">
+                <a16:creationId xmlns:a16="http://schemas.microsoft.com/office/drawing/2014/main" id="{C60D8E00-91FF-E138-C3DA-86DD5356CD75}"/>
+              </a:ext>
+            </a:extLst>
+          </p:cNvPr>
+          <p:cNvCxnSpPr>
+            <a:cxnSpLocks/>
+          </p:cNvCxnSpPr>
+          <p:nvPr/>
+        </p:nvCxnSpPr>
+        <p:spPr>
+          <a:xfrm>
+            <a:off x="7723415" y="3143450"/>
+            <a:ext cx="716719" cy="0"/>
+          </a:xfrm>
+          <a:prstGeom prst="straightConnector1">
+            <a:avLst/>
+          </a:prstGeom>
+          <a:ln>
+            <a:solidFill>
+              <a:schemeClr val="bg1"/>
+            </a:solidFill>
+            <a:headEnd type="none" w="med" len="med"/>
+            <a:tailEnd type="arrow" w="med" len="med"/>
+          </a:ln>
+        </p:spPr>
+        <p:style>
+          <a:lnRef idx="3">
+            <a:schemeClr val="dk1"/>
+          </a:lnRef>
+          <a:fillRef idx="0">
+            <a:schemeClr val="dk1"/>
+          </a:fillRef>
+          <a:effectRef idx="2">
+            <a:schemeClr val="dk1"/>
+          </a:effectRef>
+          <a:fontRef idx="minor">
+            <a:schemeClr val="tx1"/>
+          </a:fontRef>
+        </p:style>
+      </p:cxnSp>
+      <p:sp>
+        <p:nvSpPr>
+          <p:cNvPr id="10" name="Rectangle : coins arrondis 9">
+            <a:extLst>
+              <a:ext uri="{FF2B5EF4-FFF2-40B4-BE49-F238E27FC236}">
+                <a16:creationId xmlns:a16="http://schemas.microsoft.com/office/drawing/2014/main" id="{3BB8D2ED-5390-210E-53B7-926DE1D8F89D}"/>
+              </a:ext>
+            </a:extLst>
+          </p:cNvPr>
+          <p:cNvSpPr/>
+          <p:nvPr/>
+        </p:nvSpPr>
+        <p:spPr>
+          <a:xfrm>
+            <a:off x="630223" y="2309060"/>
+            <a:ext cx="3011992" cy="1962006"/>
+          </a:xfrm>
+          <a:prstGeom prst="roundRect">
+            <a:avLst/>
+          </a:prstGeom>
+          <a:noFill/>
+          <a:ln w="38100" cap="flat" cmpd="sng" algn="ctr">
+            <a:solidFill>
+              <a:schemeClr val="accent6"/>
+            </a:solidFill>
+            <a:prstDash val="solid"/>
+            <a:round/>
+            <a:headEnd type="none" w="med" len="med"/>
+            <a:tailEnd type="none" w="med" len="med"/>
+          </a:ln>
+        </p:spPr>
+        <p:style>
+          <a:lnRef idx="0">
+            <a:scrgbClr r="0" g="0" b="0"/>
+          </a:lnRef>
+          <a:fillRef idx="0">
+            <a:scrgbClr r="0" g="0" b="0"/>
+          </a:fillRef>
+          <a:effectRef idx="0">
+            <a:scrgbClr r="0" g="0" b="0"/>
+          </a:effectRef>
+          <a:fontRef idx="minor">
+            <a:schemeClr val="accent6"/>
+          </a:fontRef>
+        </p:style>
+        <p:txBody>
+          <a:bodyPr rtlCol="0" anchor="ctr"/>
+          <a:lstStyle/>
+          <a:p>
+            <a:pPr algn="ctr"/>
+            <a:endParaRPr lang="fr-FR"/>
+          </a:p>
+        </p:txBody>
+      </p:sp>
+      <p:sp>
+        <p:nvSpPr>
+          <p:cNvPr id="15" name="ZoneTexte 14">
+            <a:extLst>
+              <a:ext uri="{FF2B5EF4-FFF2-40B4-BE49-F238E27FC236}">
+                <a16:creationId xmlns:a16="http://schemas.microsoft.com/office/drawing/2014/main" id="{C56CC339-488D-DB08-16BE-E3048CA0ECE4}"/>
+              </a:ext>
+            </a:extLst>
+          </p:cNvPr>
+          <p:cNvSpPr txBox="1"/>
+          <p:nvPr/>
+        </p:nvSpPr>
+        <p:spPr>
+          <a:xfrm>
+            <a:off x="726021" y="2514806"/>
+            <a:ext cx="4133611" cy="2123658"/>
+          </a:xfrm>
+          <a:prstGeom prst="rect">
+            <a:avLst/>
+          </a:prstGeom>
+          <a:noFill/>
+        </p:spPr>
+        <p:txBody>
+          <a:bodyPr wrap="square">
+            <a:spAutoFit/>
+          </a:bodyPr>
+          <a:lstStyle/>
+          <a:p>
+            <a:r>
+              <a:rPr lang="fr-FR" sz="2400" dirty="0" err="1">
+                <a:solidFill>
+                  <a:schemeClr val="bg1"/>
+                </a:solidFill>
+                <a:latin typeface="Verdana" panose="020B0604030504040204" pitchFamily="34" charset="0"/>
+                <a:ea typeface="Verdana" panose="020B0604030504040204" pitchFamily="34" charset="0"/>
+              </a:rPr>
+              <a:t>Step</a:t>
+            </a:r>
+            <a:r>
+              <a:rPr lang="fr-FR" sz="2400" dirty="0">
+                <a:solidFill>
+                  <a:schemeClr val="bg1"/>
+                </a:solidFill>
+                <a:latin typeface="Verdana" panose="020B0604030504040204" pitchFamily="34" charset="0"/>
+                <a:ea typeface="Verdana" panose="020B0604030504040204" pitchFamily="34" charset="0"/>
+              </a:rPr>
+              <a:t> 1</a:t>
+            </a:r>
+            <a:r>
+              <a:rPr lang="fr-FR" sz="2000" dirty="0">
+                <a:solidFill>
+                  <a:schemeClr val="bg1"/>
+                </a:solidFill>
+                <a:latin typeface="Verdana" panose="020B0604030504040204" pitchFamily="34" charset="0"/>
+                <a:ea typeface="Verdana" panose="020B0604030504040204" pitchFamily="34" charset="0"/>
+              </a:rPr>
+              <a:t>:</a:t>
+            </a:r>
+          </a:p>
+          <a:p>
+            <a:endParaRPr lang="fr-FR" sz="2000" dirty="0">
+              <a:solidFill>
+                <a:schemeClr val="bg1"/>
+              </a:solidFill>
+              <a:latin typeface="Verdana" panose="020B0604030504040204" pitchFamily="34" charset="0"/>
+              <a:ea typeface="Verdana" panose="020B0604030504040204" pitchFamily="34" charset="0"/>
+            </a:endParaRPr>
+          </a:p>
+          <a:p>
+            <a:r>
+              <a:rPr lang="fr-FR" sz="2400" dirty="0" err="1">
+                <a:solidFill>
+                  <a:schemeClr val="bg1"/>
+                </a:solidFill>
+                <a:latin typeface="Verdana" panose="020B0604030504040204" pitchFamily="34" charset="0"/>
+                <a:ea typeface="Verdana" panose="020B0604030504040204" pitchFamily="34" charset="0"/>
+              </a:rPr>
+              <a:t>Found</a:t>
+            </a:r>
+            <a:r>
+              <a:rPr lang="fr-FR" sz="2400" dirty="0">
+                <a:solidFill>
+                  <a:schemeClr val="bg1"/>
+                </a:solidFill>
+                <a:latin typeface="Verdana" panose="020B0604030504040204" pitchFamily="34" charset="0"/>
+                <a:ea typeface="Verdana" panose="020B0604030504040204" pitchFamily="34" charset="0"/>
+              </a:rPr>
+              <a:t> Noisy Host</a:t>
+            </a:r>
+          </a:p>
+          <a:p>
+            <a:r>
+              <a:rPr lang="fr-FR" sz="2400" dirty="0">
+                <a:solidFill>
+                  <a:schemeClr val="bg1"/>
+                </a:solidFill>
+                <a:latin typeface="Verdana" panose="020B0604030504040204" pitchFamily="34" charset="0"/>
+                <a:ea typeface="Verdana" panose="020B0604030504040204" pitchFamily="34" charset="0"/>
+              </a:rPr>
+              <a:t>10.8.15.133 </a:t>
+            </a:r>
+          </a:p>
+          <a:p>
+            <a:endParaRPr lang="fr-FR" sz="2000" dirty="0">
+              <a:solidFill>
+                <a:schemeClr val="bg1"/>
+              </a:solidFill>
+            </a:endParaRPr>
+          </a:p>
+          <a:p>
+            <a:r>
+              <a:rPr lang="fr-FR" sz="2000" dirty="0"/>
+              <a:t>:</a:t>
+            </a:r>
+          </a:p>
+        </p:txBody>
+      </p:sp>
+      <p:sp>
+        <p:nvSpPr>
+          <p:cNvPr id="16" name="Rectangle : coins arrondis 15">
+            <a:extLst>
+              <a:ext uri="{FF2B5EF4-FFF2-40B4-BE49-F238E27FC236}">
+                <a16:creationId xmlns:a16="http://schemas.microsoft.com/office/drawing/2014/main" id="{7D3AD0FB-32F0-C8C5-100E-8D154FE2A74E}"/>
+              </a:ext>
+            </a:extLst>
+          </p:cNvPr>
+          <p:cNvSpPr/>
+          <p:nvPr/>
+        </p:nvSpPr>
+        <p:spPr>
+          <a:xfrm>
+            <a:off x="4525912" y="2322030"/>
+            <a:ext cx="3197503" cy="1953985"/>
+          </a:xfrm>
+          <a:prstGeom prst="roundRect">
+            <a:avLst/>
+          </a:prstGeom>
+          <a:noFill/>
+          <a:ln w="38100" cap="flat" cmpd="sng" algn="ctr">
+            <a:solidFill>
+              <a:schemeClr val="accent6"/>
+            </a:solidFill>
+            <a:prstDash val="solid"/>
+            <a:round/>
+            <a:headEnd type="none" w="med" len="med"/>
+            <a:tailEnd type="none" w="med" len="med"/>
+          </a:ln>
+        </p:spPr>
+        <p:style>
+          <a:lnRef idx="0">
+            <a:scrgbClr r="0" g="0" b="0"/>
+          </a:lnRef>
+          <a:fillRef idx="0">
+            <a:scrgbClr r="0" g="0" b="0"/>
+          </a:fillRef>
+          <a:effectRef idx="0">
+            <a:scrgbClr r="0" g="0" b="0"/>
+          </a:effectRef>
+          <a:fontRef idx="minor">
+            <a:schemeClr val="accent6"/>
+          </a:fontRef>
+        </p:style>
+        <p:txBody>
+          <a:bodyPr rtlCol="0" anchor="ctr"/>
+          <a:lstStyle/>
+          <a:p>
+            <a:r>
+              <a:rPr lang="fr-FR" sz="2400" dirty="0" err="1">
+                <a:solidFill>
+                  <a:schemeClr val="bg1"/>
+                </a:solidFill>
+                <a:latin typeface="Verdana" panose="020B0604030504040204" pitchFamily="34" charset="0"/>
+                <a:ea typeface="Verdana" panose="020B0604030504040204" pitchFamily="34" charset="0"/>
+              </a:rPr>
+              <a:t>Step</a:t>
+            </a:r>
+            <a:r>
+              <a:rPr lang="fr-FR" sz="2400" dirty="0">
+                <a:solidFill>
+                  <a:schemeClr val="bg1"/>
+                </a:solidFill>
+                <a:latin typeface="Verdana" panose="020B0604030504040204" pitchFamily="34" charset="0"/>
+                <a:ea typeface="Verdana" panose="020B0604030504040204" pitchFamily="34" charset="0"/>
+              </a:rPr>
+              <a:t> 2:</a:t>
+            </a:r>
+          </a:p>
+          <a:p>
+            <a:endParaRPr lang="fr-FR" sz="2400" dirty="0">
+              <a:solidFill>
+                <a:schemeClr val="bg1"/>
+              </a:solidFill>
+              <a:latin typeface="Verdana" panose="020B0604030504040204" pitchFamily="34" charset="0"/>
+              <a:ea typeface="Verdana" panose="020B0604030504040204" pitchFamily="34" charset="0"/>
+            </a:endParaRPr>
+          </a:p>
+          <a:p>
+            <a:r>
+              <a:rPr lang="fr-FR" sz="2400" dirty="0" err="1">
+                <a:solidFill>
+                  <a:schemeClr val="bg1"/>
+                </a:solidFill>
+                <a:latin typeface="Verdana" panose="020B0604030504040204" pitchFamily="34" charset="0"/>
+                <a:ea typeface="Verdana" panose="020B0604030504040204" pitchFamily="34" charset="0"/>
+              </a:rPr>
+              <a:t>Traced</a:t>
+            </a:r>
+            <a:r>
+              <a:rPr lang="fr-FR" sz="2400" dirty="0">
+                <a:solidFill>
+                  <a:schemeClr val="bg1"/>
+                </a:solidFill>
+                <a:latin typeface="Verdana" panose="020B0604030504040204" pitchFamily="34" charset="0"/>
+                <a:ea typeface="Verdana" panose="020B0604030504040204" pitchFamily="34" charset="0"/>
+              </a:rPr>
+              <a:t> </a:t>
+            </a:r>
+            <a:r>
+              <a:rPr lang="fr-FR" sz="2400" dirty="0" err="1">
+                <a:solidFill>
+                  <a:schemeClr val="bg1"/>
+                </a:solidFill>
+                <a:latin typeface="Verdana" panose="020B0604030504040204" pitchFamily="34" charset="0"/>
+                <a:ea typeface="Verdana" panose="020B0604030504040204" pitchFamily="34" charset="0"/>
+              </a:rPr>
+              <a:t>its</a:t>
+            </a:r>
+            <a:r>
+              <a:rPr lang="fr-FR" sz="2400" dirty="0">
+                <a:solidFill>
+                  <a:schemeClr val="bg1"/>
+                </a:solidFill>
+                <a:latin typeface="Verdana" panose="020B0604030504040204" pitchFamily="34" charset="0"/>
+                <a:ea typeface="Verdana" panose="020B0604030504040204" pitchFamily="34" charset="0"/>
+              </a:rPr>
+              <a:t> </a:t>
+            </a:r>
+            <a:r>
+              <a:rPr lang="fr-FR" sz="2400" dirty="0" err="1">
+                <a:solidFill>
+                  <a:schemeClr val="bg1"/>
+                </a:solidFill>
+                <a:latin typeface="Verdana" panose="020B0604030504040204" pitchFamily="34" charset="0"/>
+                <a:ea typeface="Verdana" panose="020B0604030504040204" pitchFamily="34" charset="0"/>
+              </a:rPr>
+              <a:t>traffic</a:t>
+            </a:r>
+            <a:endParaRPr lang="fr-FR" sz="2400" dirty="0">
+              <a:solidFill>
+                <a:schemeClr val="bg1"/>
+              </a:solidFill>
+              <a:latin typeface="Verdana" panose="020B0604030504040204" pitchFamily="34" charset="0"/>
+              <a:ea typeface="Verdana" panose="020B0604030504040204" pitchFamily="34" charset="0"/>
+            </a:endParaRPr>
+          </a:p>
+          <a:p>
+            <a:r>
+              <a:rPr lang="fr-FR" sz="2400" dirty="0">
+                <a:solidFill>
+                  <a:schemeClr val="bg1"/>
+                </a:solidFill>
+              </a:rPr>
+              <a:t>to 72.5.43.29</a:t>
+            </a:r>
+          </a:p>
+          <a:p>
+            <a:endParaRPr lang="fr-FR" dirty="0">
+              <a:solidFill>
+                <a:schemeClr val="bg1"/>
+              </a:solidFill>
+              <a:latin typeface="Verdana" panose="020B0604030504040204" pitchFamily="34" charset="0"/>
+              <a:ea typeface="Verdana" panose="020B0604030504040204" pitchFamily="34" charset="0"/>
+            </a:endParaRPr>
+          </a:p>
+        </p:txBody>
+      </p:sp>
+      <p:sp>
+        <p:nvSpPr>
+          <p:cNvPr id="17" name="Rectangle : coins arrondis 16">
+            <a:extLst>
+              <a:ext uri="{FF2B5EF4-FFF2-40B4-BE49-F238E27FC236}">
+                <a16:creationId xmlns:a16="http://schemas.microsoft.com/office/drawing/2014/main" id="{B25730DC-4C1E-4499-FCD3-8546B218D871}"/>
+              </a:ext>
+            </a:extLst>
+          </p:cNvPr>
+          <p:cNvSpPr/>
+          <p:nvPr/>
+        </p:nvSpPr>
+        <p:spPr>
+          <a:xfrm>
+            <a:off x="8468711" y="2338368"/>
+            <a:ext cx="2938485" cy="1953985"/>
+          </a:xfrm>
+          <a:prstGeom prst="roundRect">
+            <a:avLst/>
+          </a:prstGeom>
+          <a:noFill/>
+          <a:ln w="38100" cap="flat" cmpd="sng" algn="ctr">
+            <a:solidFill>
+              <a:schemeClr val="accent6"/>
+            </a:solidFill>
+            <a:prstDash val="solid"/>
+            <a:round/>
+            <a:headEnd type="none" w="med" len="med"/>
+            <a:tailEnd type="none" w="med" len="med"/>
+          </a:ln>
+        </p:spPr>
+        <p:style>
+          <a:lnRef idx="0">
+            <a:scrgbClr r="0" g="0" b="0"/>
+          </a:lnRef>
+          <a:fillRef idx="0">
+            <a:scrgbClr r="0" g="0" b="0"/>
+          </a:fillRef>
+          <a:effectRef idx="0">
+            <a:scrgbClr r="0" g="0" b="0"/>
+          </a:effectRef>
+          <a:fontRef idx="minor">
+            <a:schemeClr val="accent6"/>
+          </a:fontRef>
+        </p:style>
+        <p:txBody>
+          <a:bodyPr rtlCol="0" anchor="ctr"/>
+          <a:lstStyle/>
+          <a:p>
+            <a:r>
+              <a:rPr lang="fr-FR" sz="2400" dirty="0" err="1">
+                <a:solidFill>
+                  <a:schemeClr val="bg1"/>
+                </a:solidFill>
+                <a:latin typeface="Verdana" panose="020B0604030504040204" pitchFamily="34" charset="0"/>
+                <a:ea typeface="Verdana" panose="020B0604030504040204" pitchFamily="34" charset="0"/>
+              </a:rPr>
+              <a:t>Step</a:t>
+            </a:r>
+            <a:r>
+              <a:rPr lang="fr-FR" sz="2400" dirty="0">
+                <a:solidFill>
+                  <a:schemeClr val="bg1"/>
+                </a:solidFill>
+                <a:latin typeface="Verdana" panose="020B0604030504040204" pitchFamily="34" charset="0"/>
+                <a:ea typeface="Verdana" panose="020B0604030504040204" pitchFamily="34" charset="0"/>
+              </a:rPr>
+              <a:t> 3:</a:t>
+            </a:r>
+          </a:p>
+          <a:p>
+            <a:r>
+              <a:rPr lang="fr-FR" sz="2400" dirty="0" err="1">
+                <a:solidFill>
+                  <a:schemeClr val="bg1"/>
+                </a:solidFill>
+              </a:rPr>
+              <a:t>Analyzed</a:t>
+            </a:r>
+            <a:r>
+              <a:rPr lang="fr-FR" sz="2400" dirty="0">
+                <a:solidFill>
+                  <a:schemeClr val="bg1"/>
+                </a:solidFill>
+              </a:rPr>
+              <a:t> </a:t>
+            </a:r>
+            <a:r>
+              <a:rPr lang="fr-FR" sz="2400" dirty="0" err="1">
+                <a:solidFill>
+                  <a:schemeClr val="bg1"/>
+                </a:solidFill>
+              </a:rPr>
+              <a:t>traffic</a:t>
+            </a:r>
+            <a:endParaRPr lang="fr-FR" sz="2400" dirty="0">
+              <a:solidFill>
+                <a:schemeClr val="bg1"/>
+              </a:solidFill>
+            </a:endParaRPr>
+          </a:p>
+          <a:p>
+            <a:r>
+              <a:rPr lang="fr-FR" sz="2400" dirty="0">
+                <a:solidFill>
+                  <a:schemeClr val="bg1"/>
+                </a:solidFill>
+              </a:rPr>
+              <a:t>Malware, </a:t>
+            </a:r>
+            <a:r>
+              <a:rPr lang="fr-FR" sz="2400" dirty="0" err="1">
+                <a:solidFill>
+                  <a:schemeClr val="bg1"/>
+                </a:solidFill>
+              </a:rPr>
+              <a:t>Attacker</a:t>
+            </a:r>
+            <a:r>
+              <a:rPr lang="fr-FR" sz="2400" dirty="0">
+                <a:solidFill>
+                  <a:schemeClr val="bg1"/>
+                </a:solidFill>
+              </a:rPr>
+              <a:t> servers, and Exfiltration</a:t>
+            </a:r>
+          </a:p>
+        </p:txBody>
+      </p:sp>
+      <p:sp>
+        <p:nvSpPr>
+          <p:cNvPr id="19" name="ZoneTexte 18">
+            <a:extLst>
+              <a:ext uri="{FF2B5EF4-FFF2-40B4-BE49-F238E27FC236}">
+                <a16:creationId xmlns:a16="http://schemas.microsoft.com/office/drawing/2014/main" id="{192390D1-52AC-0E85-73D7-01EE37E3FF1D}"/>
+              </a:ext>
+            </a:extLst>
+          </p:cNvPr>
+          <p:cNvSpPr txBox="1"/>
+          <p:nvPr/>
+        </p:nvSpPr>
+        <p:spPr>
+          <a:xfrm>
+            <a:off x="3818404" y="5546340"/>
+            <a:ext cx="6859488" cy="584775"/>
+          </a:xfrm>
+          <a:prstGeom prst="rect">
+            <a:avLst/>
+          </a:prstGeom>
+          <a:noFill/>
+        </p:spPr>
+        <p:txBody>
+          <a:bodyPr wrap="square">
+            <a:spAutoFit/>
+          </a:bodyPr>
+          <a:lstStyle/>
+          <a:p>
+            <a:r>
+              <a:rPr lang="en-GB" sz="3200" dirty="0">
+                <a:solidFill>
+                  <a:schemeClr val="bg1"/>
+                </a:solidFill>
+                <a:latin typeface="Verdana" panose="020B0604030504040204" pitchFamily="34" charset="0"/>
+                <a:ea typeface="Verdana" panose="020B0604030504040204" pitchFamily="34" charset="0"/>
+              </a:rPr>
+              <a:t>What the investigation revealed</a:t>
+            </a:r>
+            <a:endParaRPr lang="fr-FR" sz="3200" dirty="0">
+              <a:solidFill>
+                <a:schemeClr val="bg1"/>
+              </a:solidFill>
+              <a:latin typeface="Verdana" panose="020B0604030504040204" pitchFamily="34" charset="0"/>
+              <a:ea typeface="Verdana" panose="020B0604030504040204" pitchFamily="34" charset="0"/>
+            </a:endParaRPr>
+          </a:p>
+        </p:txBody>
+      </p:sp>
+      <p:pic>
+        <p:nvPicPr>
+          <p:cNvPr id="22" name="Image 21">
+            <a:extLst>
+              <a:ext uri="{FF2B5EF4-FFF2-40B4-BE49-F238E27FC236}">
+                <a16:creationId xmlns:a16="http://schemas.microsoft.com/office/drawing/2014/main" id="{733063D8-4CA6-8287-FEA5-7970DB8E5FD5}"/>
+              </a:ext>
+            </a:extLst>
+          </p:cNvPr>
+          <p:cNvPicPr>
+            <a:picLocks noChangeAspect="1"/>
+          </p:cNvPicPr>
+          <p:nvPr/>
+        </p:nvPicPr>
+        <p:blipFill>
+          <a:blip r:embed="rId5"/>
+          <a:stretch>
+            <a:fillRect/>
+          </a:stretch>
+        </p:blipFill>
+        <p:spPr>
+          <a:xfrm>
+            <a:off x="4310743" y="6628366"/>
+            <a:ext cx="10173816" cy="2640532"/>
+          </a:xfrm>
+          <a:prstGeom prst="roundRect">
+            <a:avLst>
+              <a:gd name="adj" fmla="val 4167"/>
+            </a:avLst>
+          </a:prstGeom>
+          <a:solidFill>
+            <a:srgbClr val="FFFFFF"/>
+          </a:solidFill>
+          <a:ln w="76200" cap="sq">
+            <a:solidFill>
+              <a:srgbClr val="292929"/>
+            </a:solidFill>
+            <a:miter lim="800000"/>
+          </a:ln>
+          <a:effectLst>
+            <a:reflection blurRad="12700" stA="28000" endPos="28000" dist="5000" dir="5400000" sy="-100000" algn="bl" rotWithShape="0"/>
+          </a:effectLst>
+          <a:scene3d>
+            <a:camera prst="orthographicFront"/>
+            <a:lightRig rig="threePt" dir="t">
+              <a:rot lat="0" lon="0" rev="2700000"/>
+            </a:lightRig>
+          </a:scene3d>
+          <a:sp3d>
+            <a:bevelT h="38100"/>
+            <a:contourClr>
+              <a:srgbClr val="C0C0C0"/>
+            </a:contourClr>
+          </a:sp3d>
+        </p:spPr>
+      </p:pic>
+      <p:sp>
+        <p:nvSpPr>
+          <p:cNvPr id="23" name="Google Shape;140;p11">
+            <a:extLst>
+              <a:ext uri="{FF2B5EF4-FFF2-40B4-BE49-F238E27FC236}">
+                <a16:creationId xmlns:a16="http://schemas.microsoft.com/office/drawing/2014/main" id="{BBC1A0BC-6106-0C3A-9A72-D91F73DE4A93}"/>
+              </a:ext>
+            </a:extLst>
+          </p:cNvPr>
+          <p:cNvSpPr txBox="1"/>
+          <p:nvPr/>
+        </p:nvSpPr>
+        <p:spPr>
+          <a:xfrm>
+            <a:off x="726021" y="6628366"/>
+            <a:ext cx="3687777" cy="2862282"/>
+          </a:xfrm>
+          <a:prstGeom prst="rect">
+            <a:avLst/>
+          </a:prstGeom>
+          <a:noFill/>
+          <a:ln>
+            <a:noFill/>
+          </a:ln>
+        </p:spPr>
+        <p:txBody>
+          <a:bodyPr spcFirstLastPara="1" wrap="square" lIns="91425" tIns="45700" rIns="91425" bIns="45700" anchor="t" anchorCtr="0">
+            <a:spAutoFit/>
+          </a:bodyPr>
+          <a:lstStyle/>
+          <a:p>
+            <a:pPr marL="0" lvl="0" indent="0" algn="l" rtl="0">
+              <a:spcBef>
+                <a:spcPts val="0"/>
+              </a:spcBef>
+              <a:spcAft>
+                <a:spcPts val="0"/>
+              </a:spcAft>
+              <a:buClr>
+                <a:schemeClr val="lt1"/>
+              </a:buClr>
+              <a:buSzPts val="1800"/>
+              <a:buFont typeface="Arial"/>
+              <a:buNone/>
+            </a:pPr>
+            <a:r>
+              <a:rPr lang="fr-FR" sz="2000" b="0" i="0" dirty="0" err="1">
+                <a:solidFill>
+                  <a:schemeClr val="lt1"/>
+                </a:solidFill>
+                <a:latin typeface="Arial"/>
+                <a:ea typeface="Arial"/>
+                <a:cs typeface="Arial"/>
+                <a:sym typeface="Arial"/>
+              </a:rPr>
+              <a:t>Through</a:t>
+            </a:r>
+            <a:r>
+              <a:rPr lang="fr-FR" sz="2000" b="0" i="0" dirty="0">
+                <a:solidFill>
+                  <a:schemeClr val="lt1"/>
+                </a:solidFill>
+                <a:latin typeface="Arial"/>
+                <a:ea typeface="Arial"/>
+                <a:cs typeface="Arial"/>
+                <a:sym typeface="Arial"/>
+              </a:rPr>
+              <a:t> </a:t>
+            </a:r>
+            <a:r>
+              <a:rPr lang="fr-FR" sz="2000" b="0" i="0" dirty="0" err="1">
+                <a:solidFill>
+                  <a:schemeClr val="lt1"/>
+                </a:solidFill>
+                <a:latin typeface="Arial"/>
+                <a:ea typeface="Arial"/>
+                <a:cs typeface="Arial"/>
+                <a:sym typeface="Arial"/>
+              </a:rPr>
+              <a:t>correlation</a:t>
+            </a:r>
+            <a:r>
+              <a:rPr lang="fr-FR" sz="2000" b="0" i="0" dirty="0">
+                <a:solidFill>
+                  <a:schemeClr val="lt1"/>
+                </a:solidFill>
+                <a:latin typeface="Arial"/>
+                <a:ea typeface="Arial"/>
+                <a:cs typeface="Arial"/>
+                <a:sym typeface="Arial"/>
+              </a:rPr>
+              <a:t> of </a:t>
+            </a:r>
+            <a:r>
+              <a:rPr lang="fr-FR" sz="2000" b="0" i="0" dirty="0" err="1">
+                <a:solidFill>
+                  <a:schemeClr val="lt1"/>
+                </a:solidFill>
+                <a:latin typeface="Arial"/>
+                <a:ea typeface="Arial"/>
+                <a:cs typeface="Arial"/>
+                <a:sym typeface="Arial"/>
+              </a:rPr>
+              <a:t>our</a:t>
+            </a:r>
+            <a:r>
+              <a:rPr lang="fr-FR" sz="2000" b="0" i="0" dirty="0">
+                <a:solidFill>
+                  <a:schemeClr val="lt1"/>
+                </a:solidFill>
+                <a:latin typeface="Arial"/>
+                <a:ea typeface="Arial"/>
+                <a:cs typeface="Arial"/>
+                <a:sym typeface="Arial"/>
+              </a:rPr>
+              <a:t> </a:t>
+            </a:r>
+            <a:r>
+              <a:rPr lang="fr-FR" sz="2000" b="0" i="0" dirty="0" err="1">
+                <a:solidFill>
+                  <a:schemeClr val="lt1"/>
+                </a:solidFill>
+                <a:latin typeface="Arial"/>
+                <a:ea typeface="Arial"/>
+                <a:cs typeface="Arial"/>
+                <a:sym typeface="Arial"/>
+              </a:rPr>
+              <a:t>findings</a:t>
+            </a:r>
+            <a:r>
+              <a:rPr lang="fr-FR" sz="2000" b="0" i="0" dirty="0">
+                <a:solidFill>
+                  <a:schemeClr val="lt1"/>
+                </a:solidFill>
+                <a:latin typeface="Arial"/>
+                <a:ea typeface="Arial"/>
+                <a:cs typeface="Arial"/>
+                <a:sym typeface="Arial"/>
+              </a:rPr>
+              <a:t>, the </a:t>
+            </a:r>
+            <a:r>
+              <a:rPr lang="fr-FR" sz="2000" b="1" i="0" dirty="0">
+                <a:solidFill>
+                  <a:schemeClr val="lt1"/>
+                </a:solidFill>
+                <a:latin typeface="Arial"/>
+                <a:ea typeface="Arial"/>
+                <a:cs typeface="Arial"/>
+                <a:sym typeface="Arial"/>
+              </a:rPr>
+              <a:t>4 </a:t>
+            </a:r>
+            <a:r>
+              <a:rPr lang="fr-FR" sz="2000" b="1" dirty="0" err="1">
+                <a:solidFill>
+                  <a:schemeClr val="lt1"/>
+                </a:solidFill>
+                <a:latin typeface="Arial"/>
+                <a:ea typeface="Arial"/>
+                <a:cs typeface="Arial"/>
+                <a:sym typeface="Arial"/>
+              </a:rPr>
+              <a:t>Attacker</a:t>
+            </a:r>
+            <a:r>
+              <a:rPr lang="fr-FR" sz="2000" b="1" dirty="0">
+                <a:solidFill>
+                  <a:schemeClr val="lt1"/>
+                </a:solidFill>
+                <a:latin typeface="Arial"/>
+                <a:ea typeface="Arial"/>
+                <a:cs typeface="Arial"/>
+                <a:sym typeface="Arial"/>
+              </a:rPr>
+              <a:t> </a:t>
+            </a:r>
+            <a:r>
+              <a:rPr lang="fr-FR" sz="2000" b="1" i="0" dirty="0">
+                <a:solidFill>
+                  <a:schemeClr val="lt1"/>
+                </a:solidFill>
+                <a:latin typeface="Arial"/>
+                <a:ea typeface="Arial"/>
+                <a:cs typeface="Arial"/>
+                <a:sym typeface="Arial"/>
+              </a:rPr>
+              <a:t>servers</a:t>
+            </a:r>
+            <a:r>
+              <a:rPr lang="fr-FR" sz="2000" b="0" i="0" dirty="0">
+                <a:solidFill>
+                  <a:schemeClr val="lt1"/>
+                </a:solidFill>
+                <a:latin typeface="Arial"/>
+                <a:ea typeface="Arial"/>
+                <a:cs typeface="Arial"/>
+                <a:sym typeface="Arial"/>
+              </a:rPr>
+              <a:t> are:</a:t>
+            </a:r>
+            <a:endParaRPr sz="2000" dirty="0">
+              <a:solidFill>
+                <a:schemeClr val="lt1"/>
+              </a:solidFill>
+              <a:latin typeface="Arial"/>
+              <a:ea typeface="Arial"/>
+              <a:cs typeface="Arial"/>
+              <a:sym typeface="Arial"/>
+            </a:endParaRPr>
+          </a:p>
+          <a:p>
+            <a:pPr marL="0" lvl="0" indent="0" algn="l" rtl="0">
+              <a:spcBef>
+                <a:spcPts val="1200"/>
+              </a:spcBef>
+              <a:spcAft>
+                <a:spcPts val="0"/>
+              </a:spcAft>
+              <a:buClr>
+                <a:schemeClr val="lt1"/>
+              </a:buClr>
+              <a:buSzPts val="1800"/>
+              <a:buFont typeface="Arial"/>
+              <a:buNone/>
+            </a:pPr>
+            <a:r>
+              <a:rPr lang="fr-FR" sz="2000" b="0" i="0" dirty="0">
+                <a:solidFill>
+                  <a:schemeClr val="lt1"/>
+                </a:solidFill>
+                <a:latin typeface="Arial"/>
+                <a:ea typeface="Arial"/>
+                <a:cs typeface="Arial"/>
+                <a:sym typeface="Arial"/>
+              </a:rPr>
+              <a:t>72.5.43.29</a:t>
+            </a:r>
+            <a:r>
+              <a:rPr lang="fr-FR" sz="2000" dirty="0">
+                <a:solidFill>
+                  <a:schemeClr val="lt1"/>
+                </a:solidFill>
+                <a:latin typeface="Arial"/>
+                <a:ea typeface="Arial"/>
+                <a:cs typeface="Arial"/>
+                <a:sym typeface="Arial"/>
+              </a:rPr>
+              <a:t>,</a:t>
+            </a:r>
+          </a:p>
+          <a:p>
+            <a:pPr marL="0" lvl="0" indent="0" algn="l" rtl="0">
+              <a:spcBef>
+                <a:spcPts val="1200"/>
+              </a:spcBef>
+              <a:spcAft>
+                <a:spcPts val="0"/>
+              </a:spcAft>
+              <a:buClr>
+                <a:schemeClr val="lt1"/>
+              </a:buClr>
+              <a:buSzPts val="1800"/>
+              <a:buFont typeface="Arial"/>
+              <a:buNone/>
+            </a:pPr>
+            <a:r>
+              <a:rPr lang="fr-FR" sz="2000" b="0" i="0" dirty="0">
+                <a:solidFill>
+                  <a:schemeClr val="lt1"/>
+                </a:solidFill>
+                <a:latin typeface="Arial"/>
+                <a:ea typeface="Arial"/>
+                <a:cs typeface="Arial"/>
+                <a:sym typeface="Arial"/>
+              </a:rPr>
+              <a:t>104.21.55.70</a:t>
+            </a:r>
+            <a:r>
+              <a:rPr lang="fr-FR" sz="2000" dirty="0">
+                <a:solidFill>
+                  <a:schemeClr val="lt1"/>
+                </a:solidFill>
+                <a:latin typeface="Arial"/>
+                <a:ea typeface="Arial"/>
+                <a:cs typeface="Arial"/>
+                <a:sym typeface="Arial"/>
+              </a:rPr>
+              <a:t>,</a:t>
+            </a:r>
+          </a:p>
+          <a:p>
+            <a:pPr marL="0" lvl="0" indent="0" algn="l" rtl="0">
+              <a:spcBef>
+                <a:spcPts val="1200"/>
+              </a:spcBef>
+              <a:spcAft>
+                <a:spcPts val="0"/>
+              </a:spcAft>
+              <a:buClr>
+                <a:schemeClr val="lt1"/>
+              </a:buClr>
+              <a:buSzPts val="1800"/>
+              <a:buFont typeface="Arial"/>
+              <a:buNone/>
+            </a:pPr>
+            <a:r>
+              <a:rPr lang="fr-FR" sz="2000" b="0" i="0" dirty="0">
+                <a:solidFill>
+                  <a:schemeClr val="lt1"/>
+                </a:solidFill>
+                <a:latin typeface="Arial"/>
+                <a:ea typeface="Arial"/>
+                <a:cs typeface="Arial"/>
+                <a:sym typeface="Arial"/>
+              </a:rPr>
+              <a:t>23.220.103.8</a:t>
+            </a:r>
+            <a:r>
+              <a:rPr lang="fr-FR" sz="2000" dirty="0">
+                <a:solidFill>
+                  <a:schemeClr val="lt1"/>
+                </a:solidFill>
+                <a:latin typeface="Arial"/>
+                <a:ea typeface="Arial"/>
+                <a:cs typeface="Arial"/>
+                <a:sym typeface="Arial"/>
+              </a:rPr>
+              <a:t>,</a:t>
+            </a:r>
+          </a:p>
+          <a:p>
+            <a:pPr marL="0" lvl="0" indent="0" algn="l" rtl="0">
+              <a:spcBef>
+                <a:spcPts val="1200"/>
+              </a:spcBef>
+              <a:spcAft>
+                <a:spcPts val="0"/>
+              </a:spcAft>
+              <a:buClr>
+                <a:schemeClr val="lt1"/>
+              </a:buClr>
+              <a:buSzPts val="1800"/>
+              <a:buFont typeface="Arial"/>
+              <a:buNone/>
+            </a:pPr>
+            <a:r>
+              <a:rPr lang="fr-FR" sz="2000" b="0" i="0" dirty="0">
+                <a:solidFill>
+                  <a:schemeClr val="lt1"/>
+                </a:solidFill>
+                <a:latin typeface="Arial"/>
+                <a:ea typeface="Arial"/>
+                <a:cs typeface="Arial"/>
+                <a:sym typeface="Arial"/>
+              </a:rPr>
+              <a:t>23.220.103.18</a:t>
+            </a:r>
+            <a:endParaRPr sz="2000" b="0" i="0" dirty="0">
+              <a:solidFill>
+                <a:schemeClr val="lt1"/>
+              </a:solidFill>
+              <a:latin typeface="Arial"/>
+              <a:ea typeface="Arial"/>
+              <a:cs typeface="Arial"/>
+              <a:sym typeface="Arial"/>
+            </a:endParaRPr>
+          </a:p>
+        </p:txBody>
+      </p:sp>
+      <p:pic>
+        <p:nvPicPr>
+          <p:cNvPr id="24" name="Google Shape;142;p11"/>
+          <p:cNvPicPr preferRelativeResize="0"/>
+          <p:nvPr/>
+        </p:nvPicPr>
+        <p:blipFill rotWithShape="1">
+          <a:blip r:embed="rId6">
+            <a:alphaModFix/>
+          </a:blip>
+          <a:srcRect l="1526" t="3858" r="59252" b="39805"/>
+          <a:stretch>
+            <a:fillRect/>
+          </a:stretch>
+        </p:blipFill>
+        <p:spPr>
+          <a:xfrm>
+            <a:off x="11869878" y="2322030"/>
+            <a:ext cx="6189713" cy="2576812"/>
+          </a:xfrm>
+          <a:prstGeom prst="roundRect">
+            <a:avLst>
+              <a:gd name="adj" fmla="val 8594"/>
+            </a:avLst>
+          </a:prstGeom>
+          <a:solidFill>
+            <a:srgbClr val="FFFFFF">
+              <a:shade val="85000"/>
+            </a:srgbClr>
+          </a:solidFill>
+          <a:ln>
+            <a:noFill/>
+          </a:ln>
+          <a:effectLst>
+            <a:reflection blurRad="12700" stA="38000" endPos="28000" dist="5000" dir="5400000" sy="-100000" algn="bl" rotWithShape="0"/>
+          </a:effectLst>
+        </p:spPr>
+      </p:pic>
+      <p:sp>
+        <p:nvSpPr>
+          <p:cNvPr id="28" name="ZoneTexte 27">
+            <a:extLst>
+              <a:ext uri="{FF2B5EF4-FFF2-40B4-BE49-F238E27FC236}">
+                <a16:creationId xmlns:a16="http://schemas.microsoft.com/office/drawing/2014/main" id="{34F6BBD2-F2D2-C2DD-625B-4BAED5751129}"/>
+              </a:ext>
+            </a:extLst>
+          </p:cNvPr>
+          <p:cNvSpPr txBox="1"/>
+          <p:nvPr/>
+        </p:nvSpPr>
+        <p:spPr>
+          <a:xfrm>
+            <a:off x="12012663" y="4930524"/>
+            <a:ext cx="5916108" cy="646331"/>
+          </a:xfrm>
+          <a:prstGeom prst="rect">
+            <a:avLst/>
+          </a:prstGeom>
+          <a:noFill/>
+        </p:spPr>
+        <p:txBody>
+          <a:bodyPr wrap="square">
+            <a:spAutoFit/>
+          </a:bodyPr>
+          <a:lstStyle/>
+          <a:p>
+            <a:r>
+              <a:rPr lang="fr-FR" sz="1800" dirty="0" err="1">
+                <a:solidFill>
+                  <a:schemeClr val="bg1"/>
+                </a:solidFill>
+              </a:rPr>
+              <a:t>Query</a:t>
+            </a:r>
+            <a:r>
+              <a:rPr lang="fr-FR" sz="1800" dirty="0">
+                <a:solidFill>
+                  <a:schemeClr val="bg1"/>
+                </a:solidFill>
+              </a:rPr>
+              <a:t> identifies the </a:t>
+            </a:r>
+            <a:r>
+              <a:rPr lang="fr-FR" sz="1800" dirty="0" err="1">
+                <a:solidFill>
+                  <a:schemeClr val="bg1"/>
+                </a:solidFill>
+              </a:rPr>
+              <a:t>communiation</a:t>
+            </a:r>
+            <a:r>
+              <a:rPr lang="fr-FR" sz="1800" dirty="0">
+                <a:solidFill>
+                  <a:schemeClr val="bg1"/>
+                </a:solidFill>
+              </a:rPr>
+              <a:t> pattern </a:t>
+            </a:r>
+            <a:r>
+              <a:rPr lang="fr-FR" sz="1800" dirty="0" err="1">
+                <a:solidFill>
+                  <a:schemeClr val="bg1"/>
+                </a:solidFill>
+              </a:rPr>
+              <a:t>between</a:t>
+            </a:r>
+            <a:r>
+              <a:rPr lang="fr-FR" sz="1800" dirty="0">
+                <a:solidFill>
+                  <a:schemeClr val="bg1"/>
+                </a:solidFill>
+              </a:rPr>
+              <a:t> the </a:t>
+            </a:r>
+            <a:r>
+              <a:rPr lang="fr-FR" sz="1800" dirty="0" err="1">
+                <a:solidFill>
+                  <a:schemeClr val="bg1"/>
+                </a:solidFill>
+              </a:rPr>
+              <a:t>infected</a:t>
+            </a:r>
+            <a:r>
+              <a:rPr lang="fr-FR" sz="1800" dirty="0">
+                <a:solidFill>
+                  <a:schemeClr val="bg1"/>
+                </a:solidFill>
+              </a:rPr>
+              <a:t> host and </a:t>
+            </a:r>
+            <a:r>
+              <a:rPr lang="fr-FR" sz="1800" dirty="0" err="1">
+                <a:solidFill>
+                  <a:schemeClr val="bg1"/>
+                </a:solidFill>
+              </a:rPr>
+              <a:t>known</a:t>
+            </a:r>
+            <a:r>
+              <a:rPr lang="fr-FR" sz="1800" dirty="0">
+                <a:solidFill>
+                  <a:schemeClr val="bg1"/>
+                </a:solidFill>
+              </a:rPr>
+              <a:t> </a:t>
+            </a:r>
+            <a:r>
+              <a:rPr lang="fr-FR" sz="1800" dirty="0" err="1">
+                <a:solidFill>
+                  <a:schemeClr val="bg1"/>
+                </a:solidFill>
+              </a:rPr>
+              <a:t>malicious</a:t>
+            </a:r>
+            <a:r>
+              <a:rPr lang="fr-FR" sz="1800" dirty="0">
+                <a:solidFill>
+                  <a:schemeClr val="bg1"/>
+                </a:solidFill>
+              </a:rPr>
+              <a:t> servers</a:t>
+            </a:r>
+          </a:p>
+        </p:txBody>
+      </p:sp>
+    </p:spTree>
+  </p:cSld>
+  <p:clrMapOvr>
+    <a:masterClrMapping/>
+  </p:clrMapOvr>
+</p:sld>
+</file>
+
+<file path=ppt/slides/slide9.xml><?xml version="1.0" encoding="utf-8"?>
+<p:sld xmlns:a="http://schemas.openxmlformats.org/drawingml/2006/main" xmlns:r="http://schemas.openxmlformats.org/officeDocument/2006/relationships" xmlns:p="http://schemas.openxmlformats.org/presentationml/2006/main">
+  <p:cSld>
+    <p:spTree>
+      <p:nvGrpSpPr>
+        <p:cNvPr id="1" name="Shape 159"/>
+        <p:cNvGrpSpPr/>
+        <p:nvPr/>
+      </p:nvGrpSpPr>
+      <p:grpSpPr>
+        <a:xfrm>
+          <a:off x="0" y="0"/>
+          <a:ext cx="0" cy="0"/>
+          <a:chOff x="0" y="0"/>
+          <a:chExt cx="0" cy="0"/>
+        </a:xfrm>
+      </p:grpSpPr>
+      <p:pic>
+        <p:nvPicPr>
+          <p:cNvPr id="160" name="Google Shape;160;p16"/>
           <p:cNvPicPr preferRelativeResize="0"/>
           <p:nvPr/>
         </p:nvPicPr>
@@ -18572,7 +20849,7 @@
       </p:pic>
       <p:sp>
         <p:nvSpPr>
-          <p:cNvPr id="110" name="Google Shape;110;p8"/>
+          <p:cNvPr id="161" name="Google Shape;161;p16"/>
           <p:cNvSpPr txBox="1">
             <a:spLocks noGrp="1"/>
           </p:cNvSpPr>
@@ -18582,8 +20859,8 @@
         </p:nvSpPr>
         <p:spPr>
           <a:xfrm>
-            <a:off x="914400" y="0"/>
-            <a:ext cx="15633700" cy="1844736"/>
+            <a:off x="507720" y="190500"/>
+            <a:ext cx="17791166" cy="1998624"/>
           </a:xfrm>
           <a:prstGeom prst="rect">
             <a:avLst/>
@@ -18599,7 +20876,10 @@
           </a:bodyPr>
           <a:lstStyle/>
           <a:p>
-            <a:pPr marL="0" lvl="0" indent="0" algn="l" rtl="0">
+            <a:pPr marL="12700" lvl="0" indent="0" algn="l" rtl="0">
+              <a:lnSpc>
+                <a:spcPct val="100000"/>
+              </a:lnSpc>
               <a:spcBef>
                 <a:spcPts val="0"/>
               </a:spcBef>
@@ -18609,22 +20889,31 @@
               <a:buNone/>
             </a:pPr>
             <a:r>
-              <a:rPr lang="fr-FR" sz="5400"/>
-              <a:t>Noisiest Devices Identification</a:t>
-            </a:r>
-            <a:br>
-              <a:rPr lang="fr-FR"/>
-            </a:br>
-            <a:r>
-              <a:rPr lang="fr-FR" sz="2200" b="0">
+              <a:rPr lang="fr-FR" sz="4800">
                 <a:latin typeface="Verdana"/>
                 <a:ea typeface="Verdana"/>
                 <a:cs typeface="Verdana"/>
                 <a:sym typeface="Verdana"/>
               </a:rPr>
-              <a:t>Query counts packets per source IP and sorts in descending order. This reveals which hosts are generating the most traffic.</a:t>
-            </a:r>
-            <a:endParaRPr sz="2200" b="0">
+              <a:t>Attack Timeline Reconstruction</a:t>
+            </a:r>
+            <a:br>
+              <a:rPr lang="fr-FR" sz="4800">
+                <a:latin typeface="Verdana"/>
+                <a:ea typeface="Verdana"/>
+                <a:cs typeface="Verdana"/>
+                <a:sym typeface="Verdana"/>
+              </a:rPr>
+            </a:br>
+            <a:br>
+              <a:rPr lang="fr-FR" sz="3000" b="0">
+                <a:latin typeface="Verdana"/>
+                <a:ea typeface="Verdana"/>
+                <a:cs typeface="Verdana"/>
+                <a:sym typeface="Verdana"/>
+              </a:rPr>
+            </a:br>
+            <a:endParaRPr sz="3000">
               <a:latin typeface="Verdana"/>
               <a:ea typeface="Verdana"/>
               <a:cs typeface="Verdana"/>
@@ -18635,7 +20924,7 @@
       </p:sp>
       <p:pic>
         <p:nvPicPr>
-          <p:cNvPr id="111" name="Google Shape;111;p8"/>
+          <p:cNvPr id="162" name="Google Shape;162;p16"/>
           <p:cNvPicPr preferRelativeResize="0"/>
           <p:nvPr/>
         </p:nvPicPr>
@@ -18643,13 +20932,13 @@
           <a:blip r:embed="rId4">
             <a:alphaModFix/>
           </a:blip>
-          <a:srcRect/>
+          <a:srcRect t="311" r="28576" b="46946"/>
           <a:stretch/>
         </p:blipFill>
         <p:spPr>
           <a:xfrm>
-            <a:off x="571672" y="2416420"/>
-            <a:ext cx="17144655" cy="7870580"/>
+            <a:off x="6564075" y="2527280"/>
+            <a:ext cx="11734800" cy="4410074"/>
           </a:xfrm>
           <a:prstGeom prst="rect">
             <a:avLst/>
@@ -18660,39 +20949,14 @@
           </a:ln>
         </p:spPr>
       </p:pic>
-    </p:spTree>
-  </p:cSld>
-  <p:clrMapOvr>
-    <a:masterClrMapping/>
-  </p:clrMapOvr>
-</p:sld>
-</file>
-
-<file path=ppt/slides/slide9.xml><?xml version="1.0" encoding="utf-8"?>
-<p:sld xmlns:a="http://schemas.openxmlformats.org/drawingml/2006/main" xmlns:r="http://schemas.openxmlformats.org/officeDocument/2006/relationships" xmlns:p="http://schemas.openxmlformats.org/presentationml/2006/main">
-  <p:cSld>
-    <p:spTree>
-      <p:nvGrpSpPr>
-        <p:cNvPr id="1" name="Shape 115"/>
-        <p:cNvGrpSpPr/>
-        <p:nvPr/>
-      </p:nvGrpSpPr>
-      <p:grpSpPr>
-        <a:xfrm>
-          <a:off x="0" y="0"/>
-          <a:ext cx="0" cy="0"/>
-          <a:chOff x="0" y="0"/>
-          <a:chExt cx="0" cy="0"/>
-        </a:xfrm>
-      </p:grpSpPr>
       <p:pic>
         <p:nvPicPr>
-          <p:cNvPr id="116" name="Google Shape;116;p9"/>
+          <p:cNvPr id="163" name="Google Shape;163;p16"/>
           <p:cNvPicPr preferRelativeResize="0"/>
           <p:nvPr/>
         </p:nvPicPr>
         <p:blipFill rotWithShape="1">
-          <a:blip r:embed="rId3">
+          <a:blip r:embed="rId5">
             <a:alphaModFix/>
           </a:blip>
           <a:srcRect/>
@@ -18700,8 +20964,8 @@
         </p:blipFill>
         <p:spPr>
           <a:xfrm>
-            <a:off x="0" y="0"/>
-            <a:ext cx="146399" cy="10286999"/>
+            <a:off x="4653068" y="6937353"/>
+            <a:ext cx="13645799" cy="3349647"/>
           </a:xfrm>
           <a:prstGeom prst="rect">
             <a:avLst/>
@@ -18714,102 +20978,14 @@
       </p:pic>
       <p:sp>
         <p:nvSpPr>
-          <p:cNvPr id="117" name="Google Shape;117;p9"/>
-          <p:cNvSpPr txBox="1">
-            <a:spLocks noGrp="1"/>
-          </p:cNvSpPr>
-          <p:nvPr>
-            <p:ph type="title"/>
-          </p:nvPr>
-        </p:nvSpPr>
-        <p:spPr>
-          <a:xfrm>
-            <a:off x="778329" y="191592"/>
-            <a:ext cx="15633700" cy="2029402"/>
-          </a:xfrm>
-          <a:prstGeom prst="rect">
-            <a:avLst/>
-          </a:prstGeom>
-          <a:noFill/>
-          <a:ln>
-            <a:noFill/>
-          </a:ln>
-        </p:spPr>
-        <p:txBody>
-          <a:bodyPr spcFirstLastPara="1" wrap="square" lIns="0" tIns="333375" rIns="0" bIns="0" anchor="t" anchorCtr="0">
-            <a:spAutoFit/>
-          </a:bodyPr>
-          <a:lstStyle/>
-          <a:p>
-            <a:pPr marL="0" lvl="0" indent="0" algn="l" rtl="0">
-              <a:spcBef>
-                <a:spcPts val="0"/>
-              </a:spcBef>
-              <a:spcAft>
-                <a:spcPts val="0"/>
-              </a:spcAft>
-              <a:buNone/>
-            </a:pPr>
-            <a:r>
-              <a:rPr lang="fr-FR" sz="5400"/>
-              <a:t>External Communication Mapping</a:t>
-            </a:r>
-            <a:br>
-              <a:rPr lang="fr-FR"/>
-            </a:br>
-            <a:r>
-              <a:rPr lang="fr-FR" sz="2800"/>
-              <a:t>Reconnaissance-level analysis</a:t>
-            </a:r>
-            <a:br>
-              <a:rPr lang="fr-FR"/>
-            </a:br>
-            <a:endParaRPr sz="2800" b="0">
-              <a:latin typeface="Verdana"/>
-              <a:ea typeface="Verdana"/>
-              <a:cs typeface="Verdana"/>
-              <a:sym typeface="Verdana"/>
-            </a:endParaRPr>
-          </a:p>
-        </p:txBody>
-      </p:sp>
-      <p:pic>
-        <p:nvPicPr>
-          <p:cNvPr id="118" name="Google Shape;118;p9"/>
-          <p:cNvPicPr preferRelativeResize="0"/>
-          <p:nvPr/>
-        </p:nvPicPr>
-        <p:blipFill rotWithShape="1">
-          <a:blip r:embed="rId4">
-            <a:alphaModFix/>
-          </a:blip>
-          <a:srcRect/>
-          <a:stretch/>
-        </p:blipFill>
-        <p:spPr>
-          <a:xfrm>
-            <a:off x="2356452" y="3390900"/>
-            <a:ext cx="13575095" cy="6448741"/>
-          </a:xfrm>
-          <a:prstGeom prst="rect">
-            <a:avLst/>
-          </a:prstGeom>
-          <a:noFill/>
-          <a:ln>
-            <a:noFill/>
-          </a:ln>
-        </p:spPr>
-      </p:pic>
-      <p:sp>
-        <p:nvSpPr>
-          <p:cNvPr id="119" name="Google Shape;119;p9"/>
+          <p:cNvPr id="164" name="Google Shape;164;p16"/>
           <p:cNvSpPr txBox="1"/>
           <p:nvPr/>
         </p:nvSpPr>
         <p:spPr>
           <a:xfrm>
-            <a:off x="778329" y="2042165"/>
-            <a:ext cx="16265630" cy="1015663"/>
+            <a:off x="507720" y="3009900"/>
+            <a:ext cx="5131080" cy="1631216"/>
           </a:xfrm>
           <a:prstGeom prst="rect">
             <a:avLst/>
@@ -18835,7 +21011,57 @@
               <a:buNone/>
             </a:pPr>
             <a:r>
-              <a:rPr lang="fr-FR" sz="2000" b="0">
+              <a:rPr lang="fr-FR" sz="2000">
+                <a:solidFill>
+                  <a:schemeClr val="lt1"/>
+                </a:solidFill>
+              </a:rPr>
+              <a:t>Peak activity happened at time: 80.2 - 80.3 (between 00:10:20.200  and  00:10:20.300 UTC). The attack peaked at that specific moment with 946 packets representing the highest concentration of malicious activity. </a:t>
+            </a:r>
+            <a:endParaRPr sz="2000">
+              <a:solidFill>
+                <a:schemeClr val="lt1"/>
+              </a:solidFill>
+            </a:endParaRPr>
+          </a:p>
+        </p:txBody>
+      </p:sp>
+      <p:sp>
+        <p:nvSpPr>
+          <p:cNvPr id="165" name="Google Shape;165;p16"/>
+          <p:cNvSpPr txBox="1"/>
+          <p:nvPr/>
+        </p:nvSpPr>
+        <p:spPr>
+          <a:xfrm>
+            <a:off x="518606" y="1484187"/>
+            <a:ext cx="17388394" cy="769441"/>
+          </a:xfrm>
+          <a:prstGeom prst="rect">
+            <a:avLst/>
+          </a:prstGeom>
+          <a:noFill/>
+          <a:ln>
+            <a:noFill/>
+          </a:ln>
+        </p:spPr>
+        <p:txBody>
+          <a:bodyPr spcFirstLastPara="1" wrap="square" lIns="91425" tIns="45700" rIns="91425" bIns="45700" anchor="t" anchorCtr="0">
+            <a:spAutoFit/>
+          </a:bodyPr>
+          <a:lstStyle/>
+          <a:p>
+            <a:pPr marL="0" lvl="0" indent="0" algn="l" rtl="0">
+              <a:spcBef>
+                <a:spcPts val="0"/>
+              </a:spcBef>
+              <a:spcAft>
+                <a:spcPts val="0"/>
+              </a:spcAft>
+              <a:buNone/>
+            </a:pPr>
+            <a:r>
+              <a:rPr lang="fr-FR" sz="2200" b="0">
                 <a:solidFill>
                   <a:schemeClr val="lt1"/>
                 </a:solidFill>
@@ -18844,9 +21070,9 @@
                 <a:cs typeface="Verdana"/>
                 <a:sym typeface="Verdana"/>
               </a:rPr>
-              <a:t>Query puts focus specifically on communications leaving the internal network (10.8.15.%) by filtering for external destinations, then counts connections to each external IP. This exposes potential Attacker servers and malware distribution points. </a:t>
-            </a:r>
-            <a:endParaRPr sz="2000">
+              <a:t>Query Creates a time-series visualization of malicious activity by grouping traffic into time buckets and marking communications involving the infected host.</a:t>
+            </a:r>
+            <a:endParaRPr sz="2200">
               <a:solidFill>
                 <a:schemeClr val="lt1"/>
               </a:solidFill>

--- a/SplunkEvaluationPresentation.pptx
+++ b/SplunkEvaluationPresentation.pptx
@@ -294,7 +294,7 @@
       </p15:sldGuideLst>
     </p:ext>
     <p:ext uri="GoogleSlidesCustomDataVersion2">
-      <go:slidesCustomData xmlns="" xmlns:mc="http://schemas.openxmlformats.org/markup-compatibility/2006" xmlns:mv="urn:schemas-microsoft-com:mac:vml" xmlns:c="http://schemas.openxmlformats.org/drawingml/2006/chart" xmlns:dgm="http://schemas.openxmlformats.org/drawingml/2006/diagram" xmlns:o="urn:schemas-microsoft-com:office:office" xmlns:v="urn:schemas-microsoft-com:vml" xmlns:pvml="urn:schemas-microsoft-com:office:powerpoint" xmlns:com="http://schemas.openxmlformats.org/drawingml/2006/compatibility" xmlns:p14="http://schemas.microsoft.com/office/powerpoint/2010/main" xmlns:p15="http://schemas.microsoft.com/office/powerpoint/2012/main" xmlns:ahyp="http://schemas.microsoft.com/office/drawing/2018/hyperlinkcolor" xmlns:go="http://customooxmlschemas.google.com/" r:id="rId38" roundtripDataSignature="AMtx7mh47rL1fQnCbjzl/x4iq8XIAmQU+w=="/>
+      <go:slidesCustomData xmlns:go="http://customooxmlschemas.google.com/" xmlns:ahyp="http://schemas.microsoft.com/office/drawing/2018/hyperlinkcolor" xmlns:p15="http://schemas.microsoft.com/office/powerpoint/2012/main" xmlns:p14="http://schemas.microsoft.com/office/powerpoint/2010/main" xmlns:com="http://schemas.openxmlformats.org/drawingml/2006/compatibility" xmlns:pvml="urn:schemas-microsoft-com:office:powerpoint" xmlns:v="urn:schemas-microsoft-com:vml" xmlns:o="urn:schemas-microsoft-com:office:office" xmlns:dgm="http://schemas.openxmlformats.org/drawingml/2006/diagram" xmlns:c="http://schemas.openxmlformats.org/drawingml/2006/chart" xmlns:mv="urn:schemas-microsoft-com:mac:vml" xmlns:mc="http://schemas.openxmlformats.org/markup-compatibility/2006" xmlns="" r:id="rId38" roundtripDataSignature="AMtx7mh47rL1fQnCbjzl/x4iq8XIAmQU+w=="/>
     </p:ext>
   </p:extLst>
 </p:presentation>
@@ -18466,7 +18466,7 @@
         </p:nvSpPr>
         <p:spPr>
           <a:xfrm>
-            <a:off x="1376855" y="1599678"/>
+            <a:off x="1376855" y="1932367"/>
             <a:ext cx="4253592" cy="1938992"/>
           </a:xfrm>
           <a:prstGeom prst="rect">
@@ -18629,7 +18629,7 @@
         </p:nvSpPr>
         <p:spPr>
           <a:xfrm>
-            <a:off x="1376855" y="3760621"/>
+            <a:off x="1376855" y="4264359"/>
             <a:ext cx="8603473" cy="1569660"/>
           </a:xfrm>
           <a:prstGeom prst="rect">
@@ -18844,8 +18844,8 @@
         </p:nvSpPr>
         <p:spPr>
           <a:xfrm>
-            <a:off x="1376855" y="5741549"/>
-            <a:ext cx="4253592" cy="1938992"/>
+            <a:off x="1376855" y="6116281"/>
+            <a:ext cx="4762688" cy="1200329"/>
           </a:xfrm>
           <a:prstGeom prst="rect">
             <a:avLst/>
@@ -18889,23 +18889,7 @@
                   <a:schemeClr val="bg1"/>
                 </a:solidFill>
               </a:rPr>
-              <a:t>Total </a:t>
-            </a:r>
-            <a:r>
-              <a:rPr lang="fr-FR" sz="2400" dirty="0" err="1">
-                <a:solidFill>
-                  <a:schemeClr val="bg1"/>
-                </a:solidFill>
-              </a:rPr>
-              <a:t>Packets</a:t>
-            </a:r>
-            <a:r>
-              <a:rPr lang="fr-FR" sz="2400" dirty="0">
-                <a:solidFill>
-                  <a:schemeClr val="bg1"/>
-                </a:solidFill>
-              </a:rPr>
-              <a:t>: 18,189</a:t>
+              <a:t>Top destination: 72.5.43.29</a:t>
             </a:r>
           </a:p>
           <a:p>
@@ -18917,70 +18901,12 @@
               <a:buChar char="•"/>
             </a:pPr>
             <a:r>
-              <a:rPr lang="fr-FR" sz="2400" dirty="0">
+              <a:rPr lang="en-US" sz="2400" dirty="0">
                 <a:solidFill>
                   <a:schemeClr val="bg1"/>
                 </a:solidFill>
               </a:rPr>
-              <a:t>Unique Sources: 72</a:t>
-            </a:r>
-          </a:p>
-          <a:p>
-            <a:pPr marL="342900" indent="-342900">
-              <a:buClr>
-                <a:schemeClr val="bg1"/>
-              </a:buClr>
-              <a:buFont typeface="Arial" panose="020B0604020202020204" pitchFamily="34" charset="0"/>
-              <a:buChar char="•"/>
-            </a:pPr>
-            <a:r>
-              <a:rPr lang="fr-FR" sz="2400" dirty="0">
-                <a:solidFill>
-                  <a:schemeClr val="bg1"/>
-                </a:solidFill>
-              </a:rPr>
-              <a:t>Unique Destinations: 78</a:t>
-            </a:r>
-          </a:p>
-          <a:p>
-            <a:pPr marL="342900" indent="-342900">
-              <a:buClr>
-                <a:schemeClr val="bg1"/>
-              </a:buClr>
-              <a:buFont typeface="Arial" panose="020B0604020202020204" pitchFamily="34" charset="0"/>
-              <a:buChar char="•"/>
-            </a:pPr>
-            <a:r>
-              <a:rPr lang="fr-FR" sz="2400" dirty="0" err="1">
-                <a:solidFill>
-                  <a:schemeClr val="bg1"/>
-                </a:solidFill>
-              </a:rPr>
-              <a:t>Avg</a:t>
-            </a:r>
-            <a:r>
-              <a:rPr lang="fr-FR" sz="2400" dirty="0">
-                <a:solidFill>
-                  <a:schemeClr val="bg1"/>
-                </a:solidFill>
-              </a:rPr>
-              <a:t> </a:t>
-            </a:r>
-            <a:r>
-              <a:rPr lang="fr-FR" sz="2400" dirty="0" err="1">
-                <a:solidFill>
-                  <a:schemeClr val="bg1"/>
-                </a:solidFill>
-              </a:rPr>
-              <a:t>Packet</a:t>
-            </a:r>
-            <a:r>
-              <a:rPr lang="fr-FR" sz="2400" dirty="0">
-                <a:solidFill>
-                  <a:schemeClr val="bg1"/>
-                </a:solidFill>
-              </a:rPr>
-              <a:t> Size: 642 bytes</a:t>
+              <a:t>1,844 packets to this single IP </a:t>
             </a:r>
           </a:p>
         </p:txBody>
